--- a/Final/Spectrometer_ilustration.pptx
+++ b/Final/Spectrometer_ilustration.pptx
@@ -104,6 +104,11 @@
       </a:defRPr>
     </a:lvl9pPr>
   </p:defaultTextStyle>
+  <p:extLst>
+    <p:ext uri="{EFAFB233-063F-42B5-8137-9DF3F51BA10A}">
+      <p15:sldGuideLst xmlns:p15="http://schemas.microsoft.com/office/powerpoint/2012/main"/>
+    </p:ext>
+  </p:extLst>
 </p:presentation>
 </file>
 
@@ -238,7 +243,7 @@
           <a:p>
             <a:fld id="{33EE14CC-7B43-4CCD-ADEA-0932A6DC3AEC}" type="datetimeFigureOut">
               <a:rPr lang="en-US" smtClean="0"/>
-              <a:t>10/2/2026</a:t>
+              <a:t>10/3/2026</a:t>
             </a:fld>
             <a:endParaRPr lang="en-US"/>
           </a:p>
@@ -408,7 +413,7 @@
           <a:p>
             <a:fld id="{33EE14CC-7B43-4CCD-ADEA-0932A6DC3AEC}" type="datetimeFigureOut">
               <a:rPr lang="en-US" smtClean="0"/>
-              <a:t>10/2/2026</a:t>
+              <a:t>10/3/2026</a:t>
             </a:fld>
             <a:endParaRPr lang="en-US"/>
           </a:p>
@@ -588,7 +593,7 @@
           <a:p>
             <a:fld id="{33EE14CC-7B43-4CCD-ADEA-0932A6DC3AEC}" type="datetimeFigureOut">
               <a:rPr lang="en-US" smtClean="0"/>
-              <a:t>10/2/2026</a:t>
+              <a:t>10/3/2026</a:t>
             </a:fld>
             <a:endParaRPr lang="en-US"/>
           </a:p>
@@ -758,7 +763,7 @@
           <a:p>
             <a:fld id="{33EE14CC-7B43-4CCD-ADEA-0932A6DC3AEC}" type="datetimeFigureOut">
               <a:rPr lang="en-US" smtClean="0"/>
-              <a:t>10/2/2026</a:t>
+              <a:t>10/3/2026</a:t>
             </a:fld>
             <a:endParaRPr lang="en-US"/>
           </a:p>
@@ -1004,7 +1009,7 @@
           <a:p>
             <a:fld id="{33EE14CC-7B43-4CCD-ADEA-0932A6DC3AEC}" type="datetimeFigureOut">
               <a:rPr lang="en-US" smtClean="0"/>
-              <a:t>10/2/2026</a:t>
+              <a:t>10/3/2026</a:t>
             </a:fld>
             <a:endParaRPr lang="en-US"/>
           </a:p>
@@ -1236,7 +1241,7 @@
           <a:p>
             <a:fld id="{33EE14CC-7B43-4CCD-ADEA-0932A6DC3AEC}" type="datetimeFigureOut">
               <a:rPr lang="en-US" smtClean="0"/>
-              <a:t>10/2/2026</a:t>
+              <a:t>10/3/2026</a:t>
             </a:fld>
             <a:endParaRPr lang="en-US"/>
           </a:p>
@@ -1603,7 +1608,7 @@
           <a:p>
             <a:fld id="{33EE14CC-7B43-4CCD-ADEA-0932A6DC3AEC}" type="datetimeFigureOut">
               <a:rPr lang="en-US" smtClean="0"/>
-              <a:t>10/2/2026</a:t>
+              <a:t>10/3/2026</a:t>
             </a:fld>
             <a:endParaRPr lang="en-US"/>
           </a:p>
@@ -1721,7 +1726,7 @@
           <a:p>
             <a:fld id="{33EE14CC-7B43-4CCD-ADEA-0932A6DC3AEC}" type="datetimeFigureOut">
               <a:rPr lang="en-US" smtClean="0"/>
-              <a:t>10/2/2026</a:t>
+              <a:t>10/3/2026</a:t>
             </a:fld>
             <a:endParaRPr lang="en-US"/>
           </a:p>
@@ -1816,7 +1821,7 @@
           <a:p>
             <a:fld id="{33EE14CC-7B43-4CCD-ADEA-0932A6DC3AEC}" type="datetimeFigureOut">
               <a:rPr lang="en-US" smtClean="0"/>
-              <a:t>10/2/2026</a:t>
+              <a:t>10/3/2026</a:t>
             </a:fld>
             <a:endParaRPr lang="en-US"/>
           </a:p>
@@ -2093,7 +2098,7 @@
           <a:p>
             <a:fld id="{33EE14CC-7B43-4CCD-ADEA-0932A6DC3AEC}" type="datetimeFigureOut">
               <a:rPr lang="en-US" smtClean="0"/>
-              <a:t>10/2/2026</a:t>
+              <a:t>10/3/2026</a:t>
             </a:fld>
             <a:endParaRPr lang="en-US"/>
           </a:p>
@@ -2346,7 +2351,7 @@
           <a:p>
             <a:fld id="{33EE14CC-7B43-4CCD-ADEA-0932A6DC3AEC}" type="datetimeFigureOut">
               <a:rPr lang="en-US" smtClean="0"/>
-              <a:t>10/2/2026</a:t>
+              <a:t>10/3/2026</a:t>
             </a:fld>
             <a:endParaRPr lang="en-US"/>
           </a:p>
@@ -2559,7 +2564,7 @@
           <a:p>
             <a:fld id="{33EE14CC-7B43-4CCD-ADEA-0932A6DC3AEC}" type="datetimeFigureOut">
               <a:rPr lang="en-US" smtClean="0"/>
-              <a:t>10/2/2026</a:t>
+              <a:t>10/3/2026</a:t>
             </a:fld>
             <a:endParaRPr lang="en-US"/>
           </a:p>
@@ -2966,2591 +2971,60 @@
       </p:grpSpPr>
       <p:grpSp>
         <p:nvGrpSpPr>
-          <p:cNvPr id="107" name="Group 106"/>
+          <p:cNvPr id="2" name="Group 1"/>
           <p:cNvGrpSpPr/>
           <p:nvPr/>
         </p:nvGrpSpPr>
         <p:grpSpPr>
           <a:xfrm>
-            <a:off x="141351" y="517975"/>
-            <a:ext cx="11947234" cy="5049095"/>
-            <a:chOff x="141351" y="517975"/>
-            <a:chExt cx="11947234" cy="5049095"/>
+            <a:off x="5179221" y="517975"/>
+            <a:ext cx="6909364" cy="4627838"/>
+            <a:chOff x="5179221" y="517975"/>
+            <a:chExt cx="6909364" cy="4627838"/>
           </a:xfrm>
         </p:grpSpPr>
         <p:grpSp>
           <p:nvGrpSpPr>
-            <p:cNvPr id="105" name="Group 104"/>
+            <p:cNvPr id="53" name="Group 52"/>
             <p:cNvGrpSpPr/>
             <p:nvPr/>
           </p:nvGrpSpPr>
           <p:grpSpPr>
             <a:xfrm>
-              <a:off x="141351" y="517975"/>
-              <a:ext cx="11947234" cy="5049095"/>
-              <a:chOff x="141351" y="517975"/>
-              <a:chExt cx="11947234" cy="5049095"/>
+              <a:off x="5674178" y="934212"/>
+              <a:ext cx="6414407" cy="3499652"/>
+              <a:chOff x="3453492" y="642809"/>
+              <a:chExt cx="6414407" cy="3499652"/>
             </a:xfrm>
           </p:grpSpPr>
-          <p:grpSp>
-            <p:nvGrpSpPr>
-              <p:cNvPr id="99" name="Group 98"/>
-              <p:cNvGrpSpPr/>
-              <p:nvPr/>
-            </p:nvGrpSpPr>
-            <p:grpSpPr>
-              <a:xfrm>
-                <a:off x="141351" y="517975"/>
-                <a:ext cx="11947234" cy="5049095"/>
-                <a:chOff x="141351" y="517975"/>
-                <a:chExt cx="11947234" cy="5049095"/>
-              </a:xfrm>
-            </p:grpSpPr>
-            <p:grpSp>
-              <p:nvGrpSpPr>
-                <p:cNvPr id="53" name="Group 52"/>
-                <p:cNvGrpSpPr/>
-                <p:nvPr/>
-              </p:nvGrpSpPr>
-              <p:grpSpPr>
-                <a:xfrm>
-                  <a:off x="5674178" y="934212"/>
-                  <a:ext cx="6414407" cy="3499652"/>
-                  <a:chOff x="3453492" y="642809"/>
-                  <a:chExt cx="6414407" cy="3499652"/>
-                </a:xfrm>
-              </p:grpSpPr>
-              <p:sp>
-                <p:nvSpPr>
-                  <p:cNvPr id="4" name="Rectangle 3"/>
-                  <p:cNvSpPr/>
-                  <p:nvPr/>
-                </p:nvSpPr>
-                <p:spPr>
-                  <a:xfrm>
-                    <a:off x="3453492" y="1445078"/>
-                    <a:ext cx="4629150" cy="1551214"/>
-                  </a:xfrm>
-                  <a:prstGeom prst="rect">
-                    <a:avLst/>
-                  </a:prstGeom>
-                  <a:solidFill>
-                    <a:schemeClr val="bg2">
-                      <a:lumMod val="90000"/>
-                    </a:schemeClr>
-                  </a:solidFill>
-                  <a:ln>
-                    <a:solidFill>
-                      <a:schemeClr val="tx1"/>
-                    </a:solidFill>
-                  </a:ln>
-                  <a:scene3d>
-                    <a:camera prst="isometricRightUp"/>
-                    <a:lightRig rig="threePt" dir="t"/>
-                  </a:scene3d>
-                </p:spPr>
-                <p:style>
-                  <a:lnRef idx="2">
-                    <a:schemeClr val="accent1">
-                      <a:shade val="50000"/>
-                    </a:schemeClr>
-                  </a:lnRef>
-                  <a:fillRef idx="1">
-                    <a:schemeClr val="accent1"/>
-                  </a:fillRef>
-                  <a:effectRef idx="0">
-                    <a:schemeClr val="accent1"/>
-                  </a:effectRef>
-                  <a:fontRef idx="minor">
-                    <a:schemeClr val="lt1"/>
-                  </a:fontRef>
-                </p:style>
-                <p:txBody>
-                  <a:bodyPr rtlCol="0" anchor="ctr"/>
-                  <a:lstStyle/>
-                  <a:p>
-                    <a:pPr algn="ctr"/>
-                    <a:endParaRPr lang="en-US"/>
-                  </a:p>
-                </p:txBody>
-              </p:sp>
-              <p:sp>
-                <p:nvSpPr>
-                  <p:cNvPr id="5" name="Rectangle 4"/>
-                  <p:cNvSpPr/>
-                  <p:nvPr/>
-                </p:nvSpPr>
-                <p:spPr>
-                  <a:xfrm>
-                    <a:off x="5238749" y="2506436"/>
-                    <a:ext cx="4629150" cy="1551214"/>
-                  </a:xfrm>
-                  <a:prstGeom prst="rect">
-                    <a:avLst/>
-                  </a:prstGeom>
-                  <a:solidFill>
-                    <a:schemeClr val="bg2">
-                      <a:lumMod val="90000"/>
-                    </a:schemeClr>
-                  </a:solidFill>
-                  <a:ln>
-                    <a:solidFill>
-                      <a:schemeClr val="tx1"/>
-                    </a:solidFill>
-                  </a:ln>
-                  <a:scene3d>
-                    <a:camera prst="isometricRightUp"/>
-                    <a:lightRig rig="threePt" dir="t"/>
-                  </a:scene3d>
-                </p:spPr>
-                <p:style>
-                  <a:lnRef idx="2">
-                    <a:schemeClr val="accent1">
-                      <a:shade val="50000"/>
-                    </a:schemeClr>
-                  </a:lnRef>
-                  <a:fillRef idx="1">
-                    <a:schemeClr val="accent1"/>
-                  </a:fillRef>
-                  <a:effectRef idx="0">
-                    <a:schemeClr val="accent1"/>
-                  </a:effectRef>
-                  <a:fontRef idx="minor">
-                    <a:schemeClr val="lt1"/>
-                  </a:fontRef>
-                </p:style>
-                <p:txBody>
-                  <a:bodyPr rtlCol="0" anchor="ctr"/>
-                  <a:lstStyle/>
-                  <a:p>
-                    <a:pPr algn="ctr"/>
-                    <a:endParaRPr lang="en-US"/>
-                  </a:p>
-                </p:txBody>
-              </p:sp>
-              <p:grpSp>
-                <p:nvGrpSpPr>
-                  <p:cNvPr id="20" name="Group 19"/>
-                  <p:cNvGrpSpPr/>
-                  <p:nvPr/>
-                </p:nvGrpSpPr>
-                <p:grpSpPr>
-                  <a:xfrm>
-                    <a:off x="7356768" y="642809"/>
-                    <a:ext cx="1665042" cy="1365369"/>
-                    <a:chOff x="6977743" y="1249140"/>
-                    <a:chExt cx="1665042" cy="1365369"/>
-                  </a:xfrm>
-                </p:grpSpPr>
-                <p:cxnSp>
-                  <p:nvCxnSpPr>
-                    <p:cNvPr id="9" name="Straight Arrow Connector 8"/>
-                    <p:cNvCxnSpPr/>
-                    <p:nvPr/>
-                  </p:nvCxnSpPr>
-                  <p:spPr>
-                    <a:xfrm flipH="1" flipV="1">
-                      <a:off x="6977744" y="1249140"/>
-                      <a:ext cx="1665041" cy="1121835"/>
-                    </a:xfrm>
-                    <a:prstGeom prst="straightConnector1">
-                      <a:avLst/>
-                    </a:prstGeom>
-                    <a:ln w="25400">
-                      <a:solidFill>
-                        <a:schemeClr val="accent2">
-                          <a:lumMod val="75000"/>
-                        </a:schemeClr>
-                      </a:solidFill>
-                      <a:tailEnd type="triangle"/>
-                    </a:ln>
-                  </p:spPr>
-                  <p:style>
-                    <a:lnRef idx="1">
-                      <a:schemeClr val="accent1"/>
-                    </a:lnRef>
-                    <a:fillRef idx="0">
-                      <a:schemeClr val="accent1"/>
-                    </a:fillRef>
-                    <a:effectRef idx="0">
-                      <a:schemeClr val="accent1"/>
-                    </a:effectRef>
-                    <a:fontRef idx="minor">
-                      <a:schemeClr val="tx1"/>
-                    </a:fontRef>
-                  </p:style>
-                </p:cxnSp>
-                <p:cxnSp>
-                  <p:nvCxnSpPr>
-                    <p:cNvPr id="11" name="Straight Arrow Connector 10"/>
-                    <p:cNvCxnSpPr/>
-                    <p:nvPr/>
-                  </p:nvCxnSpPr>
-                  <p:spPr>
-                    <a:xfrm flipH="1" flipV="1">
-                      <a:off x="6977743" y="1783897"/>
-                      <a:ext cx="1232805" cy="830612"/>
-                    </a:xfrm>
-                    <a:prstGeom prst="straightConnector1">
-                      <a:avLst/>
-                    </a:prstGeom>
-                    <a:ln w="25400">
-                      <a:solidFill>
-                        <a:schemeClr val="accent2">
-                          <a:lumMod val="75000"/>
-                        </a:schemeClr>
-                      </a:solidFill>
-                      <a:tailEnd type="triangle"/>
-                    </a:ln>
-                  </p:spPr>
-                  <p:style>
-                    <a:lnRef idx="1">
-                      <a:schemeClr val="accent1"/>
-                    </a:lnRef>
-                    <a:fillRef idx="0">
-                      <a:schemeClr val="accent1"/>
-                    </a:fillRef>
-                    <a:effectRef idx="0">
-                      <a:schemeClr val="accent1"/>
-                    </a:effectRef>
-                    <a:fontRef idx="minor">
-                      <a:schemeClr val="tx1"/>
-                    </a:fontRef>
-                  </p:style>
-                </p:cxnSp>
-              </p:grpSp>
-              <p:grpSp>
-                <p:nvGrpSpPr>
-                  <p:cNvPr id="21" name="Group 20"/>
-                  <p:cNvGrpSpPr/>
-                  <p:nvPr/>
-                </p:nvGrpSpPr>
-                <p:grpSpPr>
-                  <a:xfrm>
-                    <a:off x="4311976" y="2424793"/>
-                    <a:ext cx="1672445" cy="1601561"/>
-                    <a:chOff x="6977744" y="1249139"/>
-                    <a:chExt cx="1672445" cy="1601561"/>
-                  </a:xfrm>
-                </p:grpSpPr>
-                <p:cxnSp>
-                  <p:nvCxnSpPr>
-                    <p:cNvPr id="22" name="Straight Arrow Connector 21"/>
-                    <p:cNvCxnSpPr/>
-                    <p:nvPr/>
-                  </p:nvCxnSpPr>
-                  <p:spPr>
-                    <a:xfrm flipH="1" flipV="1">
-                      <a:off x="6977744" y="1249139"/>
-                      <a:ext cx="1672445" cy="1126824"/>
-                    </a:xfrm>
-                    <a:prstGeom prst="straightConnector1">
-                      <a:avLst/>
-                    </a:prstGeom>
-                    <a:ln w="25400">
-                      <a:solidFill>
-                        <a:schemeClr val="accent2">
-                          <a:lumMod val="75000"/>
-                        </a:schemeClr>
-                      </a:solidFill>
-                      <a:tailEnd type="triangle"/>
-                    </a:ln>
-                  </p:spPr>
-                  <p:style>
-                    <a:lnRef idx="1">
-                      <a:schemeClr val="accent1"/>
-                    </a:lnRef>
-                    <a:fillRef idx="0">
-                      <a:schemeClr val="accent1"/>
-                    </a:fillRef>
-                    <a:effectRef idx="0">
-                      <a:schemeClr val="accent1"/>
-                    </a:effectRef>
-                    <a:fontRef idx="minor">
-                      <a:schemeClr val="tx1"/>
-                    </a:fontRef>
-                  </p:style>
-                </p:cxnSp>
-                <p:cxnSp>
-                  <p:nvCxnSpPr>
-                    <p:cNvPr id="23" name="Straight Arrow Connector 22"/>
-                    <p:cNvCxnSpPr/>
-                    <p:nvPr/>
-                  </p:nvCxnSpPr>
-                  <p:spPr>
-                    <a:xfrm flipH="1" flipV="1">
-                      <a:off x="6977744" y="1783897"/>
-                      <a:ext cx="1583361" cy="1066803"/>
-                    </a:xfrm>
-                    <a:prstGeom prst="straightConnector1">
-                      <a:avLst/>
-                    </a:prstGeom>
-                    <a:ln w="25400">
-                      <a:solidFill>
-                        <a:schemeClr val="accent2">
-                          <a:lumMod val="75000"/>
-                        </a:schemeClr>
-                      </a:solidFill>
-                      <a:tailEnd type="triangle"/>
-                    </a:ln>
-                  </p:spPr>
-                  <p:style>
-                    <a:lnRef idx="1">
-                      <a:schemeClr val="accent1"/>
-                    </a:lnRef>
-                    <a:fillRef idx="0">
-                      <a:schemeClr val="accent1"/>
-                    </a:fillRef>
-                    <a:effectRef idx="0">
-                      <a:schemeClr val="accent1"/>
-                    </a:effectRef>
-                    <a:fontRef idx="minor">
-                      <a:schemeClr val="tx1"/>
-                    </a:fontRef>
-                  </p:style>
-                </p:cxnSp>
-              </p:grpSp>
-              <p:grpSp>
-                <p:nvGrpSpPr>
-                  <p:cNvPr id="26" name="Group 25"/>
-                  <p:cNvGrpSpPr/>
-                  <p:nvPr/>
-                </p:nvGrpSpPr>
-                <p:grpSpPr>
-                  <a:xfrm>
-                    <a:off x="5691724" y="1616060"/>
-                    <a:ext cx="1665043" cy="1401224"/>
-                    <a:chOff x="6977745" y="1249140"/>
-                    <a:chExt cx="1665043" cy="1401224"/>
-                  </a:xfrm>
-                </p:grpSpPr>
-                <p:cxnSp>
-                  <p:nvCxnSpPr>
-                    <p:cNvPr id="27" name="Straight Arrow Connector 26"/>
-                    <p:cNvCxnSpPr/>
-                    <p:nvPr/>
-                  </p:nvCxnSpPr>
-                  <p:spPr>
-                    <a:xfrm flipH="1" flipV="1">
-                      <a:off x="6977745" y="1249140"/>
-                      <a:ext cx="1665043" cy="1121836"/>
-                    </a:xfrm>
-                    <a:prstGeom prst="straightConnector1">
-                      <a:avLst/>
-                    </a:prstGeom>
-                    <a:ln w="25400">
-                      <a:solidFill>
-                        <a:schemeClr val="accent2">
-                          <a:lumMod val="75000"/>
-                        </a:schemeClr>
-                      </a:solidFill>
-                      <a:tailEnd type="triangle"/>
-                    </a:ln>
-                  </p:spPr>
-                  <p:style>
-                    <a:lnRef idx="1">
-                      <a:schemeClr val="accent1"/>
-                    </a:lnRef>
-                    <a:fillRef idx="0">
-                      <a:schemeClr val="accent1"/>
-                    </a:fillRef>
-                    <a:effectRef idx="0">
-                      <a:schemeClr val="accent1"/>
-                    </a:effectRef>
-                    <a:fontRef idx="minor">
-                      <a:schemeClr val="tx1"/>
-                    </a:fontRef>
-                  </p:style>
-                </p:cxnSp>
-                <p:cxnSp>
-                  <p:nvCxnSpPr>
-                    <p:cNvPr id="28" name="Straight Arrow Connector 27"/>
-                    <p:cNvCxnSpPr/>
-                    <p:nvPr/>
-                  </p:nvCxnSpPr>
-                  <p:spPr>
-                    <a:xfrm flipH="1" flipV="1">
-                      <a:off x="6977746" y="1783897"/>
-                      <a:ext cx="1286017" cy="866467"/>
-                    </a:xfrm>
-                    <a:prstGeom prst="straightConnector1">
-                      <a:avLst/>
-                    </a:prstGeom>
-                    <a:ln w="25400">
-                      <a:solidFill>
-                        <a:schemeClr val="accent2">
-                          <a:lumMod val="75000"/>
-                        </a:schemeClr>
-                      </a:solidFill>
-                      <a:tailEnd type="triangle"/>
-                    </a:ln>
-                  </p:spPr>
-                  <p:style>
-                    <a:lnRef idx="1">
-                      <a:schemeClr val="accent1"/>
-                    </a:lnRef>
-                    <a:fillRef idx="0">
-                      <a:schemeClr val="accent1"/>
-                    </a:fillRef>
-                    <a:effectRef idx="0">
-                      <a:schemeClr val="accent1"/>
-                    </a:effectRef>
-                    <a:fontRef idx="minor">
-                      <a:schemeClr val="tx1"/>
-                    </a:fontRef>
-                  </p:style>
-                </p:cxnSp>
-              </p:grpSp>
-              <p:grpSp>
-                <p:nvGrpSpPr>
-                  <p:cNvPr id="34" name="Group 33"/>
-                  <p:cNvGrpSpPr/>
-                  <p:nvPr/>
-                </p:nvGrpSpPr>
-                <p:grpSpPr>
-                  <a:xfrm>
-                    <a:off x="5064709" y="1969486"/>
-                    <a:ext cx="1689112" cy="1412231"/>
-                    <a:chOff x="6977744" y="1249139"/>
-                    <a:chExt cx="1689112" cy="1412231"/>
-                  </a:xfrm>
-                </p:grpSpPr>
-                <p:cxnSp>
-                  <p:nvCxnSpPr>
-                    <p:cNvPr id="35" name="Straight Arrow Connector 34"/>
-                    <p:cNvCxnSpPr/>
-                    <p:nvPr/>
-                  </p:nvCxnSpPr>
-                  <p:spPr>
-                    <a:xfrm flipH="1" flipV="1">
-                      <a:off x="6977744" y="1249139"/>
-                      <a:ext cx="1689112" cy="1138054"/>
-                    </a:xfrm>
-                    <a:prstGeom prst="straightConnector1">
-                      <a:avLst/>
-                    </a:prstGeom>
-                    <a:ln w="25400">
-                      <a:tailEnd type="triangle"/>
-                    </a:ln>
-                  </p:spPr>
-                  <p:style>
-                    <a:lnRef idx="1">
-                      <a:schemeClr val="accent1"/>
-                    </a:lnRef>
-                    <a:fillRef idx="0">
-                      <a:schemeClr val="accent1"/>
-                    </a:fillRef>
-                    <a:effectRef idx="0">
-                      <a:schemeClr val="accent1"/>
-                    </a:effectRef>
-                    <a:fontRef idx="minor">
-                      <a:schemeClr val="tx1"/>
-                    </a:fontRef>
-                  </p:style>
-                </p:cxnSp>
-                <p:cxnSp>
-                  <p:nvCxnSpPr>
-                    <p:cNvPr id="36" name="Straight Arrow Connector 35"/>
-                    <p:cNvCxnSpPr/>
-                    <p:nvPr/>
-                  </p:nvCxnSpPr>
-                  <p:spPr>
-                    <a:xfrm flipH="1" flipV="1">
-                      <a:off x="6977744" y="1783897"/>
-                      <a:ext cx="1302355" cy="877473"/>
-                    </a:xfrm>
-                    <a:prstGeom prst="straightConnector1">
-                      <a:avLst/>
-                    </a:prstGeom>
-                    <a:ln w="25400">
-                      <a:tailEnd type="triangle"/>
-                    </a:ln>
-                  </p:spPr>
-                  <p:style>
-                    <a:lnRef idx="1">
-                      <a:schemeClr val="accent1"/>
-                    </a:lnRef>
-                    <a:fillRef idx="0">
-                      <a:schemeClr val="accent1"/>
-                    </a:fillRef>
-                    <a:effectRef idx="0">
-                      <a:schemeClr val="accent1"/>
-                    </a:effectRef>
-                    <a:fontRef idx="minor">
-                      <a:schemeClr val="tx1"/>
-                    </a:fontRef>
-                  </p:style>
-                </p:cxnSp>
-              </p:grpSp>
-              <p:grpSp>
-                <p:nvGrpSpPr>
-                  <p:cNvPr id="47" name="Group 46"/>
-                  <p:cNvGrpSpPr/>
-                  <p:nvPr/>
-                </p:nvGrpSpPr>
-                <p:grpSpPr>
-                  <a:xfrm>
-                    <a:off x="6477706" y="1165689"/>
-                    <a:ext cx="1665043" cy="1401224"/>
-                    <a:chOff x="6977745" y="1249140"/>
-                    <a:chExt cx="1665043" cy="1401224"/>
-                  </a:xfrm>
-                </p:grpSpPr>
-                <p:cxnSp>
-                  <p:nvCxnSpPr>
-                    <p:cNvPr id="48" name="Straight Arrow Connector 47"/>
-                    <p:cNvCxnSpPr/>
-                    <p:nvPr/>
-                  </p:nvCxnSpPr>
-                  <p:spPr>
-                    <a:xfrm flipH="1" flipV="1">
-                      <a:off x="6977745" y="1249140"/>
-                      <a:ext cx="1665043" cy="1121836"/>
-                    </a:xfrm>
-                    <a:prstGeom prst="straightConnector1">
-                      <a:avLst/>
-                    </a:prstGeom>
-                    <a:ln w="25400">
-                      <a:tailEnd type="triangle"/>
-                    </a:ln>
-                  </p:spPr>
-                  <p:style>
-                    <a:lnRef idx="1">
-                      <a:schemeClr val="accent1"/>
-                    </a:lnRef>
-                    <a:fillRef idx="0">
-                      <a:schemeClr val="accent1"/>
-                    </a:fillRef>
-                    <a:effectRef idx="0">
-                      <a:schemeClr val="accent1"/>
-                    </a:effectRef>
-                    <a:fontRef idx="minor">
-                      <a:schemeClr val="tx1"/>
-                    </a:fontRef>
-                  </p:style>
-                </p:cxnSp>
-                <p:cxnSp>
-                  <p:nvCxnSpPr>
-                    <p:cNvPr id="49" name="Straight Arrow Connector 48"/>
-                    <p:cNvCxnSpPr/>
-                    <p:nvPr/>
-                  </p:nvCxnSpPr>
-                  <p:spPr>
-                    <a:xfrm flipH="1" flipV="1">
-                      <a:off x="6977746" y="1783897"/>
-                      <a:ext cx="1286017" cy="866467"/>
-                    </a:xfrm>
-                    <a:prstGeom prst="straightConnector1">
-                      <a:avLst/>
-                    </a:prstGeom>
-                    <a:ln w="25400">
-                      <a:tailEnd type="triangle"/>
-                    </a:ln>
-                  </p:spPr>
-                  <p:style>
-                    <a:lnRef idx="1">
-                      <a:schemeClr val="accent1"/>
-                    </a:lnRef>
-                    <a:fillRef idx="0">
-                      <a:schemeClr val="accent1"/>
-                    </a:fillRef>
-                    <a:effectRef idx="0">
-                      <a:schemeClr val="accent1"/>
-                    </a:effectRef>
-                    <a:fontRef idx="minor">
-                      <a:schemeClr val="tx1"/>
-                    </a:fontRef>
-                  </p:style>
-                </p:cxnSp>
-              </p:grpSp>
-              <mc:AlternateContent xmlns:mc="http://schemas.openxmlformats.org/markup-compatibility/2006">
-                <mc:Choice xmlns:a14="http://schemas.microsoft.com/office/drawing/2010/main" Requires="a14">
-                  <p:sp>
-                    <p:nvSpPr>
-                      <p:cNvPr id="50" name="TextBox 49"/>
-                      <p:cNvSpPr txBox="1"/>
-                      <p:nvPr/>
-                    </p:nvSpPr>
-                    <p:spPr>
-                      <a:xfrm>
-                        <a:off x="7081052" y="3059867"/>
-                        <a:ext cx="472272" cy="782587"/>
-                      </a:xfrm>
-                      <a:prstGeom prst="rect">
-                        <a:avLst/>
-                      </a:prstGeom>
-                      <a:noFill/>
-                    </p:spPr>
-                    <p:txBody>
-                      <a:bodyPr wrap="square" rtlCol="0">
-                        <a:spAutoFit/>
-                      </a:bodyPr>
-                      <a:lstStyle/>
-                      <a:p>
-                        <a14:m>
-                          <m:oMathPara xmlns:m="http://schemas.openxmlformats.org/officeDocument/2006/math">
-                            <m:oMathParaPr>
-                              <m:jc m:val="centerGroup"/>
-                            </m:oMathParaPr>
-                            <m:oMath xmlns:m="http://schemas.openxmlformats.org/officeDocument/2006/math">
-                              <m:acc>
-                                <m:accPr>
-                                  <m:chr m:val="⃗"/>
-                                  <m:ctrlPr>
-                                    <a:rPr lang="en-US" sz="4000" b="0" i="1" smtClean="0">
-                                      <a:solidFill>
-                                        <a:srgbClr val="C55A11"/>
-                                      </a:solidFill>
-                                      <a:latin typeface="Cambria Math" panose="02040503050406030204" pitchFamily="18" charset="0"/>
-                                    </a:rPr>
-                                  </m:ctrlPr>
-                                </m:accPr>
-                                <m:e>
-                                  <m:r>
-                                    <a:rPr lang="en-US" sz="4000" b="0" i="1" smtClean="0">
-                                      <a:solidFill>
-                                        <a:srgbClr val="C55A11"/>
-                                      </a:solidFill>
-                                      <a:latin typeface="Cambria Math" panose="02040503050406030204" pitchFamily="18" charset="0"/>
-                                    </a:rPr>
-                                    <m:t>𝐵</m:t>
-                                  </m:r>
-                                </m:e>
-                              </m:acc>
-                            </m:oMath>
-                          </m:oMathPara>
-                        </a14:m>
-                        <a:endParaRPr lang="en-US" sz="4000" dirty="0">
-                          <a:solidFill>
-                            <a:srgbClr val="C55A11"/>
-                          </a:solidFill>
-                        </a:endParaRPr>
-                      </a:p>
-                    </p:txBody>
-                  </p:sp>
-                </mc:Choice>
-                <mc:Fallback>
-                  <p:sp>
-                    <p:nvSpPr>
-                      <p:cNvPr id="50" name="TextBox 49"/>
-                      <p:cNvSpPr txBox="1">
-                        <a:spLocks noRot="1" noChangeAspect="1" noMove="1" noResize="1" noEditPoints="1" noAdjustHandles="1" noChangeArrowheads="1" noChangeShapeType="1" noTextEdit="1"/>
-                      </p:cNvSpPr>
-                      <p:nvPr/>
-                    </p:nvSpPr>
-                    <p:spPr>
-                      <a:xfrm>
-                        <a:off x="7081052" y="3059867"/>
-                        <a:ext cx="472272" cy="782587"/>
-                      </a:xfrm>
-                      <a:prstGeom prst="rect">
-                        <a:avLst/>
-                      </a:prstGeom>
-                      <a:blipFill>
-                        <a:blip r:embed="rId2"/>
-                        <a:stretch>
-                          <a:fillRect/>
-                        </a:stretch>
-                      </a:blipFill>
-                    </p:spPr>
-                    <p:txBody>
-                      <a:bodyPr/>
-                      <a:lstStyle/>
-                      <a:p>
-                        <a:r>
-                          <a:rPr lang="en-US">
-                            <a:noFill/>
-                          </a:rPr>
-                          <a:t> </a:t>
-                        </a:r>
-                      </a:p>
-                    </p:txBody>
-                  </p:sp>
-                </mc:Fallback>
-              </mc:AlternateContent>
-              <mc:AlternateContent xmlns:mc="http://schemas.openxmlformats.org/markup-compatibility/2006">
-                <mc:Choice xmlns:a14="http://schemas.microsoft.com/office/drawing/2010/main" Requires="a14">
-                  <p:sp>
-                    <p:nvSpPr>
-                      <p:cNvPr id="51" name="TextBox 50"/>
-                      <p:cNvSpPr txBox="1"/>
-                      <p:nvPr/>
-                    </p:nvSpPr>
-                    <p:spPr>
-                      <a:xfrm>
-                        <a:off x="6524245" y="3359874"/>
-                        <a:ext cx="472272" cy="782587"/>
-                      </a:xfrm>
-                      <a:prstGeom prst="rect">
-                        <a:avLst/>
-                      </a:prstGeom>
-                      <a:noFill/>
-                    </p:spPr>
-                    <p:txBody>
-                      <a:bodyPr wrap="square" rtlCol="0">
-                        <a:spAutoFit/>
-                      </a:bodyPr>
-                      <a:lstStyle/>
-                      <a:p>
-                        <a14:m>
-                          <m:oMathPara xmlns:m="http://schemas.openxmlformats.org/officeDocument/2006/math">
-                            <m:oMathParaPr>
-                              <m:jc m:val="centerGroup"/>
-                            </m:oMathParaPr>
-                            <m:oMath xmlns:m="http://schemas.openxmlformats.org/officeDocument/2006/math">
-                              <m:acc>
-                                <m:accPr>
-                                  <m:chr m:val="⃗"/>
-                                  <m:ctrlPr>
-                                    <a:rPr lang="en-US" sz="4000" b="0" i="1" smtClean="0">
-                                      <a:solidFill>
-                                        <a:srgbClr val="5B9BD5"/>
-                                      </a:solidFill>
-                                      <a:latin typeface="Cambria Math" panose="02040503050406030204" pitchFamily="18" charset="0"/>
-                                    </a:rPr>
-                                  </m:ctrlPr>
-                                </m:accPr>
-                                <m:e>
-                                  <m:r>
-                                    <a:rPr lang="en-US" sz="4000" b="0" i="1" smtClean="0">
-                                      <a:solidFill>
-                                        <a:srgbClr val="5B9BD5"/>
-                                      </a:solidFill>
-                                      <a:latin typeface="Cambria Math" panose="02040503050406030204" pitchFamily="18" charset="0"/>
-                                    </a:rPr>
-                                    <m:t>𝐸</m:t>
-                                  </m:r>
-                                </m:e>
-                              </m:acc>
-                            </m:oMath>
-                          </m:oMathPara>
-                        </a14:m>
-                        <a:endParaRPr lang="en-US" sz="4000" dirty="0">
-                          <a:solidFill>
-                            <a:srgbClr val="5B9BD5"/>
-                          </a:solidFill>
-                        </a:endParaRPr>
-                      </a:p>
-                    </p:txBody>
-                  </p:sp>
-                </mc:Choice>
-                <mc:Fallback>
-                  <p:sp>
-                    <p:nvSpPr>
-                      <p:cNvPr id="51" name="TextBox 50"/>
-                      <p:cNvSpPr txBox="1">
-                        <a:spLocks noRot="1" noChangeAspect="1" noMove="1" noResize="1" noEditPoints="1" noAdjustHandles="1" noChangeArrowheads="1" noChangeShapeType="1" noTextEdit="1"/>
-                      </p:cNvSpPr>
-                      <p:nvPr/>
-                    </p:nvSpPr>
-                    <p:spPr>
-                      <a:xfrm>
-                        <a:off x="6524245" y="3359874"/>
-                        <a:ext cx="472272" cy="782587"/>
-                      </a:xfrm>
-                      <a:prstGeom prst="rect">
-                        <a:avLst/>
-                      </a:prstGeom>
-                      <a:blipFill>
-                        <a:blip r:embed="rId3"/>
-                        <a:stretch>
-                          <a:fillRect/>
-                        </a:stretch>
-                      </a:blipFill>
-                    </p:spPr>
-                    <p:txBody>
-                      <a:bodyPr/>
-                      <a:lstStyle/>
-                      <a:p>
-                        <a:r>
-                          <a:rPr lang="en-US">
-                            <a:noFill/>
-                          </a:rPr>
-                          <a:t> </a:t>
-                        </a:r>
-                      </a:p>
-                    </p:txBody>
-                  </p:sp>
-                </mc:Fallback>
-              </mc:AlternateContent>
-            </p:grpSp>
-            <p:sp>
-              <p:nvSpPr>
-                <p:cNvPr id="52" name="Arc 51"/>
-                <p:cNvSpPr/>
-                <p:nvPr/>
-              </p:nvSpPr>
-              <p:spPr>
-                <a:xfrm rot="4500000">
-                  <a:off x="5483485" y="775539"/>
-                  <a:ext cx="2998251" cy="3606779"/>
-                </a:xfrm>
-                <a:prstGeom prst="arc">
-                  <a:avLst>
-                    <a:gd name="adj1" fmla="val 16100853"/>
-                    <a:gd name="adj2" fmla="val 0"/>
-                  </a:avLst>
-                </a:prstGeom>
-                <a:ln w="47625">
-                  <a:solidFill>
-                    <a:schemeClr val="tx1"/>
-                  </a:solidFill>
-                  <a:headEnd type="triangle"/>
-                </a:ln>
-              </p:spPr>
-              <p:style>
-                <a:lnRef idx="1">
-                  <a:schemeClr val="accent1"/>
-                </a:lnRef>
-                <a:fillRef idx="0">
-                  <a:schemeClr val="accent1"/>
-                </a:fillRef>
-                <a:effectRef idx="0">
-                  <a:schemeClr val="accent1"/>
-                </a:effectRef>
-                <a:fontRef idx="minor">
-                  <a:schemeClr val="tx1"/>
-                </a:fontRef>
-              </p:style>
-              <p:txBody>
-                <a:bodyPr rtlCol="0" anchor="ctr"/>
-                <a:lstStyle/>
-                <a:p>
-                  <a:pPr algn="ctr"/>
-                  <a:endParaRPr lang="en-US"/>
-                </a:p>
-              </p:txBody>
-            </p:sp>
-            <p:sp>
-              <p:nvSpPr>
-                <p:cNvPr id="57" name="Flowchart: Data 56"/>
-                <p:cNvSpPr/>
-                <p:nvPr/>
-              </p:nvSpPr>
-              <p:spPr>
-                <a:xfrm rot="2310327">
-                  <a:off x="7155034" y="517975"/>
-                  <a:ext cx="3453207" cy="3780596"/>
-                </a:xfrm>
-                <a:custGeom>
-                  <a:avLst/>
-                  <a:gdLst>
-                    <a:gd name="connsiteX0" fmla="*/ 0 w 10000"/>
-                    <a:gd name="connsiteY0" fmla="*/ 10000 h 10000"/>
-                    <a:gd name="connsiteX1" fmla="*/ 2000 w 10000"/>
-                    <a:gd name="connsiteY1" fmla="*/ 0 h 10000"/>
-                    <a:gd name="connsiteX2" fmla="*/ 10000 w 10000"/>
-                    <a:gd name="connsiteY2" fmla="*/ 0 h 10000"/>
-                    <a:gd name="connsiteX3" fmla="*/ 8000 w 10000"/>
-                    <a:gd name="connsiteY3" fmla="*/ 10000 h 10000"/>
-                    <a:gd name="connsiteX4" fmla="*/ 0 w 10000"/>
-                    <a:gd name="connsiteY4" fmla="*/ 10000 h 10000"/>
-                    <a:gd name="connsiteX0" fmla="*/ 0 w 10153"/>
-                    <a:gd name="connsiteY0" fmla="*/ 15400 h 15400"/>
-                    <a:gd name="connsiteX1" fmla="*/ 10153 w 10153"/>
-                    <a:gd name="connsiteY1" fmla="*/ 0 h 15400"/>
-                    <a:gd name="connsiteX2" fmla="*/ 10000 w 10153"/>
-                    <a:gd name="connsiteY2" fmla="*/ 5400 h 15400"/>
-                    <a:gd name="connsiteX3" fmla="*/ 8000 w 10153"/>
-                    <a:gd name="connsiteY3" fmla="*/ 15400 h 15400"/>
-                    <a:gd name="connsiteX4" fmla="*/ 0 w 10153"/>
-                    <a:gd name="connsiteY4" fmla="*/ 15400 h 15400"/>
-                    <a:gd name="connsiteX0" fmla="*/ 0 w 24560"/>
-                    <a:gd name="connsiteY0" fmla="*/ 16487 h 16487"/>
-                    <a:gd name="connsiteX1" fmla="*/ 10153 w 24560"/>
-                    <a:gd name="connsiteY1" fmla="*/ 1087 h 16487"/>
-                    <a:gd name="connsiteX2" fmla="*/ 24560 w 24560"/>
-                    <a:gd name="connsiteY2" fmla="*/ 0 h 16487"/>
-                    <a:gd name="connsiteX3" fmla="*/ 8000 w 24560"/>
-                    <a:gd name="connsiteY3" fmla="*/ 16487 h 16487"/>
-                    <a:gd name="connsiteX4" fmla="*/ 0 w 24560"/>
-                    <a:gd name="connsiteY4" fmla="*/ 16487 h 16487"/>
-                    <a:gd name="connsiteX0" fmla="*/ 0 w 24560"/>
-                    <a:gd name="connsiteY0" fmla="*/ 16487 h 16487"/>
-                    <a:gd name="connsiteX1" fmla="*/ 10153 w 24560"/>
-                    <a:gd name="connsiteY1" fmla="*/ 1087 h 16487"/>
-                    <a:gd name="connsiteX2" fmla="*/ 24560 w 24560"/>
-                    <a:gd name="connsiteY2" fmla="*/ 0 h 16487"/>
-                    <a:gd name="connsiteX3" fmla="*/ 14761 w 24560"/>
-                    <a:gd name="connsiteY3" fmla="*/ 15394 h 16487"/>
-                    <a:gd name="connsiteX4" fmla="*/ 0 w 24560"/>
-                    <a:gd name="connsiteY4" fmla="*/ 16487 h 16487"/>
-                    <a:gd name="connsiteX0" fmla="*/ 0 w 24352"/>
-                    <a:gd name="connsiteY0" fmla="*/ 16521 h 16521"/>
-                    <a:gd name="connsiteX1" fmla="*/ 9945 w 24352"/>
-                    <a:gd name="connsiteY1" fmla="*/ 1087 h 16521"/>
-                    <a:gd name="connsiteX2" fmla="*/ 24352 w 24352"/>
-                    <a:gd name="connsiteY2" fmla="*/ 0 h 16521"/>
-                    <a:gd name="connsiteX3" fmla="*/ 14553 w 24352"/>
-                    <a:gd name="connsiteY3" fmla="*/ 15394 h 16521"/>
-                    <a:gd name="connsiteX4" fmla="*/ 0 w 24352"/>
-                    <a:gd name="connsiteY4" fmla="*/ 16521 h 16521"/>
-                    <a:gd name="connsiteX0" fmla="*/ 0 w 24352"/>
-                    <a:gd name="connsiteY0" fmla="*/ 16521 h 16521"/>
-                    <a:gd name="connsiteX1" fmla="*/ 9945 w 24352"/>
-                    <a:gd name="connsiteY1" fmla="*/ 1087 h 16521"/>
-                    <a:gd name="connsiteX2" fmla="*/ 24352 w 24352"/>
-                    <a:gd name="connsiteY2" fmla="*/ 0 h 16521"/>
-                    <a:gd name="connsiteX3" fmla="*/ 14560 w 24352"/>
-                    <a:gd name="connsiteY3" fmla="*/ 15356 h 16521"/>
-                    <a:gd name="connsiteX4" fmla="*/ 0 w 24352"/>
-                    <a:gd name="connsiteY4" fmla="*/ 16521 h 16521"/>
-                    <a:gd name="connsiteX0" fmla="*/ 0 w 24373"/>
-                    <a:gd name="connsiteY0" fmla="*/ 16634 h 16634"/>
-                    <a:gd name="connsiteX1" fmla="*/ 9945 w 24373"/>
-                    <a:gd name="connsiteY1" fmla="*/ 1200 h 16634"/>
-                    <a:gd name="connsiteX2" fmla="*/ 24373 w 24373"/>
-                    <a:gd name="connsiteY2" fmla="*/ 0 h 16634"/>
-                    <a:gd name="connsiteX3" fmla="*/ 14560 w 24373"/>
-                    <a:gd name="connsiteY3" fmla="*/ 15469 h 16634"/>
-                    <a:gd name="connsiteX4" fmla="*/ 0 w 24373"/>
-                    <a:gd name="connsiteY4" fmla="*/ 16634 h 16634"/>
-                  </a:gdLst>
-                  <a:ahLst/>
-                  <a:cxnLst>
-                    <a:cxn ang="0">
-                      <a:pos x="connsiteX0" y="connsiteY0"/>
-                    </a:cxn>
-                    <a:cxn ang="0">
-                      <a:pos x="connsiteX1" y="connsiteY1"/>
-                    </a:cxn>
-                    <a:cxn ang="0">
-                      <a:pos x="connsiteX2" y="connsiteY2"/>
-                    </a:cxn>
-                    <a:cxn ang="0">
-                      <a:pos x="connsiteX3" y="connsiteY3"/>
-                    </a:cxn>
-                    <a:cxn ang="0">
-                      <a:pos x="connsiteX4" y="connsiteY4"/>
-                    </a:cxn>
-                  </a:cxnLst>
-                  <a:rect l="l" t="t" r="r" b="b"/>
-                  <a:pathLst>
-                    <a:path w="24373" h="16634">
-                      <a:moveTo>
-                        <a:pt x="0" y="16634"/>
-                      </a:moveTo>
-                      <a:lnTo>
-                        <a:pt x="9945" y="1200"/>
-                      </a:lnTo>
-                      <a:lnTo>
-                        <a:pt x="24373" y="0"/>
-                      </a:lnTo>
-                      <a:lnTo>
-                        <a:pt x="14560" y="15469"/>
-                      </a:lnTo>
-                      <a:lnTo>
-                        <a:pt x="0" y="16634"/>
-                      </a:lnTo>
-                      <a:close/>
-                    </a:path>
-                  </a:pathLst>
-                </a:custGeom>
-                <a:solidFill>
-                  <a:schemeClr val="accent6">
-                    <a:alpha val="25000"/>
-                  </a:schemeClr>
-                </a:solidFill>
-                <a:ln>
-                  <a:solidFill>
-                    <a:schemeClr val="tx1"/>
-                  </a:solidFill>
-                </a:ln>
-              </p:spPr>
-              <p:style>
-                <a:lnRef idx="2">
-                  <a:schemeClr val="accent1">
-                    <a:shade val="50000"/>
-                  </a:schemeClr>
-                </a:lnRef>
-                <a:fillRef idx="1">
-                  <a:schemeClr val="accent1"/>
-                </a:fillRef>
-                <a:effectRef idx="0">
-                  <a:schemeClr val="accent1"/>
-                </a:effectRef>
-                <a:fontRef idx="minor">
-                  <a:schemeClr val="lt1"/>
-                </a:fontRef>
-              </p:style>
-              <p:txBody>
-                <a:bodyPr rtlCol="0" anchor="ctr"/>
-                <a:lstStyle/>
-                <a:p>
-                  <a:pPr algn="ctr"/>
-                  <a:endParaRPr lang="en-US"/>
-                </a:p>
-              </p:txBody>
-            </p:sp>
-            <p:sp>
-              <p:nvSpPr>
-                <p:cNvPr id="58" name="Explosion 1 57"/>
-                <p:cNvSpPr/>
-                <p:nvPr/>
-              </p:nvSpPr>
-              <p:spPr>
-                <a:xfrm>
-                  <a:off x="8528174" y="1794019"/>
-                  <a:ext cx="307935" cy="376614"/>
-                </a:xfrm>
-                <a:prstGeom prst="irregularSeal1">
-                  <a:avLst/>
-                </a:prstGeom>
-                <a:solidFill>
-                  <a:srgbClr val="FF0000"/>
-                </a:solidFill>
-                <a:ln>
-                  <a:solidFill>
-                    <a:srgbClr val="C55A11"/>
-                  </a:solidFill>
-                </a:ln>
-              </p:spPr>
-              <p:style>
-                <a:lnRef idx="2">
-                  <a:schemeClr val="accent1">
-                    <a:shade val="50000"/>
-                  </a:schemeClr>
-                </a:lnRef>
-                <a:fillRef idx="1">
-                  <a:schemeClr val="accent1"/>
-                </a:fillRef>
-                <a:effectRef idx="0">
-                  <a:schemeClr val="accent1"/>
-                </a:effectRef>
-                <a:fontRef idx="minor">
-                  <a:schemeClr val="lt1"/>
-                </a:fontRef>
-              </p:style>
-              <p:txBody>
-                <a:bodyPr rtlCol="0" anchor="ctr"/>
-                <a:lstStyle/>
-                <a:p>
-                  <a:pPr algn="ctr"/>
-                  <a:endParaRPr lang="en-US"/>
-                </a:p>
-              </p:txBody>
-            </p:sp>
-            <mc:AlternateContent xmlns:mc="http://schemas.openxmlformats.org/markup-compatibility/2006">
-              <mc:Choice xmlns:a14="http://schemas.microsoft.com/office/drawing/2010/main" Requires="a14">
-                <p:sp>
-                  <p:nvSpPr>
-                    <p:cNvPr id="59" name="TextBox 58"/>
-                    <p:cNvSpPr txBox="1"/>
-                    <p:nvPr/>
-                  </p:nvSpPr>
-                  <p:spPr>
-                    <a:xfrm>
-                      <a:off x="7348885" y="1203294"/>
-                      <a:ext cx="1328820" cy="523220"/>
-                    </a:xfrm>
-                    <a:prstGeom prst="rect">
-                      <a:avLst/>
-                    </a:prstGeom>
-                    <a:noFill/>
-                  </p:spPr>
-                  <p:txBody>
-                    <a:bodyPr wrap="square" rtlCol="0">
-                      <a:spAutoFit/>
-                    </a:bodyPr>
-                    <a:lstStyle/>
-                    <a:p>
-                      <a14:m>
-                        <m:oMathPara xmlns:m="http://schemas.openxmlformats.org/officeDocument/2006/math">
-                          <m:oMathParaPr>
-                            <m:jc m:val="centerGroup"/>
-                          </m:oMathParaPr>
-                          <m:oMath xmlns:m="http://schemas.openxmlformats.org/officeDocument/2006/math">
-                            <m:r>
-                              <a:rPr lang="en-US" sz="2800" b="0" i="1" smtClean="0">
-                                <a:solidFill>
-                                  <a:srgbClr val="FF0000"/>
-                                </a:solidFill>
-                                <a:latin typeface="Cambria Math" panose="02040503050406030204" pitchFamily="18" charset="0"/>
-                              </a:rPr>
-                              <m:t>𝑥</m:t>
-                            </m:r>
-                            <m:r>
-                              <a:rPr lang="en-US" sz="2800" b="0" i="1" smtClean="0">
-                                <a:solidFill>
-                                  <a:srgbClr val="FF0000"/>
-                                </a:solidFill>
-                                <a:latin typeface="Cambria Math" panose="02040503050406030204" pitchFamily="18" charset="0"/>
-                              </a:rPr>
-                              <m:t>,</m:t>
-                            </m:r>
-                            <m:r>
-                              <a:rPr lang="en-US" sz="2800" b="0" i="1" smtClean="0">
-                                <a:solidFill>
-                                  <a:srgbClr val="FF0000"/>
-                                </a:solidFill>
-                                <a:latin typeface="Cambria Math" panose="02040503050406030204" pitchFamily="18" charset="0"/>
-                              </a:rPr>
-                              <m:t>𝑦</m:t>
-                            </m:r>
-                            <m:r>
-                              <a:rPr lang="en-US" sz="2800" b="0" i="1" smtClean="0">
-                                <a:solidFill>
-                                  <a:srgbClr val="FF0000"/>
-                                </a:solidFill>
-                                <a:latin typeface="Cambria Math" panose="02040503050406030204" pitchFamily="18" charset="0"/>
-                              </a:rPr>
-                              <m:t>,</m:t>
-                            </m:r>
-                            <m:r>
-                              <a:rPr lang="en-US" sz="2800" b="0" i="1" smtClean="0">
-                                <a:solidFill>
-                                  <a:srgbClr val="FF0000"/>
-                                </a:solidFill>
-                                <a:latin typeface="Cambria Math" panose="02040503050406030204" pitchFamily="18" charset="0"/>
-                              </a:rPr>
-                              <m:t>𝑧</m:t>
-                            </m:r>
-                          </m:oMath>
-                        </m:oMathPara>
-                      </a14:m>
-                      <a:endParaRPr lang="en-US" sz="2800" dirty="0">
-                        <a:solidFill>
-                          <a:srgbClr val="FF0000"/>
-                        </a:solidFill>
-                      </a:endParaRPr>
-                    </a:p>
-                  </p:txBody>
-                </p:sp>
-              </mc:Choice>
-              <mc:Fallback>
-                <p:sp>
-                  <p:nvSpPr>
-                    <p:cNvPr id="59" name="TextBox 58"/>
-                    <p:cNvSpPr txBox="1">
-                      <a:spLocks noRot="1" noChangeAspect="1" noMove="1" noResize="1" noEditPoints="1" noAdjustHandles="1" noChangeArrowheads="1" noChangeShapeType="1" noTextEdit="1"/>
-                    </p:cNvSpPr>
-                    <p:nvPr/>
-                  </p:nvSpPr>
-                  <p:spPr>
-                    <a:xfrm>
-                      <a:off x="7348885" y="1203294"/>
-                      <a:ext cx="1328820" cy="523220"/>
-                    </a:xfrm>
-                    <a:prstGeom prst="rect">
-                      <a:avLst/>
-                    </a:prstGeom>
-                    <a:blipFill>
-                      <a:blip r:embed="rId4"/>
-                      <a:stretch>
-                        <a:fillRect/>
-                      </a:stretch>
-                    </a:blipFill>
-                  </p:spPr>
-                  <p:txBody>
-                    <a:bodyPr/>
-                    <a:lstStyle/>
-                    <a:p>
-                      <a:r>
-                        <a:rPr lang="en-US">
-                          <a:noFill/>
-                        </a:rPr>
-                        <a:t> </a:t>
-                      </a:r>
-                    </a:p>
-                  </p:txBody>
-                </p:sp>
-              </mc:Fallback>
-            </mc:AlternateContent>
-            <p:grpSp>
-              <p:nvGrpSpPr>
-                <p:cNvPr id="70" name="Group 69"/>
-                <p:cNvGrpSpPr/>
-                <p:nvPr/>
-              </p:nvGrpSpPr>
-              <p:grpSpPr>
-                <a:xfrm rot="10800000" flipH="1" flipV="1">
-                  <a:off x="6353608" y="3889683"/>
-                  <a:ext cx="2465826" cy="1256130"/>
-                  <a:chOff x="-500570" y="3353856"/>
-                  <a:chExt cx="2465826" cy="1256130"/>
-                </a:xfrm>
-              </p:grpSpPr>
-              <p:cxnSp>
-                <p:nvCxnSpPr>
-                  <p:cNvPr id="71" name="Straight Connector 70"/>
-                  <p:cNvCxnSpPr>
-                    <a:endCxn id="57" idx="3"/>
-                  </p:cNvCxnSpPr>
-                  <p:nvPr/>
-                </p:nvCxnSpPr>
-                <p:spPr>
-                  <a:xfrm rot="10800000">
-                    <a:off x="1278588" y="3353856"/>
-                    <a:ext cx="16914" cy="1256129"/>
-                  </a:xfrm>
-                  <a:prstGeom prst="line">
-                    <a:avLst/>
-                  </a:prstGeom>
-                  <a:ln w="25400">
-                    <a:solidFill>
-                      <a:schemeClr val="tx1"/>
-                    </a:solidFill>
-                    <a:headEnd type="none"/>
-                    <a:tailEnd type="triangle"/>
-                  </a:ln>
-                </p:spPr>
-                <p:style>
-                  <a:lnRef idx="1">
-                    <a:schemeClr val="accent1"/>
-                  </a:lnRef>
-                  <a:fillRef idx="0">
-                    <a:schemeClr val="accent1"/>
-                  </a:fillRef>
-                  <a:effectRef idx="0">
-                    <a:schemeClr val="accent1"/>
-                  </a:effectRef>
-                  <a:fontRef idx="minor">
-                    <a:schemeClr val="tx1"/>
-                  </a:fontRef>
-                </p:style>
-              </p:cxnSp>
-              <p:cxnSp>
-                <p:nvCxnSpPr>
-                  <p:cNvPr id="72" name="Straight Connector 71"/>
-                  <p:cNvCxnSpPr/>
-                  <p:nvPr/>
-                </p:nvCxnSpPr>
-                <p:spPr>
-                  <a:xfrm rot="10800000">
-                    <a:off x="-500570" y="3544563"/>
-                    <a:ext cx="1776343" cy="1065422"/>
-                  </a:xfrm>
-                  <a:prstGeom prst="line">
-                    <a:avLst/>
-                  </a:prstGeom>
-                  <a:ln w="25400">
-                    <a:solidFill>
-                      <a:schemeClr val="tx1"/>
-                    </a:solidFill>
-                    <a:headEnd type="none"/>
-                    <a:tailEnd type="triangle"/>
-                  </a:ln>
-                </p:spPr>
-                <p:style>
-                  <a:lnRef idx="1">
-                    <a:schemeClr val="accent1"/>
-                  </a:lnRef>
-                  <a:fillRef idx="0">
-                    <a:schemeClr val="accent1"/>
-                  </a:fillRef>
-                  <a:effectRef idx="0">
-                    <a:schemeClr val="accent1"/>
-                  </a:effectRef>
-                  <a:fontRef idx="minor">
-                    <a:schemeClr val="tx1"/>
-                  </a:fontRef>
-                </p:style>
-              </p:cxnSp>
-              <p:cxnSp>
-                <p:nvCxnSpPr>
-                  <p:cNvPr id="73" name="Straight Connector 72"/>
-                  <p:cNvCxnSpPr/>
-                  <p:nvPr/>
-                </p:nvCxnSpPr>
-                <p:spPr>
-                  <a:xfrm rot="10800000" flipH="1">
-                    <a:off x="1301042" y="4225410"/>
-                    <a:ext cx="664214" cy="384576"/>
-                  </a:xfrm>
-                  <a:prstGeom prst="line">
-                    <a:avLst/>
-                  </a:prstGeom>
-                  <a:ln w="25400">
-                    <a:solidFill>
-                      <a:schemeClr val="tx1"/>
-                    </a:solidFill>
-                    <a:headEnd type="none"/>
-                    <a:tailEnd type="triangle"/>
-                  </a:ln>
-                </p:spPr>
-                <p:style>
-                  <a:lnRef idx="1">
-                    <a:schemeClr val="accent1"/>
-                  </a:lnRef>
-                  <a:fillRef idx="0">
-                    <a:schemeClr val="accent1"/>
-                  </a:fillRef>
-                  <a:effectRef idx="0">
-                    <a:schemeClr val="accent1"/>
-                  </a:effectRef>
-                  <a:fontRef idx="minor">
-                    <a:schemeClr val="tx1"/>
-                  </a:fontRef>
-                </p:style>
-              </p:cxnSp>
-            </p:grpSp>
-            <mc:AlternateContent xmlns:mc="http://schemas.openxmlformats.org/markup-compatibility/2006">
-              <mc:Choice xmlns:a14="http://schemas.microsoft.com/office/drawing/2010/main" Requires="a14">
-                <p:sp>
-                  <p:nvSpPr>
-                    <p:cNvPr id="78" name="TextBox 77"/>
-                    <p:cNvSpPr txBox="1"/>
-                    <p:nvPr/>
-                  </p:nvSpPr>
-                  <p:spPr>
-                    <a:xfrm>
-                      <a:off x="6028553" y="3889654"/>
-                      <a:ext cx="321969" cy="523220"/>
-                    </a:xfrm>
-                    <a:prstGeom prst="rect">
-                      <a:avLst/>
-                    </a:prstGeom>
-                    <a:noFill/>
-                  </p:spPr>
-                  <p:txBody>
-                    <a:bodyPr wrap="square" rtlCol="0">
-                      <a:spAutoFit/>
-                    </a:bodyPr>
-                    <a:lstStyle/>
-                    <a:p>
-                      <a14:m>
-                        <m:oMathPara xmlns:m="http://schemas.openxmlformats.org/officeDocument/2006/math">
-                          <m:oMathParaPr>
-                            <m:jc m:val="centerGroup"/>
-                          </m:oMathParaPr>
-                          <m:oMath xmlns:m="http://schemas.openxmlformats.org/officeDocument/2006/math">
-                            <m:r>
-                              <a:rPr lang="en-US" sz="2800" b="0" i="1" smtClean="0">
-                                <a:latin typeface="Cambria Math" panose="02040503050406030204" pitchFamily="18" charset="0"/>
-                              </a:rPr>
-                              <m:t>𝑥</m:t>
-                            </m:r>
-                          </m:oMath>
-                        </m:oMathPara>
-                      </a14:m>
-                      <a:endParaRPr lang="en-US" sz="2800" dirty="0"/>
-                    </a:p>
-                  </p:txBody>
-                </p:sp>
-              </mc:Choice>
-              <mc:Fallback>
-                <p:sp>
-                  <p:nvSpPr>
-                    <p:cNvPr id="78" name="TextBox 77"/>
-                    <p:cNvSpPr txBox="1">
-                      <a:spLocks noRot="1" noChangeAspect="1" noMove="1" noResize="1" noEditPoints="1" noAdjustHandles="1" noChangeArrowheads="1" noChangeShapeType="1" noTextEdit="1"/>
-                    </p:cNvSpPr>
-                    <p:nvPr/>
-                  </p:nvSpPr>
-                  <p:spPr>
-                    <a:xfrm>
-                      <a:off x="6028553" y="3889654"/>
-                      <a:ext cx="321969" cy="523220"/>
-                    </a:xfrm>
-                    <a:prstGeom prst="rect">
-                      <a:avLst/>
-                    </a:prstGeom>
-                    <a:blipFill>
-                      <a:blip r:embed="rId5"/>
-                      <a:stretch>
-                        <a:fillRect/>
-                      </a:stretch>
-                    </a:blipFill>
-                  </p:spPr>
-                  <p:txBody>
-                    <a:bodyPr/>
-                    <a:lstStyle/>
-                    <a:p>
-                      <a:r>
-                        <a:rPr lang="en-US">
-                          <a:noFill/>
-                        </a:rPr>
-                        <a:t> </a:t>
-                      </a:r>
-                    </a:p>
-                  </p:txBody>
-                </p:sp>
-              </mc:Fallback>
-            </mc:AlternateContent>
-            <mc:AlternateContent xmlns:mc="http://schemas.openxmlformats.org/markup-compatibility/2006">
-              <mc:Choice xmlns:a14="http://schemas.microsoft.com/office/drawing/2010/main" Requires="a14">
-                <p:sp>
-                  <p:nvSpPr>
-                    <p:cNvPr id="81" name="TextBox 80"/>
-                    <p:cNvSpPr txBox="1"/>
-                    <p:nvPr/>
-                  </p:nvSpPr>
-                  <p:spPr>
-                    <a:xfrm>
-                      <a:off x="8122435" y="3708266"/>
-                      <a:ext cx="321969" cy="523220"/>
-                    </a:xfrm>
-                    <a:prstGeom prst="rect">
-                      <a:avLst/>
-                    </a:prstGeom>
-                    <a:noFill/>
-                  </p:spPr>
-                  <p:txBody>
-                    <a:bodyPr wrap="square" rtlCol="0">
-                      <a:spAutoFit/>
-                    </a:bodyPr>
-                    <a:lstStyle/>
-                    <a:p>
-                      <a14:m>
-                        <m:oMathPara xmlns:m="http://schemas.openxmlformats.org/officeDocument/2006/math">
-                          <m:oMathParaPr>
-                            <m:jc m:val="centerGroup"/>
-                          </m:oMathParaPr>
-                          <m:oMath xmlns:m="http://schemas.openxmlformats.org/officeDocument/2006/math">
-                            <m:r>
-                              <a:rPr lang="en-US" sz="2800" b="0" i="1" smtClean="0">
-                                <a:latin typeface="Cambria Math" panose="02040503050406030204" pitchFamily="18" charset="0"/>
-                              </a:rPr>
-                              <m:t>𝑧</m:t>
-                            </m:r>
-                          </m:oMath>
-                        </m:oMathPara>
-                      </a14:m>
-                      <a:endParaRPr lang="en-US" sz="2800" dirty="0"/>
-                    </a:p>
-                  </p:txBody>
-                </p:sp>
-              </mc:Choice>
-              <mc:Fallback>
-                <p:sp>
-                  <p:nvSpPr>
-                    <p:cNvPr id="81" name="TextBox 80"/>
-                    <p:cNvSpPr txBox="1">
-                      <a:spLocks noRot="1" noChangeAspect="1" noMove="1" noResize="1" noEditPoints="1" noAdjustHandles="1" noChangeArrowheads="1" noChangeShapeType="1" noTextEdit="1"/>
-                    </p:cNvSpPr>
-                    <p:nvPr/>
-                  </p:nvSpPr>
-                  <p:spPr>
-                    <a:xfrm>
-                      <a:off x="8122435" y="3708266"/>
-                      <a:ext cx="321969" cy="523220"/>
-                    </a:xfrm>
-                    <a:prstGeom prst="rect">
-                      <a:avLst/>
-                    </a:prstGeom>
-                    <a:blipFill>
-                      <a:blip r:embed="rId6"/>
-                      <a:stretch>
-                        <a:fillRect/>
-                      </a:stretch>
-                    </a:blipFill>
-                  </p:spPr>
-                  <p:txBody>
-                    <a:bodyPr/>
-                    <a:lstStyle/>
-                    <a:p>
-                      <a:r>
-                        <a:rPr lang="en-US">
-                          <a:noFill/>
-                        </a:rPr>
-                        <a:t> </a:t>
-                      </a:r>
-                    </a:p>
-                  </p:txBody>
-                </p:sp>
-              </mc:Fallback>
-            </mc:AlternateContent>
-            <mc:AlternateContent xmlns:mc="http://schemas.openxmlformats.org/markup-compatibility/2006">
-              <mc:Choice xmlns:a14="http://schemas.microsoft.com/office/drawing/2010/main" Requires="a14">
-                <p:sp>
-                  <p:nvSpPr>
-                    <p:cNvPr id="82" name="TextBox 81"/>
-                    <p:cNvSpPr txBox="1"/>
-                    <p:nvPr/>
-                  </p:nvSpPr>
-                  <p:spPr>
-                    <a:xfrm>
-                      <a:off x="8836922" y="4554122"/>
-                      <a:ext cx="321969" cy="523220"/>
-                    </a:xfrm>
-                    <a:prstGeom prst="rect">
-                      <a:avLst/>
-                    </a:prstGeom>
-                    <a:noFill/>
-                  </p:spPr>
-                  <p:txBody>
-                    <a:bodyPr wrap="square" rtlCol="0">
-                      <a:spAutoFit/>
-                    </a:bodyPr>
-                    <a:lstStyle/>
-                    <a:p>
-                      <a14:m>
-                        <m:oMathPara xmlns:m="http://schemas.openxmlformats.org/officeDocument/2006/math">
-                          <m:oMathParaPr>
-                            <m:jc m:val="centerGroup"/>
-                          </m:oMathParaPr>
-                          <m:oMath xmlns:m="http://schemas.openxmlformats.org/officeDocument/2006/math">
-                            <m:r>
-                              <a:rPr lang="en-US" sz="2800" b="0" i="1" smtClean="0">
-                                <a:latin typeface="Cambria Math" panose="02040503050406030204" pitchFamily="18" charset="0"/>
-                              </a:rPr>
-                              <m:t>𝑦</m:t>
-                            </m:r>
-                          </m:oMath>
-                        </m:oMathPara>
-                      </a14:m>
-                      <a:endParaRPr lang="en-US" sz="2800" dirty="0"/>
-                    </a:p>
-                  </p:txBody>
-                </p:sp>
-              </mc:Choice>
-              <mc:Fallback>
-                <p:sp>
-                  <p:nvSpPr>
-                    <p:cNvPr id="82" name="TextBox 81"/>
-                    <p:cNvSpPr txBox="1">
-                      <a:spLocks noRot="1" noChangeAspect="1" noMove="1" noResize="1" noEditPoints="1" noAdjustHandles="1" noChangeArrowheads="1" noChangeShapeType="1" noTextEdit="1"/>
-                    </p:cNvSpPr>
-                    <p:nvPr/>
-                  </p:nvSpPr>
-                  <p:spPr>
-                    <a:xfrm>
-                      <a:off x="8836922" y="4554122"/>
-                      <a:ext cx="321969" cy="523220"/>
-                    </a:xfrm>
-                    <a:prstGeom prst="rect">
-                      <a:avLst/>
-                    </a:prstGeom>
-                    <a:blipFill>
-                      <a:blip r:embed="rId7"/>
-                      <a:stretch>
-                        <a:fillRect/>
-                      </a:stretch>
-                    </a:blipFill>
-                  </p:spPr>
-                  <p:txBody>
-                    <a:bodyPr/>
-                    <a:lstStyle/>
-                    <a:p>
-                      <a:r>
-                        <a:rPr lang="en-US">
-                          <a:noFill/>
-                        </a:rPr>
-                        <a:t> </a:t>
-                      </a:r>
-                    </a:p>
-                  </p:txBody>
-                </p:sp>
-              </mc:Fallback>
-            </mc:AlternateContent>
-            <p:grpSp>
-              <p:nvGrpSpPr>
-                <p:cNvPr id="98" name="Group 97"/>
-                <p:cNvGrpSpPr/>
-                <p:nvPr/>
-              </p:nvGrpSpPr>
-              <p:grpSpPr>
-                <a:xfrm>
-                  <a:off x="141351" y="901696"/>
-                  <a:ext cx="5851487" cy="4665374"/>
-                  <a:chOff x="-403797" y="349852"/>
-                  <a:chExt cx="5851487" cy="4665374"/>
-                </a:xfrm>
-              </p:grpSpPr>
-              <p:sp>
-                <p:nvSpPr>
-                  <p:cNvPr id="61" name="Rectangle 60"/>
-                  <p:cNvSpPr/>
-                  <p:nvPr/>
-                </p:nvSpPr>
-                <p:spPr>
-                  <a:xfrm>
-                    <a:off x="1275773" y="2406599"/>
-                    <a:ext cx="4171917" cy="2203385"/>
-                  </a:xfrm>
-                  <a:prstGeom prst="rect">
-                    <a:avLst/>
-                  </a:prstGeom>
-                  <a:solidFill>
-                    <a:schemeClr val="bg1">
-                      <a:lumMod val="95000"/>
-                    </a:schemeClr>
-                  </a:solidFill>
-                  <a:ln>
-                    <a:noFill/>
-                  </a:ln>
-                </p:spPr>
-                <p:style>
-                  <a:lnRef idx="2">
-                    <a:schemeClr val="accent1">
-                      <a:shade val="50000"/>
-                    </a:schemeClr>
-                  </a:lnRef>
-                  <a:fillRef idx="1">
-                    <a:schemeClr val="accent1"/>
-                  </a:fillRef>
-                  <a:effectRef idx="0">
-                    <a:schemeClr val="accent1"/>
-                  </a:effectRef>
-                  <a:fontRef idx="minor">
-                    <a:schemeClr val="lt1"/>
-                  </a:fontRef>
-                </p:style>
-                <p:txBody>
-                  <a:bodyPr rtlCol="0" anchor="ctr"/>
-                  <a:lstStyle/>
-                  <a:p>
-                    <a:pPr algn="ctr"/>
-                    <a:endParaRPr lang="en-US"/>
-                  </a:p>
-                </p:txBody>
-              </p:sp>
-              <p:grpSp>
-                <p:nvGrpSpPr>
-                  <p:cNvPr id="69" name="Group 68"/>
-                  <p:cNvGrpSpPr/>
-                  <p:nvPr/>
-                </p:nvGrpSpPr>
-                <p:grpSpPr>
-                  <a:xfrm>
-                    <a:off x="1186689" y="3981742"/>
-                    <a:ext cx="694976" cy="628242"/>
-                    <a:chOff x="1209038" y="3981743"/>
-                    <a:chExt cx="694976" cy="628242"/>
-                  </a:xfrm>
-                </p:grpSpPr>
-                <p:cxnSp>
-                  <p:nvCxnSpPr>
-                    <p:cNvPr id="65" name="Straight Connector 64"/>
-                    <p:cNvCxnSpPr/>
-                    <p:nvPr/>
-                  </p:nvCxnSpPr>
-                  <p:spPr>
-                    <a:xfrm flipV="1">
-                      <a:off x="1295502" y="3981743"/>
-                      <a:ext cx="0" cy="628241"/>
-                    </a:xfrm>
-                    <a:prstGeom prst="line">
-                      <a:avLst/>
-                    </a:prstGeom>
-                    <a:ln w="25400">
-                      <a:solidFill>
-                        <a:schemeClr val="tx1"/>
-                      </a:solidFill>
-                      <a:headEnd type="none"/>
-                      <a:tailEnd type="triangle"/>
-                    </a:ln>
-                  </p:spPr>
-                  <p:style>
-                    <a:lnRef idx="1">
-                      <a:schemeClr val="accent1"/>
-                    </a:lnRef>
-                    <a:fillRef idx="0">
-                      <a:schemeClr val="accent1"/>
-                    </a:fillRef>
-                    <a:effectRef idx="0">
-                      <a:schemeClr val="accent1"/>
-                    </a:effectRef>
-                    <a:fontRef idx="minor">
-                      <a:schemeClr val="tx1"/>
-                    </a:fontRef>
-                  </p:style>
-                </p:cxnSp>
-                <p:cxnSp>
-                  <p:nvCxnSpPr>
-                    <p:cNvPr id="67" name="Straight Connector 66"/>
-                    <p:cNvCxnSpPr/>
-                    <p:nvPr/>
-                  </p:nvCxnSpPr>
-                  <p:spPr>
-                    <a:xfrm rot="5400000" flipV="1">
-                      <a:off x="1589894" y="4295864"/>
-                      <a:ext cx="0" cy="628241"/>
-                    </a:xfrm>
-                    <a:prstGeom prst="line">
-                      <a:avLst/>
-                    </a:prstGeom>
-                    <a:ln w="25400">
-                      <a:solidFill>
-                        <a:schemeClr val="tx1"/>
-                      </a:solidFill>
-                      <a:headEnd type="none"/>
-                      <a:tailEnd type="triangle"/>
-                    </a:ln>
-                  </p:spPr>
-                  <p:style>
-                    <a:lnRef idx="1">
-                      <a:schemeClr val="accent1"/>
-                    </a:lnRef>
-                    <a:fillRef idx="0">
-                      <a:schemeClr val="accent1"/>
-                    </a:fillRef>
-                    <a:effectRef idx="0">
-                      <a:schemeClr val="accent1"/>
-                    </a:effectRef>
-                    <a:fontRef idx="minor">
-                      <a:schemeClr val="tx1"/>
-                    </a:fontRef>
-                  </p:style>
-                </p:cxnSp>
-                <p:cxnSp>
-                  <p:nvCxnSpPr>
-                    <p:cNvPr id="68" name="Straight Connector 67"/>
-                    <p:cNvCxnSpPr/>
-                    <p:nvPr/>
-                  </p:nvCxnSpPr>
-                  <p:spPr>
-                    <a:xfrm rot="2700000" flipV="1">
-                      <a:off x="1523159" y="4073747"/>
-                      <a:ext cx="0" cy="628241"/>
-                    </a:xfrm>
-                    <a:prstGeom prst="line">
-                      <a:avLst/>
-                    </a:prstGeom>
-                    <a:ln w="25400">
-                      <a:solidFill>
-                        <a:schemeClr val="tx1"/>
-                      </a:solidFill>
-                      <a:headEnd type="none"/>
-                      <a:tailEnd type="triangle"/>
-                    </a:ln>
-                  </p:spPr>
-                  <p:style>
-                    <a:lnRef idx="1">
-                      <a:schemeClr val="accent1"/>
-                    </a:lnRef>
-                    <a:fillRef idx="0">
-                      <a:schemeClr val="accent1"/>
-                    </a:fillRef>
-                    <a:effectRef idx="0">
-                      <a:schemeClr val="accent1"/>
-                    </a:effectRef>
-                    <a:fontRef idx="minor">
-                      <a:schemeClr val="tx1"/>
-                    </a:fontRef>
-                  </p:style>
-                </p:cxnSp>
-              </p:grpSp>
-              <mc:AlternateContent xmlns:mc="http://schemas.openxmlformats.org/markup-compatibility/2006">
-                <mc:Choice xmlns:a14="http://schemas.microsoft.com/office/drawing/2010/main" Requires="a14">
-                  <p:sp>
-                    <p:nvSpPr>
-                      <p:cNvPr id="83" name="TextBox 82"/>
-                      <p:cNvSpPr txBox="1"/>
-                      <p:nvPr/>
-                    </p:nvSpPr>
-                    <p:spPr>
-                      <a:xfrm>
-                        <a:off x="1646477" y="3925721"/>
-                        <a:ext cx="321969" cy="523220"/>
-                      </a:xfrm>
-                      <a:prstGeom prst="rect">
-                        <a:avLst/>
-                      </a:prstGeom>
-                      <a:noFill/>
-                    </p:spPr>
-                    <p:txBody>
-                      <a:bodyPr wrap="square" rtlCol="0">
-                        <a:spAutoFit/>
-                      </a:bodyPr>
-                      <a:lstStyle/>
-                      <a:p>
-                        <a14:m>
-                          <m:oMathPara xmlns:m="http://schemas.openxmlformats.org/officeDocument/2006/math">
-                            <m:oMathParaPr>
-                              <m:jc m:val="centerGroup"/>
-                            </m:oMathParaPr>
-                            <m:oMath xmlns:m="http://schemas.openxmlformats.org/officeDocument/2006/math">
-                              <m:r>
-                                <a:rPr lang="en-US" sz="2800" b="0" i="1" smtClean="0">
-                                  <a:latin typeface="Cambria Math" panose="02040503050406030204" pitchFamily="18" charset="0"/>
-                                </a:rPr>
-                                <m:t>𝑥</m:t>
-                              </m:r>
-                            </m:oMath>
-                          </m:oMathPara>
-                        </a14:m>
-                        <a:endParaRPr lang="en-US" sz="2800" dirty="0"/>
-                      </a:p>
-                    </p:txBody>
-                  </p:sp>
-                </mc:Choice>
-                <mc:Fallback>
-                  <p:sp>
-                    <p:nvSpPr>
-                      <p:cNvPr id="83" name="TextBox 82"/>
-                      <p:cNvSpPr txBox="1">
-                        <a:spLocks noRot="1" noChangeAspect="1" noMove="1" noResize="1" noEditPoints="1" noAdjustHandles="1" noChangeArrowheads="1" noChangeShapeType="1" noTextEdit="1"/>
-                      </p:cNvSpPr>
-                      <p:nvPr/>
-                    </p:nvSpPr>
-                    <p:spPr>
-                      <a:xfrm>
-                        <a:off x="1646477" y="3925721"/>
-                        <a:ext cx="321969" cy="523220"/>
-                      </a:xfrm>
-                      <a:prstGeom prst="rect">
-                        <a:avLst/>
-                      </a:prstGeom>
-                      <a:blipFill>
-                        <a:blip r:embed="rId8"/>
-                        <a:stretch>
-                          <a:fillRect/>
-                        </a:stretch>
-                      </a:blipFill>
-                    </p:spPr>
-                    <p:txBody>
-                      <a:bodyPr/>
-                      <a:lstStyle/>
-                      <a:p>
-                        <a:r>
-                          <a:rPr lang="en-US">
-                            <a:noFill/>
-                          </a:rPr>
-                          <a:t> </a:t>
-                        </a:r>
-                      </a:p>
-                    </p:txBody>
-                  </p:sp>
-                </mc:Fallback>
-              </mc:AlternateContent>
-              <mc:AlternateContent xmlns:mc="http://schemas.openxmlformats.org/markup-compatibility/2006">
-                <mc:Choice xmlns:a14="http://schemas.microsoft.com/office/drawing/2010/main" Requires="a14">
-                  <p:sp>
-                    <p:nvSpPr>
-                      <p:cNvPr id="84" name="TextBox 83"/>
-                      <p:cNvSpPr txBox="1"/>
-                      <p:nvPr/>
-                    </p:nvSpPr>
-                    <p:spPr>
-                      <a:xfrm>
-                        <a:off x="1675187" y="4492006"/>
-                        <a:ext cx="321969" cy="523220"/>
-                      </a:xfrm>
-                      <a:prstGeom prst="rect">
-                        <a:avLst/>
-                      </a:prstGeom>
-                      <a:noFill/>
-                    </p:spPr>
-                    <p:txBody>
-                      <a:bodyPr wrap="square" rtlCol="0">
-                        <a:spAutoFit/>
-                      </a:bodyPr>
-                      <a:lstStyle/>
-                      <a:p>
-                        <a14:m>
-                          <m:oMathPara xmlns:m="http://schemas.openxmlformats.org/officeDocument/2006/math">
-                            <m:oMathParaPr>
-                              <m:jc m:val="centerGroup"/>
-                            </m:oMathParaPr>
-                            <m:oMath xmlns:m="http://schemas.openxmlformats.org/officeDocument/2006/math">
-                              <m:r>
-                                <a:rPr lang="en-US" sz="2800" b="0" i="1" smtClean="0">
-                                  <a:latin typeface="Cambria Math" panose="02040503050406030204" pitchFamily="18" charset="0"/>
-                                </a:rPr>
-                                <m:t>𝑦</m:t>
-                              </m:r>
-                            </m:oMath>
-                          </m:oMathPara>
-                        </a14:m>
-                        <a:endParaRPr lang="en-US" sz="2800" dirty="0"/>
-                      </a:p>
-                    </p:txBody>
-                  </p:sp>
-                </mc:Choice>
-                <mc:Fallback>
-                  <p:sp>
-                    <p:nvSpPr>
-                      <p:cNvPr id="84" name="TextBox 83"/>
-                      <p:cNvSpPr txBox="1">
-                        <a:spLocks noRot="1" noChangeAspect="1" noMove="1" noResize="1" noEditPoints="1" noAdjustHandles="1" noChangeArrowheads="1" noChangeShapeType="1" noTextEdit="1"/>
-                      </p:cNvSpPr>
-                      <p:nvPr/>
-                    </p:nvSpPr>
-                    <p:spPr>
-                      <a:xfrm>
-                        <a:off x="1675187" y="4492006"/>
-                        <a:ext cx="321969" cy="523220"/>
-                      </a:xfrm>
-                      <a:prstGeom prst="rect">
-                        <a:avLst/>
-                      </a:prstGeom>
-                      <a:blipFill>
-                        <a:blip r:embed="rId9"/>
-                        <a:stretch>
-                          <a:fillRect/>
-                        </a:stretch>
-                      </a:blipFill>
-                    </p:spPr>
-                    <p:txBody>
-                      <a:bodyPr/>
-                      <a:lstStyle/>
-                      <a:p>
-                        <a:r>
-                          <a:rPr lang="en-US">
-                            <a:noFill/>
-                          </a:rPr>
-                          <a:t> </a:t>
-                        </a:r>
-                      </a:p>
-                    </p:txBody>
-                  </p:sp>
-                </mc:Fallback>
-              </mc:AlternateContent>
-              <mc:AlternateContent xmlns:mc="http://schemas.openxmlformats.org/markup-compatibility/2006">
-                <mc:Choice xmlns:a14="http://schemas.microsoft.com/office/drawing/2010/main" Requires="a14">
-                  <p:sp>
-                    <p:nvSpPr>
-                      <p:cNvPr id="85" name="TextBox 84"/>
-                      <p:cNvSpPr txBox="1"/>
-                      <p:nvPr/>
-                    </p:nvSpPr>
-                    <p:spPr>
-                      <a:xfrm>
-                        <a:off x="967445" y="3767978"/>
-                        <a:ext cx="321969" cy="523220"/>
-                      </a:xfrm>
-                      <a:prstGeom prst="rect">
-                        <a:avLst/>
-                      </a:prstGeom>
-                      <a:noFill/>
-                    </p:spPr>
-                    <p:txBody>
-                      <a:bodyPr wrap="square" rtlCol="0">
-                        <a:spAutoFit/>
-                      </a:bodyPr>
-                      <a:lstStyle/>
-                      <a:p>
-                        <a14:m>
-                          <m:oMathPara xmlns:m="http://schemas.openxmlformats.org/officeDocument/2006/math">
-                            <m:oMathParaPr>
-                              <m:jc m:val="centerGroup"/>
-                            </m:oMathParaPr>
-                            <m:oMath xmlns:m="http://schemas.openxmlformats.org/officeDocument/2006/math">
-                              <m:r>
-                                <a:rPr lang="en-US" sz="2800" b="0" i="1" smtClean="0">
-                                  <a:latin typeface="Cambria Math" panose="02040503050406030204" pitchFamily="18" charset="0"/>
-                                </a:rPr>
-                                <m:t>𝑧</m:t>
-                              </m:r>
-                            </m:oMath>
-                          </m:oMathPara>
-                        </a14:m>
-                        <a:endParaRPr lang="en-US" sz="2800" dirty="0"/>
-                      </a:p>
-                    </p:txBody>
-                  </p:sp>
-                </mc:Choice>
-                <mc:Fallback>
-                  <p:sp>
-                    <p:nvSpPr>
-                      <p:cNvPr id="85" name="TextBox 84"/>
-                      <p:cNvSpPr txBox="1">
-                        <a:spLocks noRot="1" noChangeAspect="1" noMove="1" noResize="1" noEditPoints="1" noAdjustHandles="1" noChangeArrowheads="1" noChangeShapeType="1" noTextEdit="1"/>
-                      </p:cNvSpPr>
-                      <p:nvPr/>
-                    </p:nvSpPr>
-                    <p:spPr>
-                      <a:xfrm>
-                        <a:off x="967445" y="3767978"/>
-                        <a:ext cx="321969" cy="523220"/>
-                      </a:xfrm>
-                      <a:prstGeom prst="rect">
-                        <a:avLst/>
-                      </a:prstGeom>
-                      <a:blipFill>
-                        <a:blip r:embed="rId10"/>
-                        <a:stretch>
-                          <a:fillRect/>
-                        </a:stretch>
-                      </a:blipFill>
-                    </p:spPr>
-                    <p:txBody>
-                      <a:bodyPr/>
-                      <a:lstStyle/>
-                      <a:p>
-                        <a:r>
-                          <a:rPr lang="en-US">
-                            <a:noFill/>
-                          </a:rPr>
-                          <a:t> </a:t>
-                        </a:r>
-                      </a:p>
-                    </p:txBody>
-                  </p:sp>
-                </mc:Fallback>
-              </mc:AlternateContent>
-              <p:sp>
-                <p:nvSpPr>
-                  <p:cNvPr id="86" name="Oval 85"/>
-                  <p:cNvSpPr/>
-                  <p:nvPr/>
-                </p:nvSpPr>
-                <p:spPr>
-                  <a:xfrm>
-                    <a:off x="-403797" y="349852"/>
-                    <a:ext cx="3359137" cy="3359137"/>
-                  </a:xfrm>
-                  <a:prstGeom prst="ellipse">
-                    <a:avLst/>
-                  </a:prstGeom>
-                  <a:solidFill>
-                    <a:schemeClr val="tx2">
-                      <a:lumMod val="40000"/>
-                      <a:lumOff val="60000"/>
-                    </a:schemeClr>
-                  </a:solidFill>
-                  <a:ln>
-                    <a:solidFill>
-                      <a:schemeClr val="tx2">
-                        <a:lumMod val="60000"/>
-                        <a:lumOff val="40000"/>
-                      </a:schemeClr>
-                    </a:solidFill>
-                  </a:ln>
-                </p:spPr>
-                <p:style>
-                  <a:lnRef idx="2">
-                    <a:schemeClr val="accent1">
-                      <a:shade val="50000"/>
-                    </a:schemeClr>
-                  </a:lnRef>
-                  <a:fillRef idx="1">
-                    <a:schemeClr val="accent1"/>
-                  </a:fillRef>
-                  <a:effectRef idx="0">
-                    <a:schemeClr val="accent1"/>
-                  </a:effectRef>
-                  <a:fontRef idx="minor">
-                    <a:schemeClr val="lt1"/>
-                  </a:fontRef>
-                </p:style>
-                <p:txBody>
-                  <a:bodyPr rtlCol="0" anchor="ctr"/>
-                  <a:lstStyle/>
-                  <a:p>
-                    <a:pPr algn="ctr"/>
-                    <a:endParaRPr lang="en-US"/>
-                  </a:p>
-                </p:txBody>
-              </p:sp>
-              <p:sp>
-                <p:nvSpPr>
-                  <p:cNvPr id="88" name="Freeform 87"/>
-                  <p:cNvSpPr/>
-                  <p:nvPr/>
-                </p:nvSpPr>
-                <p:spPr>
-                  <a:xfrm>
-                    <a:off x="1275773" y="2406599"/>
-                    <a:ext cx="1635498" cy="1302391"/>
-                  </a:xfrm>
-                  <a:custGeom>
-                    <a:avLst/>
-                    <a:gdLst>
-                      <a:gd name="connsiteX0" fmla="*/ 0 w 1635498"/>
-                      <a:gd name="connsiteY0" fmla="*/ 0 h 1302391"/>
-                      <a:gd name="connsiteX1" fmla="*/ 1635498 w 1635498"/>
-                      <a:gd name="connsiteY1" fmla="*/ 0 h 1302391"/>
-                      <a:gd name="connsiteX2" fmla="*/ 1604058 w 1635498"/>
-                      <a:gd name="connsiteY2" fmla="*/ 122274 h 1302391"/>
-                      <a:gd name="connsiteX3" fmla="*/ 171725 w 1635498"/>
-                      <a:gd name="connsiteY3" fmla="*/ 1293720 h 1302391"/>
-                      <a:gd name="connsiteX4" fmla="*/ 0 w 1635498"/>
-                      <a:gd name="connsiteY4" fmla="*/ 1302391 h 1302391"/>
-                    </a:gdLst>
-                    <a:ahLst/>
-                    <a:cxnLst>
-                      <a:cxn ang="0">
-                        <a:pos x="connsiteX0" y="connsiteY0"/>
-                      </a:cxn>
-                      <a:cxn ang="0">
-                        <a:pos x="connsiteX1" y="connsiteY1"/>
-                      </a:cxn>
-                      <a:cxn ang="0">
-                        <a:pos x="connsiteX2" y="connsiteY2"/>
-                      </a:cxn>
-                      <a:cxn ang="0">
-                        <a:pos x="connsiteX3" y="connsiteY3"/>
-                      </a:cxn>
-                      <a:cxn ang="0">
-                        <a:pos x="connsiteX4" y="connsiteY4"/>
-                      </a:cxn>
-                    </a:cxnLst>
-                    <a:rect l="l" t="t" r="r" b="b"/>
-                    <a:pathLst>
-                      <a:path w="1635498" h="1302391">
-                        <a:moveTo>
-                          <a:pt x="0" y="0"/>
-                        </a:moveTo>
-                        <a:lnTo>
-                          <a:pt x="1635498" y="0"/>
-                        </a:lnTo>
-                        <a:lnTo>
-                          <a:pt x="1604058" y="122274"/>
-                        </a:lnTo>
-                        <a:cubicBezTo>
-                          <a:pt x="1407763" y="753382"/>
-                          <a:pt x="849271" y="1224911"/>
-                          <a:pt x="171725" y="1293720"/>
-                        </a:cubicBezTo>
-                        <a:lnTo>
-                          <a:pt x="0" y="1302391"/>
-                        </a:lnTo>
-                        <a:close/>
-                      </a:path>
-                    </a:pathLst>
-                  </a:custGeom>
-                  <a:solidFill>
-                    <a:srgbClr val="ADB9CA"/>
-                  </a:solidFill>
-                  <a:ln>
-                    <a:solidFill>
-                      <a:schemeClr val="tx1"/>
-                    </a:solidFill>
-                  </a:ln>
-                </p:spPr>
-                <p:style>
-                  <a:lnRef idx="2">
-                    <a:schemeClr val="accent1">
-                      <a:shade val="50000"/>
-                    </a:schemeClr>
-                  </a:lnRef>
-                  <a:fillRef idx="1">
-                    <a:schemeClr val="accent1"/>
-                  </a:fillRef>
-                  <a:effectRef idx="0">
-                    <a:schemeClr val="accent1"/>
-                  </a:effectRef>
-                  <a:fontRef idx="minor">
-                    <a:schemeClr val="lt1"/>
-                  </a:fontRef>
-                </p:style>
-                <p:txBody>
-                  <a:bodyPr rtlCol="0" anchor="ctr"/>
-                  <a:lstStyle/>
-                  <a:p>
-                    <a:pPr algn="ctr"/>
-                    <a:endParaRPr lang="en-US"/>
-                  </a:p>
-                </p:txBody>
-              </p:sp>
-              <p:cxnSp>
-                <p:nvCxnSpPr>
-                  <p:cNvPr id="90" name="Straight Connector 89"/>
-                  <p:cNvCxnSpPr>
-                    <a:endCxn id="88" idx="1"/>
-                  </p:cNvCxnSpPr>
-                  <p:nvPr/>
-                </p:nvCxnSpPr>
-                <p:spPr>
-                  <a:xfrm>
-                    <a:off x="1289414" y="1991849"/>
-                    <a:ext cx="1621857" cy="414750"/>
-                  </a:xfrm>
-                  <a:prstGeom prst="line">
-                    <a:avLst/>
-                  </a:prstGeom>
-                  <a:ln w="38100"/>
-                </p:spPr>
-                <p:style>
-                  <a:lnRef idx="1">
-                    <a:schemeClr val="accent1"/>
-                  </a:lnRef>
-                  <a:fillRef idx="0">
-                    <a:schemeClr val="accent1"/>
-                  </a:fillRef>
-                  <a:effectRef idx="0">
-                    <a:schemeClr val="accent1"/>
-                  </a:effectRef>
-                  <a:fontRef idx="minor">
-                    <a:schemeClr val="tx1"/>
-                  </a:fontRef>
-                </p:style>
-              </p:cxnSp>
-              <p:cxnSp>
-                <p:nvCxnSpPr>
-                  <p:cNvPr id="91" name="Straight Connector 90"/>
-                  <p:cNvCxnSpPr>
-                    <a:endCxn id="86" idx="4"/>
-                  </p:cNvCxnSpPr>
-                  <p:nvPr/>
-                </p:nvCxnSpPr>
-                <p:spPr>
-                  <a:xfrm flipH="1">
-                    <a:off x="1275772" y="2018010"/>
-                    <a:ext cx="13641" cy="1690979"/>
-                  </a:xfrm>
-                  <a:prstGeom prst="line">
-                    <a:avLst/>
-                  </a:prstGeom>
-                  <a:ln w="38100"/>
-                </p:spPr>
-                <p:style>
-                  <a:lnRef idx="1">
-                    <a:schemeClr val="accent1"/>
-                  </a:lnRef>
-                  <a:fillRef idx="0">
-                    <a:schemeClr val="accent1"/>
-                  </a:fillRef>
-                  <a:effectRef idx="0">
-                    <a:schemeClr val="accent1"/>
-                  </a:effectRef>
-                  <a:fontRef idx="minor">
-                    <a:schemeClr val="tx1"/>
-                  </a:fontRef>
-                </p:style>
-              </p:cxnSp>
-              <mc:AlternateContent xmlns:mc="http://schemas.openxmlformats.org/markup-compatibility/2006">
-                <mc:Choice xmlns:a14="http://schemas.microsoft.com/office/drawing/2010/main" Requires="a14">
-                  <p:sp>
-                    <p:nvSpPr>
-                      <p:cNvPr id="94" name="TextBox 93"/>
-                      <p:cNvSpPr txBox="1"/>
-                      <p:nvPr/>
-                    </p:nvSpPr>
-                    <p:spPr>
-                      <a:xfrm>
-                        <a:off x="858784" y="2716196"/>
-                        <a:ext cx="321969" cy="523220"/>
-                      </a:xfrm>
-                      <a:prstGeom prst="rect">
-                        <a:avLst/>
-                      </a:prstGeom>
-                      <a:noFill/>
-                    </p:spPr>
-                    <p:txBody>
-                      <a:bodyPr wrap="square" rtlCol="0">
-                        <a:spAutoFit/>
-                      </a:bodyPr>
-                      <a:lstStyle/>
-                      <a:p>
-                        <a14:m>
-                          <m:oMathPara xmlns:m="http://schemas.openxmlformats.org/officeDocument/2006/math">
-                            <m:oMathParaPr>
-                              <m:jc m:val="centerGroup"/>
-                            </m:oMathParaPr>
-                            <m:oMath xmlns:m="http://schemas.openxmlformats.org/officeDocument/2006/math">
-                              <m:r>
-                                <a:rPr lang="en-US" sz="2800" b="0" i="1" smtClean="0">
-                                  <a:latin typeface="Cambria Math" panose="02040503050406030204" pitchFamily="18" charset="0"/>
-                                </a:rPr>
-                                <m:t>h</m:t>
-                              </m:r>
-                            </m:oMath>
-                          </m:oMathPara>
-                        </a14:m>
-                        <a:endParaRPr lang="en-US" sz="2800" dirty="0"/>
-                      </a:p>
-                    </p:txBody>
-                  </p:sp>
-                </mc:Choice>
-                <mc:Fallback>
-                  <p:sp>
-                    <p:nvSpPr>
-                      <p:cNvPr id="94" name="TextBox 93"/>
-                      <p:cNvSpPr txBox="1">
-                        <a:spLocks noRot="1" noChangeAspect="1" noMove="1" noResize="1" noEditPoints="1" noAdjustHandles="1" noChangeArrowheads="1" noChangeShapeType="1" noTextEdit="1"/>
-                      </p:cNvSpPr>
-                      <p:nvPr/>
-                    </p:nvSpPr>
-                    <p:spPr>
-                      <a:xfrm>
-                        <a:off x="858784" y="2716196"/>
-                        <a:ext cx="321969" cy="523220"/>
-                      </a:xfrm>
-                      <a:prstGeom prst="rect">
-                        <a:avLst/>
-                      </a:prstGeom>
-                      <a:blipFill>
-                        <a:blip r:embed="rId11"/>
-                        <a:stretch>
-                          <a:fillRect/>
-                        </a:stretch>
-                      </a:blipFill>
-                    </p:spPr>
-                    <p:txBody>
-                      <a:bodyPr/>
-                      <a:lstStyle/>
-                      <a:p>
-                        <a:r>
-                          <a:rPr lang="en-US">
-                            <a:noFill/>
-                          </a:rPr>
-                          <a:t> </a:t>
-                        </a:r>
-                      </a:p>
-                    </p:txBody>
-                  </p:sp>
-                </mc:Fallback>
-              </mc:AlternateContent>
-              <mc:AlternateContent xmlns:mc="http://schemas.openxmlformats.org/markup-compatibility/2006">
-                <mc:Choice xmlns:a14="http://schemas.microsoft.com/office/drawing/2010/main" Requires="a14">
-                  <p:sp>
-                    <p:nvSpPr>
-                      <p:cNvPr id="95" name="TextBox 94"/>
-                      <p:cNvSpPr txBox="1"/>
-                      <p:nvPr/>
-                    </p:nvSpPr>
-                    <p:spPr>
-                      <a:xfrm>
-                        <a:off x="110483" y="1918286"/>
-                        <a:ext cx="1390327" cy="523220"/>
-                      </a:xfrm>
-                      <a:prstGeom prst="rect">
-                        <a:avLst/>
-                      </a:prstGeom>
-                      <a:noFill/>
-                    </p:spPr>
-                    <p:txBody>
-                      <a:bodyPr wrap="square" rtlCol="0">
-                        <a:spAutoFit/>
-                      </a:bodyPr>
-                      <a:lstStyle/>
-                      <a:p>
-                        <a14:m>
-                          <m:oMathPara xmlns:m="http://schemas.openxmlformats.org/officeDocument/2006/math">
-                            <m:oMathParaPr>
-                              <m:jc m:val="centerGroup"/>
-                            </m:oMathParaPr>
-                            <m:oMath xmlns:m="http://schemas.openxmlformats.org/officeDocument/2006/math">
-                              <m:r>
-                                <a:rPr lang="en-US" sz="2800" b="0" i="1" smtClean="0">
-                                  <a:latin typeface="Cambria Math" panose="02040503050406030204" pitchFamily="18" charset="0"/>
-                                </a:rPr>
-                                <m:t>𝑅</m:t>
-                              </m:r>
-                              <m:r>
-                                <a:rPr lang="en-US" sz="2800" b="0" i="1" smtClean="0">
-                                  <a:latin typeface="Cambria Math" panose="02040503050406030204" pitchFamily="18" charset="0"/>
-                                </a:rPr>
-                                <m:t>−</m:t>
-                              </m:r>
-                              <m:r>
-                                <a:rPr lang="en-US" sz="2800" b="0" i="1" smtClean="0">
-                                  <a:latin typeface="Cambria Math" panose="02040503050406030204" pitchFamily="18" charset="0"/>
-                                </a:rPr>
-                                <m:t>h</m:t>
-                              </m:r>
-                            </m:oMath>
-                          </m:oMathPara>
-                        </a14:m>
-                        <a:endParaRPr lang="en-US" sz="2800" dirty="0"/>
-                      </a:p>
-                    </p:txBody>
-                  </p:sp>
-                </mc:Choice>
-                <mc:Fallback>
-                  <p:sp>
-                    <p:nvSpPr>
-                      <p:cNvPr id="95" name="TextBox 94"/>
-                      <p:cNvSpPr txBox="1">
-                        <a:spLocks noRot="1" noChangeAspect="1" noMove="1" noResize="1" noEditPoints="1" noAdjustHandles="1" noChangeArrowheads="1" noChangeShapeType="1" noTextEdit="1"/>
-                      </p:cNvSpPr>
-                      <p:nvPr/>
-                    </p:nvSpPr>
-                    <p:spPr>
-                      <a:xfrm>
-                        <a:off x="110483" y="1918286"/>
-                        <a:ext cx="1390327" cy="523220"/>
-                      </a:xfrm>
-                      <a:prstGeom prst="rect">
-                        <a:avLst/>
-                      </a:prstGeom>
-                      <a:blipFill>
-                        <a:blip r:embed="rId12"/>
-                        <a:stretch>
-                          <a:fillRect/>
-                        </a:stretch>
-                      </a:blipFill>
-                    </p:spPr>
-                    <p:txBody>
-                      <a:bodyPr/>
-                      <a:lstStyle/>
-                      <a:p>
-                        <a:r>
-                          <a:rPr lang="en-US">
-                            <a:noFill/>
-                          </a:rPr>
-                          <a:t> </a:t>
-                        </a:r>
-                      </a:p>
-                    </p:txBody>
-                  </p:sp>
-                </mc:Fallback>
-              </mc:AlternateContent>
-              <mc:AlternateContent xmlns:mc="http://schemas.openxmlformats.org/markup-compatibility/2006">
-                <mc:Choice xmlns:a14="http://schemas.microsoft.com/office/drawing/2010/main" Requires="a14">
-                  <p:sp>
-                    <p:nvSpPr>
-                      <p:cNvPr id="96" name="TextBox 95"/>
-                      <p:cNvSpPr txBox="1"/>
-                      <p:nvPr/>
-                    </p:nvSpPr>
-                    <p:spPr>
-                      <a:xfrm>
-                        <a:off x="1480156" y="1608689"/>
-                        <a:ext cx="1390327" cy="523220"/>
-                      </a:xfrm>
-                      <a:prstGeom prst="rect">
-                        <a:avLst/>
-                      </a:prstGeom>
-                      <a:noFill/>
-                    </p:spPr>
-                    <p:txBody>
-                      <a:bodyPr wrap="square" rtlCol="0">
-                        <a:spAutoFit/>
-                      </a:bodyPr>
-                      <a:lstStyle/>
-                      <a:p>
-                        <a14:m>
-                          <m:oMathPara xmlns:m="http://schemas.openxmlformats.org/officeDocument/2006/math">
-                            <m:oMathParaPr>
-                              <m:jc m:val="centerGroup"/>
-                            </m:oMathParaPr>
-                            <m:oMath xmlns:m="http://schemas.openxmlformats.org/officeDocument/2006/math">
-                              <m:r>
-                                <a:rPr lang="en-US" sz="2800" b="0" i="1" smtClean="0">
-                                  <a:latin typeface="Cambria Math" panose="02040503050406030204" pitchFamily="18" charset="0"/>
-                                </a:rPr>
-                                <m:t>𝑅</m:t>
-                              </m:r>
-                            </m:oMath>
-                          </m:oMathPara>
-                        </a14:m>
-                        <a:endParaRPr lang="en-US" sz="2800" dirty="0"/>
-                      </a:p>
-                    </p:txBody>
-                  </p:sp>
-                </mc:Choice>
-                <mc:Fallback>
-                  <p:sp>
-                    <p:nvSpPr>
-                      <p:cNvPr id="96" name="TextBox 95"/>
-                      <p:cNvSpPr txBox="1">
-                        <a:spLocks noRot="1" noChangeAspect="1" noMove="1" noResize="1" noEditPoints="1" noAdjustHandles="1" noChangeArrowheads="1" noChangeShapeType="1" noTextEdit="1"/>
-                      </p:cNvSpPr>
-                      <p:nvPr/>
-                    </p:nvSpPr>
-                    <p:spPr>
-                      <a:xfrm>
-                        <a:off x="1480156" y="1608689"/>
-                        <a:ext cx="1390327" cy="523220"/>
-                      </a:xfrm>
-                      <a:prstGeom prst="rect">
-                        <a:avLst/>
-                      </a:prstGeom>
-                      <a:blipFill>
-                        <a:blip r:embed="rId13"/>
-                        <a:stretch>
-                          <a:fillRect/>
-                        </a:stretch>
-                      </a:blipFill>
-                    </p:spPr>
-                    <p:txBody>
-                      <a:bodyPr/>
-                      <a:lstStyle/>
-                      <a:p>
-                        <a:r>
-                          <a:rPr lang="en-US">
-                            <a:noFill/>
-                          </a:rPr>
-                          <a:t> </a:t>
-                        </a:r>
-                      </a:p>
-                    </p:txBody>
-                  </p:sp>
-                </mc:Fallback>
-              </mc:AlternateContent>
-              <mc:AlternateContent xmlns:mc="http://schemas.openxmlformats.org/markup-compatibility/2006">
-                <mc:Choice xmlns:a14="http://schemas.microsoft.com/office/drawing/2010/main" Requires="a14">
-                  <p:sp>
-                    <p:nvSpPr>
-                      <p:cNvPr id="97" name="TextBox 96"/>
-                      <p:cNvSpPr txBox="1"/>
-                      <p:nvPr/>
-                    </p:nvSpPr>
-                    <p:spPr>
-                      <a:xfrm>
-                        <a:off x="1243834" y="1944447"/>
-                        <a:ext cx="321969" cy="523220"/>
-                      </a:xfrm>
-                      <a:prstGeom prst="rect">
-                        <a:avLst/>
-                      </a:prstGeom>
-                      <a:noFill/>
-                    </p:spPr>
-                    <p:txBody>
-                      <a:bodyPr wrap="square" rtlCol="0">
-                        <a:spAutoFit/>
-                      </a:bodyPr>
-                      <a:lstStyle/>
-                      <a:p>
-                        <a14:m>
-                          <m:oMathPara xmlns:m="http://schemas.openxmlformats.org/officeDocument/2006/math">
-                            <m:oMathParaPr>
-                              <m:jc m:val="centerGroup"/>
-                            </m:oMathParaPr>
-                            <m:oMath xmlns:m="http://schemas.openxmlformats.org/officeDocument/2006/math">
-                              <m:r>
-                                <a:rPr lang="en-US" sz="2800" b="0" i="1" smtClean="0">
-                                  <a:latin typeface="Cambria Math" panose="02040503050406030204" pitchFamily="18" charset="0"/>
-                                </a:rPr>
-                                <m:t>𝜃</m:t>
-                              </m:r>
-                            </m:oMath>
-                          </m:oMathPara>
-                        </a14:m>
-                        <a:endParaRPr lang="en-US" sz="2800" dirty="0"/>
-                      </a:p>
-                    </p:txBody>
-                  </p:sp>
-                </mc:Choice>
-                <mc:Fallback>
-                  <p:sp>
-                    <p:nvSpPr>
-                      <p:cNvPr id="97" name="TextBox 96"/>
-                      <p:cNvSpPr txBox="1">
-                        <a:spLocks noRot="1" noChangeAspect="1" noMove="1" noResize="1" noEditPoints="1" noAdjustHandles="1" noChangeArrowheads="1" noChangeShapeType="1" noTextEdit="1"/>
-                      </p:cNvSpPr>
-                      <p:nvPr/>
-                    </p:nvSpPr>
-                    <p:spPr>
-                      <a:xfrm>
-                        <a:off x="1243834" y="1944447"/>
-                        <a:ext cx="321969" cy="523220"/>
-                      </a:xfrm>
-                      <a:prstGeom prst="rect">
-                        <a:avLst/>
-                      </a:prstGeom>
-                      <a:blipFill>
-                        <a:blip r:embed="rId14"/>
-                        <a:stretch>
-                          <a:fillRect/>
-                        </a:stretch>
-                      </a:blipFill>
-                    </p:spPr>
-                    <p:txBody>
-                      <a:bodyPr/>
-                      <a:lstStyle/>
-                      <a:p>
-                        <a:r>
-                          <a:rPr lang="en-US">
-                            <a:noFill/>
-                          </a:rPr>
-                          <a:t> </a:t>
-                        </a:r>
-                      </a:p>
-                    </p:txBody>
-                  </p:sp>
-                </mc:Fallback>
-              </mc:AlternateContent>
-            </p:grpSp>
-          </p:grpSp>
           <p:sp>
             <p:nvSpPr>
-              <p:cNvPr id="100" name="Flowchart: Or 99"/>
+              <p:cNvPr id="4" name="Rectangle 3"/>
               <p:cNvSpPr/>
               <p:nvPr/>
             </p:nvSpPr>
             <p:spPr>
               <a:xfrm>
-                <a:off x="3473146" y="3839017"/>
-                <a:ext cx="300941" cy="300941"/>
+                <a:off x="3453492" y="1445078"/>
+                <a:ext cx="4629150" cy="1551214"/>
               </a:xfrm>
-              <a:prstGeom prst="flowChartOr">
+              <a:prstGeom prst="rect">
                 <a:avLst/>
               </a:prstGeom>
+              <a:solidFill>
+                <a:schemeClr val="bg2">
+                  <a:lumMod val="90000"/>
+                </a:schemeClr>
+              </a:solidFill>
+              <a:ln>
+                <a:solidFill>
+                  <a:schemeClr val="tx1"/>
+                </a:solidFill>
+              </a:ln>
+              <a:scene3d>
+                <a:camera prst="isometricRightUp"/>
+                <a:lightRig rig="threePt" dir="t"/>
+              </a:scene3d>
             </p:spPr>
             <p:style>
               <a:lnRef idx="2">
@@ -5579,26 +3053,32 @@
           </p:sp>
           <p:sp>
             <p:nvSpPr>
-              <p:cNvPr id="101" name="Flowchart: Or 100"/>
+              <p:cNvPr id="5" name="Rectangle 4"/>
               <p:cNvSpPr/>
               <p:nvPr/>
             </p:nvSpPr>
             <p:spPr>
               <a:xfrm>
-                <a:off x="4052484" y="3839017"/>
-                <a:ext cx="300941" cy="300941"/>
+                <a:off x="5238749" y="2506436"/>
+                <a:ext cx="4629150" cy="1551214"/>
               </a:xfrm>
-              <a:prstGeom prst="flowChartOr">
+              <a:prstGeom prst="rect">
                 <a:avLst/>
               </a:prstGeom>
               <a:solidFill>
-                <a:srgbClr val="D08452"/>
+                <a:schemeClr val="bg2">
+                  <a:lumMod val="90000"/>
+                </a:schemeClr>
               </a:solidFill>
               <a:ln>
                 <a:solidFill>
                   <a:schemeClr val="tx1"/>
                 </a:solidFill>
               </a:ln>
+              <a:scene3d>
+                <a:camera prst="isometricRightUp"/>
+                <a:lightRig rig="threePt" dir="t"/>
+              </a:scene3d>
             </p:spPr>
             <p:style>
               <a:lnRef idx="2">
@@ -5625,17 +3105,452 @@
               </a:p>
             </p:txBody>
           </p:sp>
-          <mc:AlternateContent xmlns:mc="http://schemas.openxmlformats.org/markup-compatibility/2006">
-            <mc:Choice xmlns:a14="http://schemas.microsoft.com/office/drawing/2010/main" Requires="a14">
+          <p:grpSp>
+            <p:nvGrpSpPr>
+              <p:cNvPr id="20" name="Group 19"/>
+              <p:cNvGrpSpPr/>
+              <p:nvPr/>
+            </p:nvGrpSpPr>
+            <p:grpSpPr>
+              <a:xfrm>
+                <a:off x="7356768" y="642809"/>
+                <a:ext cx="1665042" cy="1365369"/>
+                <a:chOff x="6977743" y="1249140"/>
+                <a:chExt cx="1665042" cy="1365369"/>
+              </a:xfrm>
+            </p:grpSpPr>
+            <p:cxnSp>
+              <p:nvCxnSpPr>
+                <p:cNvPr id="9" name="Straight Arrow Connector 8"/>
+                <p:cNvCxnSpPr/>
+                <p:nvPr/>
+              </p:nvCxnSpPr>
+              <p:spPr>
+                <a:xfrm flipH="1" flipV="1">
+                  <a:off x="6977744" y="1249140"/>
+                  <a:ext cx="1665041" cy="1121835"/>
+                </a:xfrm>
+                <a:prstGeom prst="straightConnector1">
+                  <a:avLst/>
+                </a:prstGeom>
+                <a:ln w="25400">
+                  <a:solidFill>
+                    <a:schemeClr val="accent2">
+                      <a:lumMod val="75000"/>
+                    </a:schemeClr>
+                  </a:solidFill>
+                  <a:tailEnd type="triangle"/>
+                </a:ln>
+              </p:spPr>
+              <p:style>
+                <a:lnRef idx="1">
+                  <a:schemeClr val="accent1"/>
+                </a:lnRef>
+                <a:fillRef idx="0">
+                  <a:schemeClr val="accent1"/>
+                </a:fillRef>
+                <a:effectRef idx="0">
+                  <a:schemeClr val="accent1"/>
+                </a:effectRef>
+                <a:fontRef idx="minor">
+                  <a:schemeClr val="tx1"/>
+                </a:fontRef>
+              </p:style>
+            </p:cxnSp>
+            <p:cxnSp>
+              <p:nvCxnSpPr>
+                <p:cNvPr id="11" name="Straight Arrow Connector 10"/>
+                <p:cNvCxnSpPr/>
+                <p:nvPr/>
+              </p:nvCxnSpPr>
+              <p:spPr>
+                <a:xfrm flipH="1" flipV="1">
+                  <a:off x="6977743" y="1783897"/>
+                  <a:ext cx="1232805" cy="830612"/>
+                </a:xfrm>
+                <a:prstGeom prst="straightConnector1">
+                  <a:avLst/>
+                </a:prstGeom>
+                <a:ln w="25400">
+                  <a:solidFill>
+                    <a:schemeClr val="accent2">
+                      <a:lumMod val="75000"/>
+                    </a:schemeClr>
+                  </a:solidFill>
+                  <a:tailEnd type="triangle"/>
+                </a:ln>
+              </p:spPr>
+              <p:style>
+                <a:lnRef idx="1">
+                  <a:schemeClr val="accent1"/>
+                </a:lnRef>
+                <a:fillRef idx="0">
+                  <a:schemeClr val="accent1"/>
+                </a:fillRef>
+                <a:effectRef idx="0">
+                  <a:schemeClr val="accent1"/>
+                </a:effectRef>
+                <a:fontRef idx="minor">
+                  <a:schemeClr val="tx1"/>
+                </a:fontRef>
+              </p:style>
+            </p:cxnSp>
+          </p:grpSp>
+          <p:grpSp>
+            <p:nvGrpSpPr>
+              <p:cNvPr id="21" name="Group 20"/>
+              <p:cNvGrpSpPr/>
+              <p:nvPr/>
+            </p:nvGrpSpPr>
+            <p:grpSpPr>
+              <a:xfrm>
+                <a:off x="4311976" y="2424793"/>
+                <a:ext cx="1672445" cy="1601561"/>
+                <a:chOff x="6977744" y="1249139"/>
+                <a:chExt cx="1672445" cy="1601561"/>
+              </a:xfrm>
+            </p:grpSpPr>
+            <p:cxnSp>
+              <p:nvCxnSpPr>
+                <p:cNvPr id="22" name="Straight Arrow Connector 21"/>
+                <p:cNvCxnSpPr/>
+                <p:nvPr/>
+              </p:nvCxnSpPr>
+              <p:spPr>
+                <a:xfrm flipH="1" flipV="1">
+                  <a:off x="6977744" y="1249139"/>
+                  <a:ext cx="1672445" cy="1126824"/>
+                </a:xfrm>
+                <a:prstGeom prst="straightConnector1">
+                  <a:avLst/>
+                </a:prstGeom>
+                <a:ln w="25400">
+                  <a:solidFill>
+                    <a:schemeClr val="accent2">
+                      <a:lumMod val="75000"/>
+                    </a:schemeClr>
+                  </a:solidFill>
+                  <a:tailEnd type="triangle"/>
+                </a:ln>
+              </p:spPr>
+              <p:style>
+                <a:lnRef idx="1">
+                  <a:schemeClr val="accent1"/>
+                </a:lnRef>
+                <a:fillRef idx="0">
+                  <a:schemeClr val="accent1"/>
+                </a:fillRef>
+                <a:effectRef idx="0">
+                  <a:schemeClr val="accent1"/>
+                </a:effectRef>
+                <a:fontRef idx="minor">
+                  <a:schemeClr val="tx1"/>
+                </a:fontRef>
+              </p:style>
+            </p:cxnSp>
+            <p:cxnSp>
+              <p:nvCxnSpPr>
+                <p:cNvPr id="23" name="Straight Arrow Connector 22"/>
+                <p:cNvCxnSpPr/>
+                <p:nvPr/>
+              </p:nvCxnSpPr>
+              <p:spPr>
+                <a:xfrm flipH="1" flipV="1">
+                  <a:off x="6977744" y="1783897"/>
+                  <a:ext cx="1583361" cy="1066803"/>
+                </a:xfrm>
+                <a:prstGeom prst="straightConnector1">
+                  <a:avLst/>
+                </a:prstGeom>
+                <a:ln w="25400">
+                  <a:solidFill>
+                    <a:schemeClr val="accent2">
+                      <a:lumMod val="75000"/>
+                    </a:schemeClr>
+                  </a:solidFill>
+                  <a:tailEnd type="triangle"/>
+                </a:ln>
+              </p:spPr>
+              <p:style>
+                <a:lnRef idx="1">
+                  <a:schemeClr val="accent1"/>
+                </a:lnRef>
+                <a:fillRef idx="0">
+                  <a:schemeClr val="accent1"/>
+                </a:fillRef>
+                <a:effectRef idx="0">
+                  <a:schemeClr val="accent1"/>
+                </a:effectRef>
+                <a:fontRef idx="minor">
+                  <a:schemeClr val="tx1"/>
+                </a:fontRef>
+              </p:style>
+            </p:cxnSp>
+          </p:grpSp>
+          <p:grpSp>
+            <p:nvGrpSpPr>
+              <p:cNvPr id="26" name="Group 25"/>
+              <p:cNvGrpSpPr/>
+              <p:nvPr/>
+            </p:nvGrpSpPr>
+            <p:grpSpPr>
+              <a:xfrm>
+                <a:off x="5691724" y="1616060"/>
+                <a:ext cx="1665043" cy="1401224"/>
+                <a:chOff x="6977745" y="1249140"/>
+                <a:chExt cx="1665043" cy="1401224"/>
+              </a:xfrm>
+            </p:grpSpPr>
+            <p:cxnSp>
+              <p:nvCxnSpPr>
+                <p:cNvPr id="27" name="Straight Arrow Connector 26"/>
+                <p:cNvCxnSpPr/>
+                <p:nvPr/>
+              </p:nvCxnSpPr>
+              <p:spPr>
+                <a:xfrm flipH="1" flipV="1">
+                  <a:off x="6977745" y="1249140"/>
+                  <a:ext cx="1665043" cy="1121836"/>
+                </a:xfrm>
+                <a:prstGeom prst="straightConnector1">
+                  <a:avLst/>
+                </a:prstGeom>
+                <a:ln w="25400">
+                  <a:solidFill>
+                    <a:schemeClr val="accent2">
+                      <a:lumMod val="75000"/>
+                    </a:schemeClr>
+                  </a:solidFill>
+                  <a:tailEnd type="triangle"/>
+                </a:ln>
+              </p:spPr>
+              <p:style>
+                <a:lnRef idx="1">
+                  <a:schemeClr val="accent1"/>
+                </a:lnRef>
+                <a:fillRef idx="0">
+                  <a:schemeClr val="accent1"/>
+                </a:fillRef>
+                <a:effectRef idx="0">
+                  <a:schemeClr val="accent1"/>
+                </a:effectRef>
+                <a:fontRef idx="minor">
+                  <a:schemeClr val="tx1"/>
+                </a:fontRef>
+              </p:style>
+            </p:cxnSp>
+            <p:cxnSp>
+              <p:nvCxnSpPr>
+                <p:cNvPr id="28" name="Straight Arrow Connector 27"/>
+                <p:cNvCxnSpPr/>
+                <p:nvPr/>
+              </p:nvCxnSpPr>
+              <p:spPr>
+                <a:xfrm flipH="1" flipV="1">
+                  <a:off x="6977746" y="1783897"/>
+                  <a:ext cx="1286017" cy="866467"/>
+                </a:xfrm>
+                <a:prstGeom prst="straightConnector1">
+                  <a:avLst/>
+                </a:prstGeom>
+                <a:ln w="25400">
+                  <a:solidFill>
+                    <a:schemeClr val="accent2">
+                      <a:lumMod val="75000"/>
+                    </a:schemeClr>
+                  </a:solidFill>
+                  <a:tailEnd type="triangle"/>
+                </a:ln>
+              </p:spPr>
+              <p:style>
+                <a:lnRef idx="1">
+                  <a:schemeClr val="accent1"/>
+                </a:lnRef>
+                <a:fillRef idx="0">
+                  <a:schemeClr val="accent1"/>
+                </a:fillRef>
+                <a:effectRef idx="0">
+                  <a:schemeClr val="accent1"/>
+                </a:effectRef>
+                <a:fontRef idx="minor">
+                  <a:schemeClr val="tx1"/>
+                </a:fontRef>
+              </p:style>
+            </p:cxnSp>
+          </p:grpSp>
+          <p:grpSp>
+            <p:nvGrpSpPr>
+              <p:cNvPr id="34" name="Group 33"/>
+              <p:cNvGrpSpPr/>
+              <p:nvPr/>
+            </p:nvGrpSpPr>
+            <p:grpSpPr>
+              <a:xfrm>
+                <a:off x="5064709" y="1969486"/>
+                <a:ext cx="1689112" cy="1412231"/>
+                <a:chOff x="6977744" y="1249139"/>
+                <a:chExt cx="1689112" cy="1412231"/>
+              </a:xfrm>
+            </p:grpSpPr>
+            <p:cxnSp>
+              <p:nvCxnSpPr>
+                <p:cNvPr id="35" name="Straight Arrow Connector 34"/>
+                <p:cNvCxnSpPr/>
+                <p:nvPr/>
+              </p:nvCxnSpPr>
+              <p:spPr>
+                <a:xfrm flipH="1" flipV="1">
+                  <a:off x="6977744" y="1249139"/>
+                  <a:ext cx="1689112" cy="1138054"/>
+                </a:xfrm>
+                <a:prstGeom prst="straightConnector1">
+                  <a:avLst/>
+                </a:prstGeom>
+                <a:ln w="25400">
+                  <a:tailEnd type="triangle"/>
+                </a:ln>
+              </p:spPr>
+              <p:style>
+                <a:lnRef idx="1">
+                  <a:schemeClr val="accent1"/>
+                </a:lnRef>
+                <a:fillRef idx="0">
+                  <a:schemeClr val="accent1"/>
+                </a:fillRef>
+                <a:effectRef idx="0">
+                  <a:schemeClr val="accent1"/>
+                </a:effectRef>
+                <a:fontRef idx="minor">
+                  <a:schemeClr val="tx1"/>
+                </a:fontRef>
+              </p:style>
+            </p:cxnSp>
+            <p:cxnSp>
+              <p:nvCxnSpPr>
+                <p:cNvPr id="36" name="Straight Arrow Connector 35"/>
+                <p:cNvCxnSpPr/>
+                <p:nvPr/>
+              </p:nvCxnSpPr>
+              <p:spPr>
+                <a:xfrm flipH="1" flipV="1">
+                  <a:off x="6977744" y="1783897"/>
+                  <a:ext cx="1302355" cy="877473"/>
+                </a:xfrm>
+                <a:prstGeom prst="straightConnector1">
+                  <a:avLst/>
+                </a:prstGeom>
+                <a:ln w="25400">
+                  <a:tailEnd type="triangle"/>
+                </a:ln>
+              </p:spPr>
+              <p:style>
+                <a:lnRef idx="1">
+                  <a:schemeClr val="accent1"/>
+                </a:lnRef>
+                <a:fillRef idx="0">
+                  <a:schemeClr val="accent1"/>
+                </a:fillRef>
+                <a:effectRef idx="0">
+                  <a:schemeClr val="accent1"/>
+                </a:effectRef>
+                <a:fontRef idx="minor">
+                  <a:schemeClr val="tx1"/>
+                </a:fontRef>
+              </p:style>
+            </p:cxnSp>
+          </p:grpSp>
+          <p:grpSp>
+            <p:nvGrpSpPr>
+              <p:cNvPr id="47" name="Group 46"/>
+              <p:cNvGrpSpPr/>
+              <p:nvPr/>
+            </p:nvGrpSpPr>
+            <p:grpSpPr>
+              <a:xfrm>
+                <a:off x="6477706" y="1165689"/>
+                <a:ext cx="1665043" cy="1401224"/>
+                <a:chOff x="6977745" y="1249140"/>
+                <a:chExt cx="1665043" cy="1401224"/>
+              </a:xfrm>
+            </p:grpSpPr>
+            <p:cxnSp>
+              <p:nvCxnSpPr>
+                <p:cNvPr id="48" name="Straight Arrow Connector 47"/>
+                <p:cNvCxnSpPr/>
+                <p:nvPr/>
+              </p:nvCxnSpPr>
+              <p:spPr>
+                <a:xfrm flipH="1" flipV="1">
+                  <a:off x="6977745" y="1249140"/>
+                  <a:ext cx="1665043" cy="1121836"/>
+                </a:xfrm>
+                <a:prstGeom prst="straightConnector1">
+                  <a:avLst/>
+                </a:prstGeom>
+                <a:ln w="25400">
+                  <a:tailEnd type="triangle"/>
+                </a:ln>
+              </p:spPr>
+              <p:style>
+                <a:lnRef idx="1">
+                  <a:schemeClr val="accent1"/>
+                </a:lnRef>
+                <a:fillRef idx="0">
+                  <a:schemeClr val="accent1"/>
+                </a:fillRef>
+                <a:effectRef idx="0">
+                  <a:schemeClr val="accent1"/>
+                </a:effectRef>
+                <a:fontRef idx="minor">
+                  <a:schemeClr val="tx1"/>
+                </a:fontRef>
+              </p:style>
+            </p:cxnSp>
+            <p:cxnSp>
+              <p:nvCxnSpPr>
+                <p:cNvPr id="49" name="Straight Arrow Connector 48"/>
+                <p:cNvCxnSpPr/>
+                <p:nvPr/>
+              </p:nvCxnSpPr>
+              <p:spPr>
+                <a:xfrm flipH="1" flipV="1">
+                  <a:off x="6977746" y="1783897"/>
+                  <a:ext cx="1286017" cy="866467"/>
+                </a:xfrm>
+                <a:prstGeom prst="straightConnector1">
+                  <a:avLst/>
+                </a:prstGeom>
+                <a:ln w="25400">
+                  <a:tailEnd type="triangle"/>
+                </a:ln>
+              </p:spPr>
+              <p:style>
+                <a:lnRef idx="1">
+                  <a:schemeClr val="accent1"/>
+                </a:lnRef>
+                <a:fillRef idx="0">
+                  <a:schemeClr val="accent1"/>
+                </a:fillRef>
+                <a:effectRef idx="0">
+                  <a:schemeClr val="accent1"/>
+                </a:effectRef>
+                <a:fontRef idx="minor">
+                  <a:schemeClr val="tx1"/>
+                </a:fontRef>
+              </p:style>
+            </p:cxnSp>
+          </p:grpSp>
+          <mc:AlternateContent xmlns:mc="http://schemas.openxmlformats.org/markup-compatibility/2006" xmlns:a14="http://schemas.microsoft.com/office/drawing/2010/main">
+            <mc:Choice Requires="a14">
               <p:sp>
                 <p:nvSpPr>
-                  <p:cNvPr id="102" name="TextBox 101"/>
+                  <p:cNvPr id="50" name="TextBox 49"/>
                   <p:cNvSpPr txBox="1"/>
                   <p:nvPr/>
                 </p:nvSpPr>
                 <p:spPr>
                   <a:xfrm>
-                    <a:off x="3973584" y="4151664"/>
+                    <a:off x="7081052" y="3059867"/>
                     <a:ext cx="472272" cy="782587"/>
                   </a:xfrm>
                   <a:prstGeom prst="rect">
@@ -5649,6 +3564,7 @@
                   </a:bodyPr>
                   <a:lstStyle/>
                   <a:p>
+                    <a:pPr/>
                     <a14:m>
                       <m:oMathPara xmlns:m="http://schemas.openxmlformats.org/officeDocument/2006/math">
                         <m:oMathParaPr>
@@ -5691,10 +3607,10 @@
                 </p:txBody>
               </p:sp>
             </mc:Choice>
-            <mc:Fallback>
+            <mc:Fallback xmlns="">
               <p:sp>
                 <p:nvSpPr>
-                  <p:cNvPr id="102" name="TextBox 101"/>
+                  <p:cNvPr id="50" name="TextBox 49"/>
                   <p:cNvSpPr txBox="1">
                     <a:spLocks noRot="1" noChangeAspect="1" noMove="1" noResize="1" noEditPoints="1" noAdjustHandles="1" noChangeArrowheads="1" noChangeShapeType="1" noTextEdit="1"/>
                   </p:cNvSpPr>
@@ -5702,14 +3618,14 @@
                 </p:nvSpPr>
                 <p:spPr>
                   <a:xfrm>
-                    <a:off x="3973584" y="4151664"/>
+                    <a:off x="7081052" y="3059867"/>
                     <a:ext cx="472272" cy="782587"/>
                   </a:xfrm>
                   <a:prstGeom prst="rect">
                     <a:avLst/>
                   </a:prstGeom>
                   <a:blipFill>
-                    <a:blip r:embed="rId15"/>
+                    <a:blip r:embed="rId2"/>
                     <a:stretch>
                       <a:fillRect/>
                     </a:stretch>
@@ -5730,17 +3646,17 @@
               </p:sp>
             </mc:Fallback>
           </mc:AlternateContent>
-          <mc:AlternateContent xmlns:mc="http://schemas.openxmlformats.org/markup-compatibility/2006">
-            <mc:Choice xmlns:a14="http://schemas.microsoft.com/office/drawing/2010/main" Requires="a14">
+          <mc:AlternateContent xmlns:mc="http://schemas.openxmlformats.org/markup-compatibility/2006" xmlns:a14="http://schemas.microsoft.com/office/drawing/2010/main">
+            <mc:Choice Requires="a14">
               <p:sp>
                 <p:nvSpPr>
-                  <p:cNvPr id="103" name="TextBox 102"/>
+                  <p:cNvPr id="51" name="TextBox 50"/>
                   <p:cNvSpPr txBox="1"/>
                   <p:nvPr/>
                 </p:nvSpPr>
                 <p:spPr>
                   <a:xfrm>
-                    <a:off x="3416777" y="4151664"/>
+                    <a:off x="6524245" y="3359874"/>
                     <a:ext cx="472272" cy="782587"/>
                   </a:xfrm>
                   <a:prstGeom prst="rect">
@@ -5754,6 +3670,7 @@
                   </a:bodyPr>
                   <a:lstStyle/>
                   <a:p>
+                    <a:pPr/>
                     <a14:m>
                       <m:oMathPara xmlns:m="http://schemas.openxmlformats.org/officeDocument/2006/math">
                         <m:oMathParaPr>
@@ -5796,10 +3713,10 @@
                 </p:txBody>
               </p:sp>
             </mc:Choice>
-            <mc:Fallback>
+            <mc:Fallback xmlns="">
               <p:sp>
                 <p:nvSpPr>
-                  <p:cNvPr id="103" name="TextBox 102"/>
+                  <p:cNvPr id="51" name="TextBox 50"/>
                   <p:cNvSpPr txBox="1">
                     <a:spLocks noRot="1" noChangeAspect="1" noMove="1" noResize="1" noEditPoints="1" noAdjustHandles="1" noChangeArrowheads="1" noChangeShapeType="1" noTextEdit="1"/>
                   </p:cNvSpPr>
@@ -5807,14 +3724,1233 @@
                 </p:nvSpPr>
                 <p:spPr>
                   <a:xfrm>
-                    <a:off x="3416777" y="4151664"/>
+                    <a:off x="6524245" y="3359874"/>
                     <a:ext cx="472272" cy="782587"/>
                   </a:xfrm>
                   <a:prstGeom prst="rect">
                     <a:avLst/>
                   </a:prstGeom>
                   <a:blipFill>
-                    <a:blip r:embed="rId16"/>
+                    <a:blip r:embed="rId3"/>
+                    <a:stretch>
+                      <a:fillRect/>
+                    </a:stretch>
+                  </a:blipFill>
+                </p:spPr>
+                <p:txBody>
+                  <a:bodyPr/>
+                  <a:lstStyle/>
+                  <a:p>
+                    <a:r>
+                      <a:rPr lang="en-US">
+                        <a:noFill/>
+                      </a:rPr>
+                      <a:t> </a:t>
+                    </a:r>
+                  </a:p>
+                </p:txBody>
+              </p:sp>
+            </mc:Fallback>
+          </mc:AlternateContent>
+        </p:grpSp>
+        <p:sp>
+          <p:nvSpPr>
+            <p:cNvPr id="52" name="Arc 51"/>
+            <p:cNvSpPr/>
+            <p:nvPr/>
+          </p:nvSpPr>
+          <p:spPr>
+            <a:xfrm rot="4500000">
+              <a:off x="5483485" y="775539"/>
+              <a:ext cx="2998251" cy="3606779"/>
+            </a:xfrm>
+            <a:prstGeom prst="arc">
+              <a:avLst>
+                <a:gd name="adj1" fmla="val 16100853"/>
+                <a:gd name="adj2" fmla="val 0"/>
+              </a:avLst>
+            </a:prstGeom>
+            <a:ln w="47625">
+              <a:solidFill>
+                <a:schemeClr val="tx1"/>
+              </a:solidFill>
+              <a:headEnd type="triangle"/>
+            </a:ln>
+          </p:spPr>
+          <p:style>
+            <a:lnRef idx="1">
+              <a:schemeClr val="accent1"/>
+            </a:lnRef>
+            <a:fillRef idx="0">
+              <a:schemeClr val="accent1"/>
+            </a:fillRef>
+            <a:effectRef idx="0">
+              <a:schemeClr val="accent1"/>
+            </a:effectRef>
+            <a:fontRef idx="minor">
+              <a:schemeClr val="tx1"/>
+            </a:fontRef>
+          </p:style>
+          <p:txBody>
+            <a:bodyPr rtlCol="0" anchor="ctr"/>
+            <a:lstStyle/>
+            <a:p>
+              <a:pPr algn="ctr"/>
+              <a:endParaRPr lang="en-US"/>
+            </a:p>
+          </p:txBody>
+        </p:sp>
+        <p:sp>
+          <p:nvSpPr>
+            <p:cNvPr id="57" name="Flowchart: Data 56"/>
+            <p:cNvSpPr/>
+            <p:nvPr/>
+          </p:nvSpPr>
+          <p:spPr>
+            <a:xfrm rot="2310327">
+              <a:off x="7155034" y="517975"/>
+              <a:ext cx="3453207" cy="3780596"/>
+            </a:xfrm>
+            <a:custGeom>
+              <a:avLst/>
+              <a:gdLst>
+                <a:gd name="connsiteX0" fmla="*/ 0 w 10000"/>
+                <a:gd name="connsiteY0" fmla="*/ 10000 h 10000"/>
+                <a:gd name="connsiteX1" fmla="*/ 2000 w 10000"/>
+                <a:gd name="connsiteY1" fmla="*/ 0 h 10000"/>
+                <a:gd name="connsiteX2" fmla="*/ 10000 w 10000"/>
+                <a:gd name="connsiteY2" fmla="*/ 0 h 10000"/>
+                <a:gd name="connsiteX3" fmla="*/ 8000 w 10000"/>
+                <a:gd name="connsiteY3" fmla="*/ 10000 h 10000"/>
+                <a:gd name="connsiteX4" fmla="*/ 0 w 10000"/>
+                <a:gd name="connsiteY4" fmla="*/ 10000 h 10000"/>
+                <a:gd name="connsiteX0" fmla="*/ 0 w 10153"/>
+                <a:gd name="connsiteY0" fmla="*/ 15400 h 15400"/>
+                <a:gd name="connsiteX1" fmla="*/ 10153 w 10153"/>
+                <a:gd name="connsiteY1" fmla="*/ 0 h 15400"/>
+                <a:gd name="connsiteX2" fmla="*/ 10000 w 10153"/>
+                <a:gd name="connsiteY2" fmla="*/ 5400 h 15400"/>
+                <a:gd name="connsiteX3" fmla="*/ 8000 w 10153"/>
+                <a:gd name="connsiteY3" fmla="*/ 15400 h 15400"/>
+                <a:gd name="connsiteX4" fmla="*/ 0 w 10153"/>
+                <a:gd name="connsiteY4" fmla="*/ 15400 h 15400"/>
+                <a:gd name="connsiteX0" fmla="*/ 0 w 24560"/>
+                <a:gd name="connsiteY0" fmla="*/ 16487 h 16487"/>
+                <a:gd name="connsiteX1" fmla="*/ 10153 w 24560"/>
+                <a:gd name="connsiteY1" fmla="*/ 1087 h 16487"/>
+                <a:gd name="connsiteX2" fmla="*/ 24560 w 24560"/>
+                <a:gd name="connsiteY2" fmla="*/ 0 h 16487"/>
+                <a:gd name="connsiteX3" fmla="*/ 8000 w 24560"/>
+                <a:gd name="connsiteY3" fmla="*/ 16487 h 16487"/>
+                <a:gd name="connsiteX4" fmla="*/ 0 w 24560"/>
+                <a:gd name="connsiteY4" fmla="*/ 16487 h 16487"/>
+                <a:gd name="connsiteX0" fmla="*/ 0 w 24560"/>
+                <a:gd name="connsiteY0" fmla="*/ 16487 h 16487"/>
+                <a:gd name="connsiteX1" fmla="*/ 10153 w 24560"/>
+                <a:gd name="connsiteY1" fmla="*/ 1087 h 16487"/>
+                <a:gd name="connsiteX2" fmla="*/ 24560 w 24560"/>
+                <a:gd name="connsiteY2" fmla="*/ 0 h 16487"/>
+                <a:gd name="connsiteX3" fmla="*/ 14761 w 24560"/>
+                <a:gd name="connsiteY3" fmla="*/ 15394 h 16487"/>
+                <a:gd name="connsiteX4" fmla="*/ 0 w 24560"/>
+                <a:gd name="connsiteY4" fmla="*/ 16487 h 16487"/>
+                <a:gd name="connsiteX0" fmla="*/ 0 w 24352"/>
+                <a:gd name="connsiteY0" fmla="*/ 16521 h 16521"/>
+                <a:gd name="connsiteX1" fmla="*/ 9945 w 24352"/>
+                <a:gd name="connsiteY1" fmla="*/ 1087 h 16521"/>
+                <a:gd name="connsiteX2" fmla="*/ 24352 w 24352"/>
+                <a:gd name="connsiteY2" fmla="*/ 0 h 16521"/>
+                <a:gd name="connsiteX3" fmla="*/ 14553 w 24352"/>
+                <a:gd name="connsiteY3" fmla="*/ 15394 h 16521"/>
+                <a:gd name="connsiteX4" fmla="*/ 0 w 24352"/>
+                <a:gd name="connsiteY4" fmla="*/ 16521 h 16521"/>
+                <a:gd name="connsiteX0" fmla="*/ 0 w 24352"/>
+                <a:gd name="connsiteY0" fmla="*/ 16521 h 16521"/>
+                <a:gd name="connsiteX1" fmla="*/ 9945 w 24352"/>
+                <a:gd name="connsiteY1" fmla="*/ 1087 h 16521"/>
+                <a:gd name="connsiteX2" fmla="*/ 24352 w 24352"/>
+                <a:gd name="connsiteY2" fmla="*/ 0 h 16521"/>
+                <a:gd name="connsiteX3" fmla="*/ 14560 w 24352"/>
+                <a:gd name="connsiteY3" fmla="*/ 15356 h 16521"/>
+                <a:gd name="connsiteX4" fmla="*/ 0 w 24352"/>
+                <a:gd name="connsiteY4" fmla="*/ 16521 h 16521"/>
+                <a:gd name="connsiteX0" fmla="*/ 0 w 24373"/>
+                <a:gd name="connsiteY0" fmla="*/ 16634 h 16634"/>
+                <a:gd name="connsiteX1" fmla="*/ 9945 w 24373"/>
+                <a:gd name="connsiteY1" fmla="*/ 1200 h 16634"/>
+                <a:gd name="connsiteX2" fmla="*/ 24373 w 24373"/>
+                <a:gd name="connsiteY2" fmla="*/ 0 h 16634"/>
+                <a:gd name="connsiteX3" fmla="*/ 14560 w 24373"/>
+                <a:gd name="connsiteY3" fmla="*/ 15469 h 16634"/>
+                <a:gd name="connsiteX4" fmla="*/ 0 w 24373"/>
+                <a:gd name="connsiteY4" fmla="*/ 16634 h 16634"/>
+              </a:gdLst>
+              <a:ahLst/>
+              <a:cxnLst>
+                <a:cxn ang="0">
+                  <a:pos x="connsiteX0" y="connsiteY0"/>
+                </a:cxn>
+                <a:cxn ang="0">
+                  <a:pos x="connsiteX1" y="connsiteY1"/>
+                </a:cxn>
+                <a:cxn ang="0">
+                  <a:pos x="connsiteX2" y="connsiteY2"/>
+                </a:cxn>
+                <a:cxn ang="0">
+                  <a:pos x="connsiteX3" y="connsiteY3"/>
+                </a:cxn>
+                <a:cxn ang="0">
+                  <a:pos x="connsiteX4" y="connsiteY4"/>
+                </a:cxn>
+              </a:cxnLst>
+              <a:rect l="l" t="t" r="r" b="b"/>
+              <a:pathLst>
+                <a:path w="24373" h="16634">
+                  <a:moveTo>
+                    <a:pt x="0" y="16634"/>
+                  </a:moveTo>
+                  <a:lnTo>
+                    <a:pt x="9945" y="1200"/>
+                  </a:lnTo>
+                  <a:lnTo>
+                    <a:pt x="24373" y="0"/>
+                  </a:lnTo>
+                  <a:lnTo>
+                    <a:pt x="14560" y="15469"/>
+                  </a:lnTo>
+                  <a:lnTo>
+                    <a:pt x="0" y="16634"/>
+                  </a:lnTo>
+                  <a:close/>
+                </a:path>
+              </a:pathLst>
+            </a:custGeom>
+            <a:solidFill>
+              <a:schemeClr val="accent6">
+                <a:alpha val="25000"/>
+              </a:schemeClr>
+            </a:solidFill>
+            <a:ln>
+              <a:solidFill>
+                <a:schemeClr val="tx1"/>
+              </a:solidFill>
+            </a:ln>
+          </p:spPr>
+          <p:style>
+            <a:lnRef idx="2">
+              <a:schemeClr val="accent1">
+                <a:shade val="50000"/>
+              </a:schemeClr>
+            </a:lnRef>
+            <a:fillRef idx="1">
+              <a:schemeClr val="accent1"/>
+            </a:fillRef>
+            <a:effectRef idx="0">
+              <a:schemeClr val="accent1"/>
+            </a:effectRef>
+            <a:fontRef idx="minor">
+              <a:schemeClr val="lt1"/>
+            </a:fontRef>
+          </p:style>
+          <p:txBody>
+            <a:bodyPr rtlCol="0" anchor="ctr"/>
+            <a:lstStyle/>
+            <a:p>
+              <a:pPr algn="ctr"/>
+              <a:endParaRPr lang="en-US"/>
+            </a:p>
+          </p:txBody>
+        </p:sp>
+        <p:sp>
+          <p:nvSpPr>
+            <p:cNvPr id="58" name="Explosion 1 57"/>
+            <p:cNvSpPr/>
+            <p:nvPr/>
+          </p:nvSpPr>
+          <p:spPr>
+            <a:xfrm>
+              <a:off x="8528174" y="1794019"/>
+              <a:ext cx="307935" cy="376614"/>
+            </a:xfrm>
+            <a:prstGeom prst="irregularSeal1">
+              <a:avLst/>
+            </a:prstGeom>
+            <a:solidFill>
+              <a:srgbClr val="FF0000"/>
+            </a:solidFill>
+            <a:ln>
+              <a:solidFill>
+                <a:srgbClr val="C55A11"/>
+              </a:solidFill>
+            </a:ln>
+          </p:spPr>
+          <p:style>
+            <a:lnRef idx="2">
+              <a:schemeClr val="accent1">
+                <a:shade val="50000"/>
+              </a:schemeClr>
+            </a:lnRef>
+            <a:fillRef idx="1">
+              <a:schemeClr val="accent1"/>
+            </a:fillRef>
+            <a:effectRef idx="0">
+              <a:schemeClr val="accent1"/>
+            </a:effectRef>
+            <a:fontRef idx="minor">
+              <a:schemeClr val="lt1"/>
+            </a:fontRef>
+          </p:style>
+          <p:txBody>
+            <a:bodyPr rtlCol="0" anchor="ctr"/>
+            <a:lstStyle/>
+            <a:p>
+              <a:pPr algn="ctr"/>
+              <a:endParaRPr lang="en-US"/>
+            </a:p>
+          </p:txBody>
+        </p:sp>
+        <mc:AlternateContent xmlns:mc="http://schemas.openxmlformats.org/markup-compatibility/2006">
+          <mc:Choice xmlns:a14="http://schemas.microsoft.com/office/drawing/2010/main" Requires="a14">
+            <p:sp>
+              <p:nvSpPr>
+                <p:cNvPr id="59" name="TextBox 58"/>
+                <p:cNvSpPr txBox="1"/>
+                <p:nvPr/>
+              </p:nvSpPr>
+              <p:spPr>
+                <a:xfrm>
+                  <a:off x="7348885" y="1203294"/>
+                  <a:ext cx="1328820" cy="523220"/>
+                </a:xfrm>
+                <a:prstGeom prst="rect">
+                  <a:avLst/>
+                </a:prstGeom>
+                <a:noFill/>
+              </p:spPr>
+              <p:txBody>
+                <a:bodyPr wrap="square" rtlCol="0">
+                  <a:spAutoFit/>
+                </a:bodyPr>
+                <a:lstStyle/>
+                <a:p>
+                  <a:pPr/>
+                  <a14:m>
+                    <m:oMathPara xmlns:m="http://schemas.openxmlformats.org/officeDocument/2006/math">
+                      <m:oMathParaPr>
+                        <m:jc m:val="centerGroup"/>
+                      </m:oMathParaPr>
+                      <m:oMath xmlns:m="http://schemas.openxmlformats.org/officeDocument/2006/math">
+                        <m:r>
+                          <a:rPr lang="en-US" sz="2800" b="0" i="1" smtClean="0">
+                            <a:solidFill>
+                              <a:srgbClr val="FF0000"/>
+                            </a:solidFill>
+                            <a:latin typeface="Cambria Math" panose="02040503050406030204" pitchFamily="18" charset="0"/>
+                          </a:rPr>
+                          <m:t>𝑥</m:t>
+                        </m:r>
+                        <m:r>
+                          <a:rPr lang="en-US" sz="2800" b="0" i="1" smtClean="0">
+                            <a:solidFill>
+                              <a:srgbClr val="FF0000"/>
+                            </a:solidFill>
+                            <a:latin typeface="Cambria Math" panose="02040503050406030204" pitchFamily="18" charset="0"/>
+                          </a:rPr>
+                          <m:t>,</m:t>
+                        </m:r>
+                        <m:r>
+                          <a:rPr lang="en-US" sz="2800" b="0" i="1" smtClean="0">
+                            <a:solidFill>
+                              <a:srgbClr val="FF0000"/>
+                            </a:solidFill>
+                            <a:latin typeface="Cambria Math" panose="02040503050406030204" pitchFamily="18" charset="0"/>
+                          </a:rPr>
+                          <m:t>𝑦</m:t>
+                        </m:r>
+                        <m:r>
+                          <a:rPr lang="en-US" sz="2800" b="0" i="1" smtClean="0">
+                            <a:solidFill>
+                              <a:srgbClr val="FF0000"/>
+                            </a:solidFill>
+                            <a:latin typeface="Cambria Math" panose="02040503050406030204" pitchFamily="18" charset="0"/>
+                          </a:rPr>
+                          <m:t>,</m:t>
+                        </m:r>
+                        <m:r>
+                          <a:rPr lang="en-US" sz="2800" b="0" i="1" smtClean="0">
+                            <a:solidFill>
+                              <a:srgbClr val="FF0000"/>
+                            </a:solidFill>
+                            <a:latin typeface="Cambria Math" panose="02040503050406030204" pitchFamily="18" charset="0"/>
+                          </a:rPr>
+                          <m:t>𝑧</m:t>
+                        </m:r>
+                      </m:oMath>
+                    </m:oMathPara>
+                  </a14:m>
+                  <a:endParaRPr lang="en-US" sz="2800" dirty="0">
+                    <a:solidFill>
+                      <a:srgbClr val="FF0000"/>
+                    </a:solidFill>
+                  </a:endParaRPr>
+                </a:p>
+              </p:txBody>
+            </p:sp>
+          </mc:Choice>
+          <mc:Fallback>
+            <p:sp>
+              <p:nvSpPr>
+                <p:cNvPr id="59" name="TextBox 58"/>
+                <p:cNvSpPr txBox="1">
+                  <a:spLocks noRot="1" noChangeAspect="1" noMove="1" noResize="1" noEditPoints="1" noAdjustHandles="1" noChangeArrowheads="1" noChangeShapeType="1" noTextEdit="1"/>
+                </p:cNvSpPr>
+                <p:nvPr/>
+              </p:nvSpPr>
+              <p:spPr>
+                <a:xfrm>
+                  <a:off x="7348885" y="1203294"/>
+                  <a:ext cx="1328820" cy="523220"/>
+                </a:xfrm>
+                <a:prstGeom prst="rect">
+                  <a:avLst/>
+                </a:prstGeom>
+                <a:blipFill>
+                  <a:blip r:embed="rId4"/>
+                  <a:stretch>
+                    <a:fillRect/>
+                  </a:stretch>
+                </a:blipFill>
+              </p:spPr>
+              <p:txBody>
+                <a:bodyPr/>
+                <a:lstStyle/>
+                <a:p>
+                  <a:r>
+                    <a:rPr lang="en-US">
+                      <a:noFill/>
+                    </a:rPr>
+                    <a:t> </a:t>
+                  </a:r>
+                </a:p>
+              </p:txBody>
+            </p:sp>
+          </mc:Fallback>
+        </mc:AlternateContent>
+        <p:grpSp>
+          <p:nvGrpSpPr>
+            <p:cNvPr id="70" name="Group 69"/>
+            <p:cNvGrpSpPr/>
+            <p:nvPr/>
+          </p:nvGrpSpPr>
+          <p:grpSpPr>
+            <a:xfrm rot="10800000" flipH="1" flipV="1">
+              <a:off x="6353608" y="3889683"/>
+              <a:ext cx="2465826" cy="1256130"/>
+              <a:chOff x="-500570" y="3353856"/>
+              <a:chExt cx="2465826" cy="1256130"/>
+            </a:xfrm>
+          </p:grpSpPr>
+          <p:cxnSp>
+            <p:nvCxnSpPr>
+              <p:cNvPr id="71" name="Straight Connector 70"/>
+              <p:cNvCxnSpPr>
+                <a:endCxn id="57" idx="3"/>
+              </p:cNvCxnSpPr>
+              <p:nvPr/>
+            </p:nvCxnSpPr>
+            <p:spPr>
+              <a:xfrm rot="10800000">
+                <a:off x="1278588" y="3353856"/>
+                <a:ext cx="16914" cy="1256129"/>
+              </a:xfrm>
+              <a:prstGeom prst="line">
+                <a:avLst/>
+              </a:prstGeom>
+              <a:ln w="25400">
+                <a:solidFill>
+                  <a:schemeClr val="tx1"/>
+                </a:solidFill>
+                <a:headEnd type="none"/>
+                <a:tailEnd type="triangle"/>
+              </a:ln>
+            </p:spPr>
+            <p:style>
+              <a:lnRef idx="1">
+                <a:schemeClr val="accent1"/>
+              </a:lnRef>
+              <a:fillRef idx="0">
+                <a:schemeClr val="accent1"/>
+              </a:fillRef>
+              <a:effectRef idx="0">
+                <a:schemeClr val="accent1"/>
+              </a:effectRef>
+              <a:fontRef idx="minor">
+                <a:schemeClr val="tx1"/>
+              </a:fontRef>
+            </p:style>
+          </p:cxnSp>
+          <p:cxnSp>
+            <p:nvCxnSpPr>
+              <p:cNvPr id="72" name="Straight Connector 71"/>
+              <p:cNvCxnSpPr/>
+              <p:nvPr/>
+            </p:nvCxnSpPr>
+            <p:spPr>
+              <a:xfrm rot="10800000">
+                <a:off x="-500570" y="3544563"/>
+                <a:ext cx="1776343" cy="1065422"/>
+              </a:xfrm>
+              <a:prstGeom prst="line">
+                <a:avLst/>
+              </a:prstGeom>
+              <a:ln w="25400">
+                <a:solidFill>
+                  <a:schemeClr val="tx1"/>
+                </a:solidFill>
+                <a:headEnd type="none"/>
+                <a:tailEnd type="triangle"/>
+              </a:ln>
+            </p:spPr>
+            <p:style>
+              <a:lnRef idx="1">
+                <a:schemeClr val="accent1"/>
+              </a:lnRef>
+              <a:fillRef idx="0">
+                <a:schemeClr val="accent1"/>
+              </a:fillRef>
+              <a:effectRef idx="0">
+                <a:schemeClr val="accent1"/>
+              </a:effectRef>
+              <a:fontRef idx="minor">
+                <a:schemeClr val="tx1"/>
+              </a:fontRef>
+            </p:style>
+          </p:cxnSp>
+          <p:cxnSp>
+            <p:nvCxnSpPr>
+              <p:cNvPr id="73" name="Straight Connector 72"/>
+              <p:cNvCxnSpPr/>
+              <p:nvPr/>
+            </p:nvCxnSpPr>
+            <p:spPr>
+              <a:xfrm rot="10800000" flipH="1">
+                <a:off x="1301042" y="4225410"/>
+                <a:ext cx="664214" cy="384576"/>
+              </a:xfrm>
+              <a:prstGeom prst="line">
+                <a:avLst/>
+              </a:prstGeom>
+              <a:ln w="25400">
+                <a:solidFill>
+                  <a:schemeClr val="tx1"/>
+                </a:solidFill>
+                <a:headEnd type="none"/>
+                <a:tailEnd type="triangle"/>
+              </a:ln>
+            </p:spPr>
+            <p:style>
+              <a:lnRef idx="1">
+                <a:schemeClr val="accent1"/>
+              </a:lnRef>
+              <a:fillRef idx="0">
+                <a:schemeClr val="accent1"/>
+              </a:fillRef>
+              <a:effectRef idx="0">
+                <a:schemeClr val="accent1"/>
+              </a:effectRef>
+              <a:fontRef idx="minor">
+                <a:schemeClr val="tx1"/>
+              </a:fontRef>
+            </p:style>
+          </p:cxnSp>
+        </p:grpSp>
+        <mc:AlternateContent xmlns:mc="http://schemas.openxmlformats.org/markup-compatibility/2006">
+          <mc:Choice xmlns:a14="http://schemas.microsoft.com/office/drawing/2010/main" Requires="a14">
+            <p:sp>
+              <p:nvSpPr>
+                <p:cNvPr id="78" name="TextBox 77"/>
+                <p:cNvSpPr txBox="1"/>
+                <p:nvPr/>
+              </p:nvSpPr>
+              <p:spPr>
+                <a:xfrm>
+                  <a:off x="6028553" y="3889654"/>
+                  <a:ext cx="321969" cy="523220"/>
+                </a:xfrm>
+                <a:prstGeom prst="rect">
+                  <a:avLst/>
+                </a:prstGeom>
+                <a:noFill/>
+              </p:spPr>
+              <p:txBody>
+                <a:bodyPr wrap="square" rtlCol="0">
+                  <a:spAutoFit/>
+                </a:bodyPr>
+                <a:lstStyle/>
+                <a:p>
+                  <a:pPr/>
+                  <a14:m>
+                    <m:oMathPara xmlns:m="http://schemas.openxmlformats.org/officeDocument/2006/math">
+                      <m:oMathParaPr>
+                        <m:jc m:val="centerGroup"/>
+                      </m:oMathParaPr>
+                      <m:oMath xmlns:m="http://schemas.openxmlformats.org/officeDocument/2006/math">
+                        <m:r>
+                          <a:rPr lang="en-US" sz="2800" b="0" i="1" smtClean="0">
+                            <a:latin typeface="Cambria Math" panose="02040503050406030204" pitchFamily="18" charset="0"/>
+                          </a:rPr>
+                          <m:t>𝑥</m:t>
+                        </m:r>
+                      </m:oMath>
+                    </m:oMathPara>
+                  </a14:m>
+                  <a:endParaRPr lang="en-US" sz="2800" dirty="0"/>
+                </a:p>
+              </p:txBody>
+            </p:sp>
+          </mc:Choice>
+          <mc:Fallback>
+            <p:sp>
+              <p:nvSpPr>
+                <p:cNvPr id="78" name="TextBox 77"/>
+                <p:cNvSpPr txBox="1">
+                  <a:spLocks noRot="1" noChangeAspect="1" noMove="1" noResize="1" noEditPoints="1" noAdjustHandles="1" noChangeArrowheads="1" noChangeShapeType="1" noTextEdit="1"/>
+                </p:cNvSpPr>
+                <p:nvPr/>
+              </p:nvSpPr>
+              <p:spPr>
+                <a:xfrm>
+                  <a:off x="6028553" y="3889654"/>
+                  <a:ext cx="321969" cy="523220"/>
+                </a:xfrm>
+                <a:prstGeom prst="rect">
+                  <a:avLst/>
+                </a:prstGeom>
+                <a:blipFill>
+                  <a:blip r:embed="rId5"/>
+                  <a:stretch>
+                    <a:fillRect/>
+                  </a:stretch>
+                </a:blipFill>
+              </p:spPr>
+              <p:txBody>
+                <a:bodyPr/>
+                <a:lstStyle/>
+                <a:p>
+                  <a:r>
+                    <a:rPr lang="en-US">
+                      <a:noFill/>
+                    </a:rPr>
+                    <a:t> </a:t>
+                  </a:r>
+                </a:p>
+              </p:txBody>
+            </p:sp>
+          </mc:Fallback>
+        </mc:AlternateContent>
+        <mc:AlternateContent xmlns:mc="http://schemas.openxmlformats.org/markup-compatibility/2006">
+          <mc:Choice xmlns:a14="http://schemas.microsoft.com/office/drawing/2010/main" Requires="a14">
+            <p:sp>
+              <p:nvSpPr>
+                <p:cNvPr id="81" name="TextBox 80"/>
+                <p:cNvSpPr txBox="1"/>
+                <p:nvPr/>
+              </p:nvSpPr>
+              <p:spPr>
+                <a:xfrm>
+                  <a:off x="8122435" y="3708266"/>
+                  <a:ext cx="321969" cy="523220"/>
+                </a:xfrm>
+                <a:prstGeom prst="rect">
+                  <a:avLst/>
+                </a:prstGeom>
+                <a:noFill/>
+              </p:spPr>
+              <p:txBody>
+                <a:bodyPr wrap="square" rtlCol="0">
+                  <a:spAutoFit/>
+                </a:bodyPr>
+                <a:lstStyle/>
+                <a:p>
+                  <a:pPr/>
+                  <a14:m>
+                    <m:oMathPara xmlns:m="http://schemas.openxmlformats.org/officeDocument/2006/math">
+                      <m:oMathParaPr>
+                        <m:jc m:val="centerGroup"/>
+                      </m:oMathParaPr>
+                      <m:oMath xmlns:m="http://schemas.openxmlformats.org/officeDocument/2006/math">
+                        <m:r>
+                          <a:rPr lang="en-US" sz="2800" b="0" i="1" smtClean="0">
+                            <a:latin typeface="Cambria Math" panose="02040503050406030204" pitchFamily="18" charset="0"/>
+                          </a:rPr>
+                          <m:t>𝑧</m:t>
+                        </m:r>
+                      </m:oMath>
+                    </m:oMathPara>
+                  </a14:m>
+                  <a:endParaRPr lang="en-US" sz="2800" dirty="0"/>
+                </a:p>
+              </p:txBody>
+            </p:sp>
+          </mc:Choice>
+          <mc:Fallback>
+            <p:sp>
+              <p:nvSpPr>
+                <p:cNvPr id="81" name="TextBox 80"/>
+                <p:cNvSpPr txBox="1">
+                  <a:spLocks noRot="1" noChangeAspect="1" noMove="1" noResize="1" noEditPoints="1" noAdjustHandles="1" noChangeArrowheads="1" noChangeShapeType="1" noTextEdit="1"/>
+                </p:cNvSpPr>
+                <p:nvPr/>
+              </p:nvSpPr>
+              <p:spPr>
+                <a:xfrm>
+                  <a:off x="8122435" y="3708266"/>
+                  <a:ext cx="321969" cy="523220"/>
+                </a:xfrm>
+                <a:prstGeom prst="rect">
+                  <a:avLst/>
+                </a:prstGeom>
+                <a:blipFill>
+                  <a:blip r:embed="rId6"/>
+                  <a:stretch>
+                    <a:fillRect/>
+                  </a:stretch>
+                </a:blipFill>
+              </p:spPr>
+              <p:txBody>
+                <a:bodyPr/>
+                <a:lstStyle/>
+                <a:p>
+                  <a:r>
+                    <a:rPr lang="en-US">
+                      <a:noFill/>
+                    </a:rPr>
+                    <a:t> </a:t>
+                  </a:r>
+                </a:p>
+              </p:txBody>
+            </p:sp>
+          </mc:Fallback>
+        </mc:AlternateContent>
+        <mc:AlternateContent xmlns:mc="http://schemas.openxmlformats.org/markup-compatibility/2006">
+          <mc:Choice xmlns:a14="http://schemas.microsoft.com/office/drawing/2010/main" Requires="a14">
+            <p:sp>
+              <p:nvSpPr>
+                <p:cNvPr id="82" name="TextBox 81"/>
+                <p:cNvSpPr txBox="1"/>
+                <p:nvPr/>
+              </p:nvSpPr>
+              <p:spPr>
+                <a:xfrm>
+                  <a:off x="8836922" y="4554122"/>
+                  <a:ext cx="321969" cy="523220"/>
+                </a:xfrm>
+                <a:prstGeom prst="rect">
+                  <a:avLst/>
+                </a:prstGeom>
+                <a:noFill/>
+              </p:spPr>
+              <p:txBody>
+                <a:bodyPr wrap="square" rtlCol="0">
+                  <a:spAutoFit/>
+                </a:bodyPr>
+                <a:lstStyle/>
+                <a:p>
+                  <a:pPr/>
+                  <a14:m>
+                    <m:oMathPara xmlns:m="http://schemas.openxmlformats.org/officeDocument/2006/math">
+                      <m:oMathParaPr>
+                        <m:jc m:val="centerGroup"/>
+                      </m:oMathParaPr>
+                      <m:oMath xmlns:m="http://schemas.openxmlformats.org/officeDocument/2006/math">
+                        <m:r>
+                          <a:rPr lang="en-US" sz="2800" b="0" i="1" smtClean="0">
+                            <a:latin typeface="Cambria Math" panose="02040503050406030204" pitchFamily="18" charset="0"/>
+                          </a:rPr>
+                          <m:t>𝑦</m:t>
+                        </m:r>
+                      </m:oMath>
+                    </m:oMathPara>
+                  </a14:m>
+                  <a:endParaRPr lang="en-US" sz="2800" dirty="0"/>
+                </a:p>
+              </p:txBody>
+            </p:sp>
+          </mc:Choice>
+          <mc:Fallback>
+            <p:sp>
+              <p:nvSpPr>
+                <p:cNvPr id="82" name="TextBox 81"/>
+                <p:cNvSpPr txBox="1">
+                  <a:spLocks noRot="1" noChangeAspect="1" noMove="1" noResize="1" noEditPoints="1" noAdjustHandles="1" noChangeArrowheads="1" noChangeShapeType="1" noTextEdit="1"/>
+                </p:cNvSpPr>
+                <p:nvPr/>
+              </p:nvSpPr>
+              <p:spPr>
+                <a:xfrm>
+                  <a:off x="8836922" y="4554122"/>
+                  <a:ext cx="321969" cy="523220"/>
+                </a:xfrm>
+                <a:prstGeom prst="rect">
+                  <a:avLst/>
+                </a:prstGeom>
+                <a:blipFill>
+                  <a:blip r:embed="rId7"/>
+                  <a:stretch>
+                    <a:fillRect/>
+                  </a:stretch>
+                </a:blipFill>
+              </p:spPr>
+              <p:txBody>
+                <a:bodyPr/>
+                <a:lstStyle/>
+                <a:p>
+                  <a:r>
+                    <a:rPr lang="en-US">
+                      <a:noFill/>
+                    </a:rPr>
+                    <a:t> </a:t>
+                  </a:r>
+                </a:p>
+              </p:txBody>
+            </p:sp>
+          </mc:Fallback>
+        </mc:AlternateContent>
+      </p:grpSp>
+      <p:grpSp>
+        <p:nvGrpSpPr>
+          <p:cNvPr id="3" name="Group 2"/>
+          <p:cNvGrpSpPr/>
+          <p:nvPr/>
+        </p:nvGrpSpPr>
+        <p:grpSpPr>
+          <a:xfrm>
+            <a:off x="141351" y="901696"/>
+            <a:ext cx="5851487" cy="4665374"/>
+            <a:chOff x="141351" y="901696"/>
+            <a:chExt cx="5851487" cy="4665374"/>
+          </a:xfrm>
+        </p:grpSpPr>
+        <p:grpSp>
+          <p:nvGrpSpPr>
+            <p:cNvPr id="98" name="Group 97"/>
+            <p:cNvGrpSpPr/>
+            <p:nvPr/>
+          </p:nvGrpSpPr>
+          <p:grpSpPr>
+            <a:xfrm>
+              <a:off x="141351" y="901696"/>
+              <a:ext cx="5851487" cy="4665374"/>
+              <a:chOff x="-403797" y="349852"/>
+              <a:chExt cx="5851487" cy="4665374"/>
+            </a:xfrm>
+          </p:grpSpPr>
+          <p:sp>
+            <p:nvSpPr>
+              <p:cNvPr id="61" name="Rectangle 60"/>
+              <p:cNvSpPr/>
+              <p:nvPr/>
+            </p:nvSpPr>
+            <p:spPr>
+              <a:xfrm>
+                <a:off x="1275773" y="2406599"/>
+                <a:ext cx="4171917" cy="2203385"/>
+              </a:xfrm>
+              <a:prstGeom prst="rect">
+                <a:avLst/>
+              </a:prstGeom>
+              <a:solidFill>
+                <a:schemeClr val="bg1">
+                  <a:lumMod val="95000"/>
+                </a:schemeClr>
+              </a:solidFill>
+              <a:ln>
+                <a:noFill/>
+              </a:ln>
+            </p:spPr>
+            <p:style>
+              <a:lnRef idx="2">
+                <a:schemeClr val="accent1">
+                  <a:shade val="50000"/>
+                </a:schemeClr>
+              </a:lnRef>
+              <a:fillRef idx="1">
+                <a:schemeClr val="accent1"/>
+              </a:fillRef>
+              <a:effectRef idx="0">
+                <a:schemeClr val="accent1"/>
+              </a:effectRef>
+              <a:fontRef idx="minor">
+                <a:schemeClr val="lt1"/>
+              </a:fontRef>
+            </p:style>
+            <p:txBody>
+              <a:bodyPr rtlCol="0" anchor="ctr"/>
+              <a:lstStyle/>
+              <a:p>
+                <a:pPr algn="ctr"/>
+                <a:endParaRPr lang="en-US"/>
+              </a:p>
+            </p:txBody>
+          </p:sp>
+          <p:grpSp>
+            <p:nvGrpSpPr>
+              <p:cNvPr id="69" name="Group 68"/>
+              <p:cNvGrpSpPr/>
+              <p:nvPr/>
+            </p:nvGrpSpPr>
+            <p:grpSpPr>
+              <a:xfrm>
+                <a:off x="1186689" y="3981742"/>
+                <a:ext cx="694976" cy="628242"/>
+                <a:chOff x="1209038" y="3981743"/>
+                <a:chExt cx="694976" cy="628242"/>
+              </a:xfrm>
+            </p:grpSpPr>
+            <p:cxnSp>
+              <p:nvCxnSpPr>
+                <p:cNvPr id="65" name="Straight Connector 64"/>
+                <p:cNvCxnSpPr/>
+                <p:nvPr/>
+              </p:nvCxnSpPr>
+              <p:spPr>
+                <a:xfrm flipV="1">
+                  <a:off x="1295502" y="3981743"/>
+                  <a:ext cx="0" cy="628241"/>
+                </a:xfrm>
+                <a:prstGeom prst="line">
+                  <a:avLst/>
+                </a:prstGeom>
+                <a:ln w="25400">
+                  <a:solidFill>
+                    <a:schemeClr val="tx1"/>
+                  </a:solidFill>
+                  <a:headEnd type="none"/>
+                  <a:tailEnd type="triangle"/>
+                </a:ln>
+              </p:spPr>
+              <p:style>
+                <a:lnRef idx="1">
+                  <a:schemeClr val="accent1"/>
+                </a:lnRef>
+                <a:fillRef idx="0">
+                  <a:schemeClr val="accent1"/>
+                </a:fillRef>
+                <a:effectRef idx="0">
+                  <a:schemeClr val="accent1"/>
+                </a:effectRef>
+                <a:fontRef idx="minor">
+                  <a:schemeClr val="tx1"/>
+                </a:fontRef>
+              </p:style>
+            </p:cxnSp>
+            <p:cxnSp>
+              <p:nvCxnSpPr>
+                <p:cNvPr id="67" name="Straight Connector 66"/>
+                <p:cNvCxnSpPr/>
+                <p:nvPr/>
+              </p:nvCxnSpPr>
+              <p:spPr>
+                <a:xfrm rot="5400000" flipV="1">
+                  <a:off x="1589894" y="4295864"/>
+                  <a:ext cx="0" cy="628241"/>
+                </a:xfrm>
+                <a:prstGeom prst="line">
+                  <a:avLst/>
+                </a:prstGeom>
+                <a:ln w="25400">
+                  <a:solidFill>
+                    <a:schemeClr val="tx1"/>
+                  </a:solidFill>
+                  <a:headEnd type="none"/>
+                  <a:tailEnd type="triangle"/>
+                </a:ln>
+              </p:spPr>
+              <p:style>
+                <a:lnRef idx="1">
+                  <a:schemeClr val="accent1"/>
+                </a:lnRef>
+                <a:fillRef idx="0">
+                  <a:schemeClr val="accent1"/>
+                </a:fillRef>
+                <a:effectRef idx="0">
+                  <a:schemeClr val="accent1"/>
+                </a:effectRef>
+                <a:fontRef idx="minor">
+                  <a:schemeClr val="tx1"/>
+                </a:fontRef>
+              </p:style>
+            </p:cxnSp>
+            <p:cxnSp>
+              <p:nvCxnSpPr>
+                <p:cNvPr id="68" name="Straight Connector 67"/>
+                <p:cNvCxnSpPr/>
+                <p:nvPr/>
+              </p:nvCxnSpPr>
+              <p:spPr>
+                <a:xfrm rot="2700000" flipV="1">
+                  <a:off x="1523159" y="4073747"/>
+                  <a:ext cx="0" cy="628241"/>
+                </a:xfrm>
+                <a:prstGeom prst="line">
+                  <a:avLst/>
+                </a:prstGeom>
+                <a:ln w="25400">
+                  <a:solidFill>
+                    <a:schemeClr val="tx1"/>
+                  </a:solidFill>
+                  <a:headEnd type="none"/>
+                  <a:tailEnd type="triangle"/>
+                </a:ln>
+              </p:spPr>
+              <p:style>
+                <a:lnRef idx="1">
+                  <a:schemeClr val="accent1"/>
+                </a:lnRef>
+                <a:fillRef idx="0">
+                  <a:schemeClr val="accent1"/>
+                </a:fillRef>
+                <a:effectRef idx="0">
+                  <a:schemeClr val="accent1"/>
+                </a:effectRef>
+                <a:fontRef idx="minor">
+                  <a:schemeClr val="tx1"/>
+                </a:fontRef>
+              </p:style>
+            </p:cxnSp>
+          </p:grpSp>
+          <mc:AlternateContent xmlns:mc="http://schemas.openxmlformats.org/markup-compatibility/2006" xmlns:a14="http://schemas.microsoft.com/office/drawing/2010/main">
+            <mc:Choice Requires="a14">
+              <p:sp>
+                <p:nvSpPr>
+                  <p:cNvPr id="83" name="TextBox 82"/>
+                  <p:cNvSpPr txBox="1"/>
+                  <p:nvPr/>
+                </p:nvSpPr>
+                <p:spPr>
+                  <a:xfrm>
+                    <a:off x="1646477" y="3925721"/>
+                    <a:ext cx="321969" cy="523220"/>
+                  </a:xfrm>
+                  <a:prstGeom prst="rect">
+                    <a:avLst/>
+                  </a:prstGeom>
+                  <a:noFill/>
+                </p:spPr>
+                <p:txBody>
+                  <a:bodyPr wrap="square" rtlCol="0">
+                    <a:spAutoFit/>
+                  </a:bodyPr>
+                  <a:lstStyle/>
+                  <a:p>
+                    <a:pPr/>
+                    <a14:m>
+                      <m:oMathPara xmlns:m="http://schemas.openxmlformats.org/officeDocument/2006/math">
+                        <m:oMathParaPr>
+                          <m:jc m:val="centerGroup"/>
+                        </m:oMathParaPr>
+                        <m:oMath xmlns:m="http://schemas.openxmlformats.org/officeDocument/2006/math">
+                          <m:r>
+                            <a:rPr lang="en-US" sz="2800" b="0" i="1" smtClean="0">
+                              <a:latin typeface="Cambria Math" panose="02040503050406030204" pitchFamily="18" charset="0"/>
+                            </a:rPr>
+                            <m:t>𝑥</m:t>
+                          </m:r>
+                        </m:oMath>
+                      </m:oMathPara>
+                    </a14:m>
+                    <a:endParaRPr lang="en-US" sz="2800" dirty="0"/>
+                  </a:p>
+                </p:txBody>
+              </p:sp>
+            </mc:Choice>
+            <mc:Fallback xmlns="">
+              <p:sp>
+                <p:nvSpPr>
+                  <p:cNvPr id="83" name="TextBox 82"/>
+                  <p:cNvSpPr txBox="1">
+                    <a:spLocks noRot="1" noChangeAspect="1" noMove="1" noResize="1" noEditPoints="1" noAdjustHandles="1" noChangeArrowheads="1" noChangeShapeType="1" noTextEdit="1"/>
+                  </p:cNvSpPr>
+                  <p:nvPr/>
+                </p:nvSpPr>
+                <p:spPr>
+                  <a:xfrm>
+                    <a:off x="1646477" y="3925721"/>
+                    <a:ext cx="321969" cy="523220"/>
+                  </a:xfrm>
+                  <a:prstGeom prst="rect">
+                    <a:avLst/>
+                  </a:prstGeom>
+                  <a:blipFill>
+                    <a:blip r:embed="rId8"/>
+                    <a:stretch>
+                      <a:fillRect/>
+                    </a:stretch>
+                  </a:blipFill>
+                </p:spPr>
+                <p:txBody>
+                  <a:bodyPr/>
+                  <a:lstStyle/>
+                  <a:p>
+                    <a:r>
+                      <a:rPr lang="en-US">
+                        <a:noFill/>
+                      </a:rPr>
+                      <a:t> </a:t>
+                    </a:r>
+                  </a:p>
+                </p:txBody>
+              </p:sp>
+            </mc:Fallback>
+          </mc:AlternateContent>
+          <mc:AlternateContent xmlns:mc="http://schemas.openxmlformats.org/markup-compatibility/2006" xmlns:a14="http://schemas.microsoft.com/office/drawing/2010/main">
+            <mc:Choice Requires="a14">
+              <p:sp>
+                <p:nvSpPr>
+                  <p:cNvPr id="84" name="TextBox 83"/>
+                  <p:cNvSpPr txBox="1"/>
+                  <p:nvPr/>
+                </p:nvSpPr>
+                <p:spPr>
+                  <a:xfrm>
+                    <a:off x="1675187" y="4492006"/>
+                    <a:ext cx="321969" cy="523220"/>
+                  </a:xfrm>
+                  <a:prstGeom prst="rect">
+                    <a:avLst/>
+                  </a:prstGeom>
+                  <a:noFill/>
+                </p:spPr>
+                <p:txBody>
+                  <a:bodyPr wrap="square" rtlCol="0">
+                    <a:spAutoFit/>
+                  </a:bodyPr>
+                  <a:lstStyle/>
+                  <a:p>
+                    <a:pPr/>
+                    <a14:m>
+                      <m:oMathPara xmlns:m="http://schemas.openxmlformats.org/officeDocument/2006/math">
+                        <m:oMathParaPr>
+                          <m:jc m:val="centerGroup"/>
+                        </m:oMathParaPr>
+                        <m:oMath xmlns:m="http://schemas.openxmlformats.org/officeDocument/2006/math">
+                          <m:r>
+                            <a:rPr lang="en-US" sz="2800" b="0" i="1" smtClean="0">
+                              <a:latin typeface="Cambria Math" panose="02040503050406030204" pitchFamily="18" charset="0"/>
+                            </a:rPr>
+                            <m:t>𝑦</m:t>
+                          </m:r>
+                        </m:oMath>
+                      </m:oMathPara>
+                    </a14:m>
+                    <a:endParaRPr lang="en-US" sz="2800" dirty="0"/>
+                  </a:p>
+                </p:txBody>
+              </p:sp>
+            </mc:Choice>
+            <mc:Fallback xmlns="">
+              <p:sp>
+                <p:nvSpPr>
+                  <p:cNvPr id="84" name="TextBox 83"/>
+                  <p:cNvSpPr txBox="1">
+                    <a:spLocks noRot="1" noChangeAspect="1" noMove="1" noResize="1" noEditPoints="1" noAdjustHandles="1" noChangeArrowheads="1" noChangeShapeType="1" noTextEdit="1"/>
+                  </p:cNvSpPr>
+                  <p:nvPr/>
+                </p:nvSpPr>
+                <p:spPr>
+                  <a:xfrm>
+                    <a:off x="1675187" y="4492006"/>
+                    <a:ext cx="321969" cy="523220"/>
+                  </a:xfrm>
+                  <a:prstGeom prst="rect">
+                    <a:avLst/>
+                  </a:prstGeom>
+                  <a:blipFill>
+                    <a:blip r:embed="rId9"/>
+                    <a:stretch>
+                      <a:fillRect/>
+                    </a:stretch>
+                  </a:blipFill>
+                </p:spPr>
+                <p:txBody>
+                  <a:bodyPr/>
+                  <a:lstStyle/>
+                  <a:p>
+                    <a:r>
+                      <a:rPr lang="en-US">
+                        <a:noFill/>
+                      </a:rPr>
+                      <a:t> </a:t>
+                    </a:r>
+                  </a:p>
+                </p:txBody>
+              </p:sp>
+            </mc:Fallback>
+          </mc:AlternateContent>
+          <mc:AlternateContent xmlns:mc="http://schemas.openxmlformats.org/markup-compatibility/2006" xmlns:a14="http://schemas.microsoft.com/office/drawing/2010/main">
+            <mc:Choice Requires="a14">
+              <p:sp>
+                <p:nvSpPr>
+                  <p:cNvPr id="85" name="TextBox 84"/>
+                  <p:cNvSpPr txBox="1"/>
+                  <p:nvPr/>
+                </p:nvSpPr>
+                <p:spPr>
+                  <a:xfrm>
+                    <a:off x="967445" y="3767978"/>
+                    <a:ext cx="321969" cy="523220"/>
+                  </a:xfrm>
+                  <a:prstGeom prst="rect">
+                    <a:avLst/>
+                  </a:prstGeom>
+                  <a:noFill/>
+                </p:spPr>
+                <p:txBody>
+                  <a:bodyPr wrap="square" rtlCol="0">
+                    <a:spAutoFit/>
+                  </a:bodyPr>
+                  <a:lstStyle/>
+                  <a:p>
+                    <a:pPr/>
+                    <a14:m>
+                      <m:oMathPara xmlns:m="http://schemas.openxmlformats.org/officeDocument/2006/math">
+                        <m:oMathParaPr>
+                          <m:jc m:val="centerGroup"/>
+                        </m:oMathParaPr>
+                        <m:oMath xmlns:m="http://schemas.openxmlformats.org/officeDocument/2006/math">
+                          <m:r>
+                            <a:rPr lang="en-US" sz="2800" b="0" i="1" smtClean="0">
+                              <a:latin typeface="Cambria Math" panose="02040503050406030204" pitchFamily="18" charset="0"/>
+                            </a:rPr>
+                            <m:t>𝑧</m:t>
+                          </m:r>
+                        </m:oMath>
+                      </m:oMathPara>
+                    </a14:m>
+                    <a:endParaRPr lang="en-US" sz="2800" dirty="0"/>
+                  </a:p>
+                </p:txBody>
+              </p:sp>
+            </mc:Choice>
+            <mc:Fallback xmlns="">
+              <p:sp>
+                <p:nvSpPr>
+                  <p:cNvPr id="85" name="TextBox 84"/>
+                  <p:cNvSpPr txBox="1">
+                    <a:spLocks noRot="1" noChangeAspect="1" noMove="1" noResize="1" noEditPoints="1" noAdjustHandles="1" noChangeArrowheads="1" noChangeShapeType="1" noTextEdit="1"/>
+                  </p:cNvSpPr>
+                  <p:nvPr/>
+                </p:nvSpPr>
+                <p:spPr>
+                  <a:xfrm>
+                    <a:off x="967445" y="3767978"/>
+                    <a:ext cx="321969" cy="523220"/>
+                  </a:xfrm>
+                  <a:prstGeom prst="rect">
+                    <a:avLst/>
+                  </a:prstGeom>
+                  <a:blipFill>
+                    <a:blip r:embed="rId10"/>
                     <a:stretch>
                       <a:fillRect/>
                     </a:stretch>
@@ -5837,24 +4973,30 @@
           </mc:AlternateContent>
           <p:sp>
             <p:nvSpPr>
-              <p:cNvPr id="104" name="Explosion 1 103"/>
+              <p:cNvPr id="86" name="Oval 85"/>
               <p:cNvSpPr/>
               <p:nvPr/>
             </p:nvSpPr>
             <p:spPr>
               <a:xfrm>
-                <a:off x="3264428" y="2781239"/>
-                <a:ext cx="307935" cy="376614"/>
+                <a:off x="-403797" y="349852"/>
+                <a:ext cx="3359137" cy="3359137"/>
               </a:xfrm>
-              <a:prstGeom prst="irregularSeal1">
+              <a:prstGeom prst="ellipse">
                 <a:avLst/>
               </a:prstGeom>
               <a:solidFill>
-                <a:srgbClr val="FF0000"/>
+                <a:schemeClr val="tx2">
+                  <a:lumMod val="40000"/>
+                  <a:lumOff val="60000"/>
+                </a:schemeClr>
               </a:solidFill>
               <a:ln>
                 <a:solidFill>
-                  <a:srgbClr val="C55A11"/>
+                  <a:schemeClr val="tx2">
+                    <a:lumMod val="60000"/>
+                    <a:lumOff val="40000"/>
+                  </a:schemeClr>
                 </a:solidFill>
               </a:ln>
             </p:spPr>
@@ -5883,7 +5025,870 @@
               </a:p>
             </p:txBody>
           </p:sp>
+          <p:sp>
+            <p:nvSpPr>
+              <p:cNvPr id="88" name="Freeform 87"/>
+              <p:cNvSpPr/>
+              <p:nvPr/>
+            </p:nvSpPr>
+            <p:spPr>
+              <a:xfrm>
+                <a:off x="1275773" y="2406599"/>
+                <a:ext cx="1635498" cy="1302391"/>
+              </a:xfrm>
+              <a:custGeom>
+                <a:avLst/>
+                <a:gdLst>
+                  <a:gd name="connsiteX0" fmla="*/ 0 w 1635498"/>
+                  <a:gd name="connsiteY0" fmla="*/ 0 h 1302391"/>
+                  <a:gd name="connsiteX1" fmla="*/ 1635498 w 1635498"/>
+                  <a:gd name="connsiteY1" fmla="*/ 0 h 1302391"/>
+                  <a:gd name="connsiteX2" fmla="*/ 1604058 w 1635498"/>
+                  <a:gd name="connsiteY2" fmla="*/ 122274 h 1302391"/>
+                  <a:gd name="connsiteX3" fmla="*/ 171725 w 1635498"/>
+                  <a:gd name="connsiteY3" fmla="*/ 1293720 h 1302391"/>
+                  <a:gd name="connsiteX4" fmla="*/ 0 w 1635498"/>
+                  <a:gd name="connsiteY4" fmla="*/ 1302391 h 1302391"/>
+                </a:gdLst>
+                <a:ahLst/>
+                <a:cxnLst>
+                  <a:cxn ang="0">
+                    <a:pos x="connsiteX0" y="connsiteY0"/>
+                  </a:cxn>
+                  <a:cxn ang="0">
+                    <a:pos x="connsiteX1" y="connsiteY1"/>
+                  </a:cxn>
+                  <a:cxn ang="0">
+                    <a:pos x="connsiteX2" y="connsiteY2"/>
+                  </a:cxn>
+                  <a:cxn ang="0">
+                    <a:pos x="connsiteX3" y="connsiteY3"/>
+                  </a:cxn>
+                  <a:cxn ang="0">
+                    <a:pos x="connsiteX4" y="connsiteY4"/>
+                  </a:cxn>
+                </a:cxnLst>
+                <a:rect l="l" t="t" r="r" b="b"/>
+                <a:pathLst>
+                  <a:path w="1635498" h="1302391">
+                    <a:moveTo>
+                      <a:pt x="0" y="0"/>
+                    </a:moveTo>
+                    <a:lnTo>
+                      <a:pt x="1635498" y="0"/>
+                    </a:lnTo>
+                    <a:lnTo>
+                      <a:pt x="1604058" y="122274"/>
+                    </a:lnTo>
+                    <a:cubicBezTo>
+                      <a:pt x="1407763" y="753382"/>
+                      <a:pt x="849271" y="1224911"/>
+                      <a:pt x="171725" y="1293720"/>
+                    </a:cubicBezTo>
+                    <a:lnTo>
+                      <a:pt x="0" y="1302391"/>
+                    </a:lnTo>
+                    <a:close/>
+                  </a:path>
+                </a:pathLst>
+              </a:custGeom>
+              <a:solidFill>
+                <a:srgbClr val="ADB9CA"/>
+              </a:solidFill>
+              <a:ln>
+                <a:solidFill>
+                  <a:schemeClr val="tx1"/>
+                </a:solidFill>
+              </a:ln>
+            </p:spPr>
+            <p:style>
+              <a:lnRef idx="2">
+                <a:schemeClr val="accent1">
+                  <a:shade val="50000"/>
+                </a:schemeClr>
+              </a:lnRef>
+              <a:fillRef idx="1">
+                <a:schemeClr val="accent1"/>
+              </a:fillRef>
+              <a:effectRef idx="0">
+                <a:schemeClr val="accent1"/>
+              </a:effectRef>
+              <a:fontRef idx="minor">
+                <a:schemeClr val="lt1"/>
+              </a:fontRef>
+            </p:style>
+            <p:txBody>
+              <a:bodyPr rtlCol="0" anchor="ctr"/>
+              <a:lstStyle/>
+              <a:p>
+                <a:pPr algn="ctr"/>
+                <a:endParaRPr lang="en-US"/>
+              </a:p>
+            </p:txBody>
+          </p:sp>
+          <p:cxnSp>
+            <p:nvCxnSpPr>
+              <p:cNvPr id="90" name="Straight Connector 89"/>
+              <p:cNvCxnSpPr>
+                <a:endCxn id="88" idx="1"/>
+              </p:cNvCxnSpPr>
+              <p:nvPr/>
+            </p:nvCxnSpPr>
+            <p:spPr>
+              <a:xfrm>
+                <a:off x="1289414" y="1991849"/>
+                <a:ext cx="1621857" cy="414750"/>
+              </a:xfrm>
+              <a:prstGeom prst="line">
+                <a:avLst/>
+              </a:prstGeom>
+              <a:ln w="38100"/>
+            </p:spPr>
+            <p:style>
+              <a:lnRef idx="1">
+                <a:schemeClr val="accent1"/>
+              </a:lnRef>
+              <a:fillRef idx="0">
+                <a:schemeClr val="accent1"/>
+              </a:fillRef>
+              <a:effectRef idx="0">
+                <a:schemeClr val="accent1"/>
+              </a:effectRef>
+              <a:fontRef idx="minor">
+                <a:schemeClr val="tx1"/>
+              </a:fontRef>
+            </p:style>
+          </p:cxnSp>
+          <p:cxnSp>
+            <p:nvCxnSpPr>
+              <p:cNvPr id="91" name="Straight Connector 90"/>
+              <p:cNvCxnSpPr>
+                <a:endCxn id="86" idx="4"/>
+              </p:cNvCxnSpPr>
+              <p:nvPr/>
+            </p:nvCxnSpPr>
+            <p:spPr>
+              <a:xfrm flipH="1">
+                <a:off x="1275772" y="2018010"/>
+                <a:ext cx="13641" cy="1690979"/>
+              </a:xfrm>
+              <a:prstGeom prst="line">
+                <a:avLst/>
+              </a:prstGeom>
+              <a:ln w="38100"/>
+            </p:spPr>
+            <p:style>
+              <a:lnRef idx="1">
+                <a:schemeClr val="accent1"/>
+              </a:lnRef>
+              <a:fillRef idx="0">
+                <a:schemeClr val="accent1"/>
+              </a:fillRef>
+              <a:effectRef idx="0">
+                <a:schemeClr val="accent1"/>
+              </a:effectRef>
+              <a:fontRef idx="minor">
+                <a:schemeClr val="tx1"/>
+              </a:fontRef>
+            </p:style>
+          </p:cxnSp>
+          <mc:AlternateContent xmlns:mc="http://schemas.openxmlformats.org/markup-compatibility/2006" xmlns:a14="http://schemas.microsoft.com/office/drawing/2010/main">
+            <mc:Choice Requires="a14">
+              <p:sp>
+                <p:nvSpPr>
+                  <p:cNvPr id="94" name="TextBox 93"/>
+                  <p:cNvSpPr txBox="1"/>
+                  <p:nvPr/>
+                </p:nvSpPr>
+                <p:spPr>
+                  <a:xfrm>
+                    <a:off x="858784" y="2716196"/>
+                    <a:ext cx="321969" cy="523220"/>
+                  </a:xfrm>
+                  <a:prstGeom prst="rect">
+                    <a:avLst/>
+                  </a:prstGeom>
+                  <a:noFill/>
+                </p:spPr>
+                <p:txBody>
+                  <a:bodyPr wrap="square" rtlCol="0">
+                    <a:spAutoFit/>
+                  </a:bodyPr>
+                  <a:lstStyle/>
+                  <a:p>
+                    <a:pPr/>
+                    <a14:m>
+                      <m:oMathPara xmlns:m="http://schemas.openxmlformats.org/officeDocument/2006/math">
+                        <m:oMathParaPr>
+                          <m:jc m:val="centerGroup"/>
+                        </m:oMathParaPr>
+                        <m:oMath xmlns:m="http://schemas.openxmlformats.org/officeDocument/2006/math">
+                          <m:r>
+                            <a:rPr lang="en-US" sz="2800" b="0" i="1" smtClean="0">
+                              <a:latin typeface="Cambria Math" panose="02040503050406030204" pitchFamily="18" charset="0"/>
+                            </a:rPr>
+                            <m:t>h</m:t>
+                          </m:r>
+                        </m:oMath>
+                      </m:oMathPara>
+                    </a14:m>
+                    <a:endParaRPr lang="en-US" sz="2800" dirty="0"/>
+                  </a:p>
+                </p:txBody>
+              </p:sp>
+            </mc:Choice>
+            <mc:Fallback xmlns="">
+              <p:sp>
+                <p:nvSpPr>
+                  <p:cNvPr id="94" name="TextBox 93"/>
+                  <p:cNvSpPr txBox="1">
+                    <a:spLocks noRot="1" noChangeAspect="1" noMove="1" noResize="1" noEditPoints="1" noAdjustHandles="1" noChangeArrowheads="1" noChangeShapeType="1" noTextEdit="1"/>
+                  </p:cNvSpPr>
+                  <p:nvPr/>
+                </p:nvSpPr>
+                <p:spPr>
+                  <a:xfrm>
+                    <a:off x="858784" y="2716196"/>
+                    <a:ext cx="321969" cy="523220"/>
+                  </a:xfrm>
+                  <a:prstGeom prst="rect">
+                    <a:avLst/>
+                  </a:prstGeom>
+                  <a:blipFill>
+                    <a:blip r:embed="rId11"/>
+                    <a:stretch>
+                      <a:fillRect/>
+                    </a:stretch>
+                  </a:blipFill>
+                </p:spPr>
+                <p:txBody>
+                  <a:bodyPr/>
+                  <a:lstStyle/>
+                  <a:p>
+                    <a:r>
+                      <a:rPr lang="en-US">
+                        <a:noFill/>
+                      </a:rPr>
+                      <a:t> </a:t>
+                    </a:r>
+                  </a:p>
+                </p:txBody>
+              </p:sp>
+            </mc:Fallback>
+          </mc:AlternateContent>
+          <mc:AlternateContent xmlns:mc="http://schemas.openxmlformats.org/markup-compatibility/2006" xmlns:a14="http://schemas.microsoft.com/office/drawing/2010/main">
+            <mc:Choice Requires="a14">
+              <p:sp>
+                <p:nvSpPr>
+                  <p:cNvPr id="95" name="TextBox 94"/>
+                  <p:cNvSpPr txBox="1"/>
+                  <p:nvPr/>
+                </p:nvSpPr>
+                <p:spPr>
+                  <a:xfrm>
+                    <a:off x="110483" y="1918286"/>
+                    <a:ext cx="1390327" cy="523220"/>
+                  </a:xfrm>
+                  <a:prstGeom prst="rect">
+                    <a:avLst/>
+                  </a:prstGeom>
+                  <a:noFill/>
+                </p:spPr>
+                <p:txBody>
+                  <a:bodyPr wrap="square" rtlCol="0">
+                    <a:spAutoFit/>
+                  </a:bodyPr>
+                  <a:lstStyle/>
+                  <a:p>
+                    <a:pPr/>
+                    <a14:m>
+                      <m:oMathPara xmlns:m="http://schemas.openxmlformats.org/officeDocument/2006/math">
+                        <m:oMathParaPr>
+                          <m:jc m:val="centerGroup"/>
+                        </m:oMathParaPr>
+                        <m:oMath xmlns:m="http://schemas.openxmlformats.org/officeDocument/2006/math">
+                          <m:r>
+                            <a:rPr lang="en-US" sz="2800" b="0" i="1" smtClean="0">
+                              <a:latin typeface="Cambria Math" panose="02040503050406030204" pitchFamily="18" charset="0"/>
+                            </a:rPr>
+                            <m:t>𝑅</m:t>
+                          </m:r>
+                          <m:r>
+                            <a:rPr lang="en-US" sz="2800" b="0" i="1" smtClean="0">
+                              <a:latin typeface="Cambria Math" panose="02040503050406030204" pitchFamily="18" charset="0"/>
+                            </a:rPr>
+                            <m:t>−</m:t>
+                          </m:r>
+                          <m:r>
+                            <a:rPr lang="en-US" sz="2800" b="0" i="1" smtClean="0">
+                              <a:latin typeface="Cambria Math" panose="02040503050406030204" pitchFamily="18" charset="0"/>
+                            </a:rPr>
+                            <m:t>h</m:t>
+                          </m:r>
+                        </m:oMath>
+                      </m:oMathPara>
+                    </a14:m>
+                    <a:endParaRPr lang="en-US" sz="2800" dirty="0"/>
+                  </a:p>
+                </p:txBody>
+              </p:sp>
+            </mc:Choice>
+            <mc:Fallback xmlns="">
+              <p:sp>
+                <p:nvSpPr>
+                  <p:cNvPr id="95" name="TextBox 94"/>
+                  <p:cNvSpPr txBox="1">
+                    <a:spLocks noRot="1" noChangeAspect="1" noMove="1" noResize="1" noEditPoints="1" noAdjustHandles="1" noChangeArrowheads="1" noChangeShapeType="1" noTextEdit="1"/>
+                  </p:cNvSpPr>
+                  <p:nvPr/>
+                </p:nvSpPr>
+                <p:spPr>
+                  <a:xfrm>
+                    <a:off x="110483" y="1918286"/>
+                    <a:ext cx="1390327" cy="523220"/>
+                  </a:xfrm>
+                  <a:prstGeom prst="rect">
+                    <a:avLst/>
+                  </a:prstGeom>
+                  <a:blipFill>
+                    <a:blip r:embed="rId12"/>
+                    <a:stretch>
+                      <a:fillRect/>
+                    </a:stretch>
+                  </a:blipFill>
+                </p:spPr>
+                <p:txBody>
+                  <a:bodyPr/>
+                  <a:lstStyle/>
+                  <a:p>
+                    <a:r>
+                      <a:rPr lang="en-US">
+                        <a:noFill/>
+                      </a:rPr>
+                      <a:t> </a:t>
+                    </a:r>
+                  </a:p>
+                </p:txBody>
+              </p:sp>
+            </mc:Fallback>
+          </mc:AlternateContent>
+          <mc:AlternateContent xmlns:mc="http://schemas.openxmlformats.org/markup-compatibility/2006" xmlns:a14="http://schemas.microsoft.com/office/drawing/2010/main">
+            <mc:Choice Requires="a14">
+              <p:sp>
+                <p:nvSpPr>
+                  <p:cNvPr id="96" name="TextBox 95"/>
+                  <p:cNvSpPr txBox="1"/>
+                  <p:nvPr/>
+                </p:nvSpPr>
+                <p:spPr>
+                  <a:xfrm>
+                    <a:off x="1480156" y="1608689"/>
+                    <a:ext cx="1390327" cy="523220"/>
+                  </a:xfrm>
+                  <a:prstGeom prst="rect">
+                    <a:avLst/>
+                  </a:prstGeom>
+                  <a:noFill/>
+                </p:spPr>
+                <p:txBody>
+                  <a:bodyPr wrap="square" rtlCol="0">
+                    <a:spAutoFit/>
+                  </a:bodyPr>
+                  <a:lstStyle/>
+                  <a:p>
+                    <a:pPr/>
+                    <a14:m>
+                      <m:oMathPara xmlns:m="http://schemas.openxmlformats.org/officeDocument/2006/math">
+                        <m:oMathParaPr>
+                          <m:jc m:val="centerGroup"/>
+                        </m:oMathParaPr>
+                        <m:oMath xmlns:m="http://schemas.openxmlformats.org/officeDocument/2006/math">
+                          <m:r>
+                            <a:rPr lang="en-US" sz="2800" b="0" i="1" smtClean="0">
+                              <a:latin typeface="Cambria Math" panose="02040503050406030204" pitchFamily="18" charset="0"/>
+                            </a:rPr>
+                            <m:t>𝑅</m:t>
+                          </m:r>
+                        </m:oMath>
+                      </m:oMathPara>
+                    </a14:m>
+                    <a:endParaRPr lang="en-US" sz="2800" dirty="0"/>
+                  </a:p>
+                </p:txBody>
+              </p:sp>
+            </mc:Choice>
+            <mc:Fallback xmlns="">
+              <p:sp>
+                <p:nvSpPr>
+                  <p:cNvPr id="96" name="TextBox 95"/>
+                  <p:cNvSpPr txBox="1">
+                    <a:spLocks noRot="1" noChangeAspect="1" noMove="1" noResize="1" noEditPoints="1" noAdjustHandles="1" noChangeArrowheads="1" noChangeShapeType="1" noTextEdit="1"/>
+                  </p:cNvSpPr>
+                  <p:nvPr/>
+                </p:nvSpPr>
+                <p:spPr>
+                  <a:xfrm>
+                    <a:off x="1480156" y="1608689"/>
+                    <a:ext cx="1390327" cy="523220"/>
+                  </a:xfrm>
+                  <a:prstGeom prst="rect">
+                    <a:avLst/>
+                  </a:prstGeom>
+                  <a:blipFill>
+                    <a:blip r:embed="rId13"/>
+                    <a:stretch>
+                      <a:fillRect/>
+                    </a:stretch>
+                  </a:blipFill>
+                </p:spPr>
+                <p:txBody>
+                  <a:bodyPr/>
+                  <a:lstStyle/>
+                  <a:p>
+                    <a:r>
+                      <a:rPr lang="en-US">
+                        <a:noFill/>
+                      </a:rPr>
+                      <a:t> </a:t>
+                    </a:r>
+                  </a:p>
+                </p:txBody>
+              </p:sp>
+            </mc:Fallback>
+          </mc:AlternateContent>
+          <mc:AlternateContent xmlns:mc="http://schemas.openxmlformats.org/markup-compatibility/2006" xmlns:a14="http://schemas.microsoft.com/office/drawing/2010/main">
+            <mc:Choice Requires="a14">
+              <p:sp>
+                <p:nvSpPr>
+                  <p:cNvPr id="97" name="TextBox 96"/>
+                  <p:cNvSpPr txBox="1"/>
+                  <p:nvPr/>
+                </p:nvSpPr>
+                <p:spPr>
+                  <a:xfrm>
+                    <a:off x="1243834" y="1944447"/>
+                    <a:ext cx="321969" cy="523220"/>
+                  </a:xfrm>
+                  <a:prstGeom prst="rect">
+                    <a:avLst/>
+                  </a:prstGeom>
+                  <a:noFill/>
+                </p:spPr>
+                <p:txBody>
+                  <a:bodyPr wrap="square" rtlCol="0">
+                    <a:spAutoFit/>
+                  </a:bodyPr>
+                  <a:lstStyle/>
+                  <a:p>
+                    <a:pPr/>
+                    <a14:m>
+                      <m:oMathPara xmlns:m="http://schemas.openxmlformats.org/officeDocument/2006/math">
+                        <m:oMathParaPr>
+                          <m:jc m:val="centerGroup"/>
+                        </m:oMathParaPr>
+                        <m:oMath xmlns:m="http://schemas.openxmlformats.org/officeDocument/2006/math">
+                          <m:r>
+                            <a:rPr lang="en-US" sz="2800" b="0" i="1" smtClean="0">
+                              <a:latin typeface="Cambria Math" panose="02040503050406030204" pitchFamily="18" charset="0"/>
+                            </a:rPr>
+                            <m:t>𝜃</m:t>
+                          </m:r>
+                        </m:oMath>
+                      </m:oMathPara>
+                    </a14:m>
+                    <a:endParaRPr lang="en-US" sz="2800" dirty="0"/>
+                  </a:p>
+                </p:txBody>
+              </p:sp>
+            </mc:Choice>
+            <mc:Fallback xmlns="">
+              <p:sp>
+                <p:nvSpPr>
+                  <p:cNvPr id="97" name="TextBox 96"/>
+                  <p:cNvSpPr txBox="1">
+                    <a:spLocks noRot="1" noChangeAspect="1" noMove="1" noResize="1" noEditPoints="1" noAdjustHandles="1" noChangeArrowheads="1" noChangeShapeType="1" noTextEdit="1"/>
+                  </p:cNvSpPr>
+                  <p:nvPr/>
+                </p:nvSpPr>
+                <p:spPr>
+                  <a:xfrm>
+                    <a:off x="1243834" y="1944447"/>
+                    <a:ext cx="321969" cy="523220"/>
+                  </a:xfrm>
+                  <a:prstGeom prst="rect">
+                    <a:avLst/>
+                  </a:prstGeom>
+                  <a:blipFill>
+                    <a:blip r:embed="rId14"/>
+                    <a:stretch>
+                      <a:fillRect/>
+                    </a:stretch>
+                  </a:blipFill>
+                </p:spPr>
+                <p:txBody>
+                  <a:bodyPr/>
+                  <a:lstStyle/>
+                  <a:p>
+                    <a:r>
+                      <a:rPr lang="en-US">
+                        <a:noFill/>
+                      </a:rPr>
+                      <a:t> </a:t>
+                    </a:r>
+                  </a:p>
+                </p:txBody>
+              </p:sp>
+            </mc:Fallback>
+          </mc:AlternateContent>
         </p:grpSp>
+        <p:sp>
+          <p:nvSpPr>
+            <p:cNvPr id="100" name="Flowchart: Or 99"/>
+            <p:cNvSpPr/>
+            <p:nvPr/>
+          </p:nvSpPr>
+          <p:spPr>
+            <a:xfrm>
+              <a:off x="3473146" y="3839017"/>
+              <a:ext cx="300941" cy="300941"/>
+            </a:xfrm>
+            <a:prstGeom prst="flowChartOr">
+              <a:avLst/>
+            </a:prstGeom>
+          </p:spPr>
+          <p:style>
+            <a:lnRef idx="2">
+              <a:schemeClr val="accent1">
+                <a:shade val="50000"/>
+              </a:schemeClr>
+            </a:lnRef>
+            <a:fillRef idx="1">
+              <a:schemeClr val="accent1"/>
+            </a:fillRef>
+            <a:effectRef idx="0">
+              <a:schemeClr val="accent1"/>
+            </a:effectRef>
+            <a:fontRef idx="minor">
+              <a:schemeClr val="lt1"/>
+            </a:fontRef>
+          </p:style>
+          <p:txBody>
+            <a:bodyPr rtlCol="0" anchor="ctr"/>
+            <a:lstStyle/>
+            <a:p>
+              <a:pPr algn="ctr"/>
+              <a:endParaRPr lang="en-US"/>
+            </a:p>
+          </p:txBody>
+        </p:sp>
+        <p:sp>
+          <p:nvSpPr>
+            <p:cNvPr id="101" name="Flowchart: Or 100"/>
+            <p:cNvSpPr/>
+            <p:nvPr/>
+          </p:nvSpPr>
+          <p:spPr>
+            <a:xfrm>
+              <a:off x="4052484" y="3839017"/>
+              <a:ext cx="300941" cy="300941"/>
+            </a:xfrm>
+            <a:prstGeom prst="flowChartOr">
+              <a:avLst/>
+            </a:prstGeom>
+            <a:solidFill>
+              <a:srgbClr val="D08452"/>
+            </a:solidFill>
+            <a:ln>
+              <a:solidFill>
+                <a:schemeClr val="tx1"/>
+              </a:solidFill>
+            </a:ln>
+          </p:spPr>
+          <p:style>
+            <a:lnRef idx="2">
+              <a:schemeClr val="accent1">
+                <a:shade val="50000"/>
+              </a:schemeClr>
+            </a:lnRef>
+            <a:fillRef idx="1">
+              <a:schemeClr val="accent1"/>
+            </a:fillRef>
+            <a:effectRef idx="0">
+              <a:schemeClr val="accent1"/>
+            </a:effectRef>
+            <a:fontRef idx="minor">
+              <a:schemeClr val="lt1"/>
+            </a:fontRef>
+          </p:style>
+          <p:txBody>
+            <a:bodyPr rtlCol="0" anchor="ctr"/>
+            <a:lstStyle/>
+            <a:p>
+              <a:pPr algn="ctr"/>
+              <a:endParaRPr lang="en-US"/>
+            </a:p>
+          </p:txBody>
+        </p:sp>
+        <mc:AlternateContent xmlns:mc="http://schemas.openxmlformats.org/markup-compatibility/2006">
+          <mc:Choice xmlns:a14="http://schemas.microsoft.com/office/drawing/2010/main" Requires="a14">
+            <p:sp>
+              <p:nvSpPr>
+                <p:cNvPr id="102" name="TextBox 101"/>
+                <p:cNvSpPr txBox="1"/>
+                <p:nvPr/>
+              </p:nvSpPr>
+              <p:spPr>
+                <a:xfrm>
+                  <a:off x="3973584" y="4151664"/>
+                  <a:ext cx="472272" cy="782587"/>
+                </a:xfrm>
+                <a:prstGeom prst="rect">
+                  <a:avLst/>
+                </a:prstGeom>
+                <a:noFill/>
+              </p:spPr>
+              <p:txBody>
+                <a:bodyPr wrap="square" rtlCol="0">
+                  <a:spAutoFit/>
+                </a:bodyPr>
+                <a:lstStyle/>
+                <a:p>
+                  <a:pPr/>
+                  <a14:m>
+                    <m:oMathPara xmlns:m="http://schemas.openxmlformats.org/officeDocument/2006/math">
+                      <m:oMathParaPr>
+                        <m:jc m:val="centerGroup"/>
+                      </m:oMathParaPr>
+                      <m:oMath xmlns:m="http://schemas.openxmlformats.org/officeDocument/2006/math">
+                        <m:acc>
+                          <m:accPr>
+                            <m:chr m:val="⃗"/>
+                            <m:ctrlPr>
+                              <a:rPr lang="en-US" sz="4000" b="0" i="1" smtClean="0">
+                                <a:solidFill>
+                                  <a:srgbClr val="C55A11"/>
+                                </a:solidFill>
+                                <a:latin typeface="Cambria Math" panose="02040503050406030204" pitchFamily="18" charset="0"/>
+                              </a:rPr>
+                            </m:ctrlPr>
+                          </m:accPr>
+                          <m:e>
+                            <m:r>
+                              <a:rPr lang="en-US" sz="4000" b="0" i="1" smtClean="0">
+                                <a:solidFill>
+                                  <a:srgbClr val="C55A11"/>
+                                </a:solidFill>
+                                <a:latin typeface="Cambria Math" panose="02040503050406030204" pitchFamily="18" charset="0"/>
+                              </a:rPr>
+                              <m:t>𝐵</m:t>
+                            </m:r>
+                          </m:e>
+                        </m:acc>
+                      </m:oMath>
+                    </m:oMathPara>
+                  </a14:m>
+                  <a:endParaRPr lang="en-US" sz="4000" dirty="0">
+                    <a:solidFill>
+                      <a:srgbClr val="C55A11"/>
+                    </a:solidFill>
+                  </a:endParaRPr>
+                </a:p>
+              </p:txBody>
+            </p:sp>
+          </mc:Choice>
+          <mc:Fallback>
+            <p:sp>
+              <p:nvSpPr>
+                <p:cNvPr id="102" name="TextBox 101"/>
+                <p:cNvSpPr txBox="1">
+                  <a:spLocks noRot="1" noChangeAspect="1" noMove="1" noResize="1" noEditPoints="1" noAdjustHandles="1" noChangeArrowheads="1" noChangeShapeType="1" noTextEdit="1"/>
+                </p:cNvSpPr>
+                <p:nvPr/>
+              </p:nvSpPr>
+              <p:spPr>
+                <a:xfrm>
+                  <a:off x="3973584" y="4151664"/>
+                  <a:ext cx="472272" cy="782587"/>
+                </a:xfrm>
+                <a:prstGeom prst="rect">
+                  <a:avLst/>
+                </a:prstGeom>
+                <a:blipFill>
+                  <a:blip r:embed="rId15"/>
+                  <a:stretch>
+                    <a:fillRect/>
+                  </a:stretch>
+                </a:blipFill>
+              </p:spPr>
+              <p:txBody>
+                <a:bodyPr/>
+                <a:lstStyle/>
+                <a:p>
+                  <a:r>
+                    <a:rPr lang="en-US">
+                      <a:noFill/>
+                    </a:rPr>
+                    <a:t> </a:t>
+                  </a:r>
+                </a:p>
+              </p:txBody>
+            </p:sp>
+          </mc:Fallback>
+        </mc:AlternateContent>
+        <mc:AlternateContent xmlns:mc="http://schemas.openxmlformats.org/markup-compatibility/2006">
+          <mc:Choice xmlns:a14="http://schemas.microsoft.com/office/drawing/2010/main" Requires="a14">
+            <p:sp>
+              <p:nvSpPr>
+                <p:cNvPr id="103" name="TextBox 102"/>
+                <p:cNvSpPr txBox="1"/>
+                <p:nvPr/>
+              </p:nvSpPr>
+              <p:spPr>
+                <a:xfrm>
+                  <a:off x="3416777" y="4151664"/>
+                  <a:ext cx="472272" cy="782587"/>
+                </a:xfrm>
+                <a:prstGeom prst="rect">
+                  <a:avLst/>
+                </a:prstGeom>
+                <a:noFill/>
+              </p:spPr>
+              <p:txBody>
+                <a:bodyPr wrap="square" rtlCol="0">
+                  <a:spAutoFit/>
+                </a:bodyPr>
+                <a:lstStyle/>
+                <a:p>
+                  <a:pPr/>
+                  <a14:m>
+                    <m:oMathPara xmlns:m="http://schemas.openxmlformats.org/officeDocument/2006/math">
+                      <m:oMathParaPr>
+                        <m:jc m:val="centerGroup"/>
+                      </m:oMathParaPr>
+                      <m:oMath xmlns:m="http://schemas.openxmlformats.org/officeDocument/2006/math">
+                        <m:acc>
+                          <m:accPr>
+                            <m:chr m:val="⃗"/>
+                            <m:ctrlPr>
+                              <a:rPr lang="en-US" sz="4000" b="0" i="1" smtClean="0">
+                                <a:solidFill>
+                                  <a:srgbClr val="5B9BD5"/>
+                                </a:solidFill>
+                                <a:latin typeface="Cambria Math" panose="02040503050406030204" pitchFamily="18" charset="0"/>
+                              </a:rPr>
+                            </m:ctrlPr>
+                          </m:accPr>
+                          <m:e>
+                            <m:r>
+                              <a:rPr lang="en-US" sz="4000" b="0" i="1" smtClean="0">
+                                <a:solidFill>
+                                  <a:srgbClr val="5B9BD5"/>
+                                </a:solidFill>
+                                <a:latin typeface="Cambria Math" panose="02040503050406030204" pitchFamily="18" charset="0"/>
+                              </a:rPr>
+                              <m:t>𝐸</m:t>
+                            </m:r>
+                          </m:e>
+                        </m:acc>
+                      </m:oMath>
+                    </m:oMathPara>
+                  </a14:m>
+                  <a:endParaRPr lang="en-US" sz="4000" dirty="0">
+                    <a:solidFill>
+                      <a:srgbClr val="5B9BD5"/>
+                    </a:solidFill>
+                  </a:endParaRPr>
+                </a:p>
+              </p:txBody>
+            </p:sp>
+          </mc:Choice>
+          <mc:Fallback>
+            <p:sp>
+              <p:nvSpPr>
+                <p:cNvPr id="103" name="TextBox 102"/>
+                <p:cNvSpPr txBox="1">
+                  <a:spLocks noRot="1" noChangeAspect="1" noMove="1" noResize="1" noEditPoints="1" noAdjustHandles="1" noChangeArrowheads="1" noChangeShapeType="1" noTextEdit="1"/>
+                </p:cNvSpPr>
+                <p:nvPr/>
+              </p:nvSpPr>
+              <p:spPr>
+                <a:xfrm>
+                  <a:off x="3416777" y="4151664"/>
+                  <a:ext cx="472272" cy="782587"/>
+                </a:xfrm>
+                <a:prstGeom prst="rect">
+                  <a:avLst/>
+                </a:prstGeom>
+                <a:blipFill>
+                  <a:blip r:embed="rId16"/>
+                  <a:stretch>
+                    <a:fillRect/>
+                  </a:stretch>
+                </a:blipFill>
+              </p:spPr>
+              <p:txBody>
+                <a:bodyPr/>
+                <a:lstStyle/>
+                <a:p>
+                  <a:r>
+                    <a:rPr lang="en-US">
+                      <a:noFill/>
+                    </a:rPr>
+                    <a:t> </a:t>
+                  </a:r>
+                </a:p>
+              </p:txBody>
+            </p:sp>
+          </mc:Fallback>
+        </mc:AlternateContent>
+        <p:sp>
+          <p:nvSpPr>
+            <p:cNvPr id="104" name="Explosion 1 103"/>
+            <p:cNvSpPr/>
+            <p:nvPr/>
+          </p:nvSpPr>
+          <p:spPr>
+            <a:xfrm>
+              <a:off x="3264428" y="2781239"/>
+              <a:ext cx="307935" cy="376614"/>
+            </a:xfrm>
+            <a:prstGeom prst="irregularSeal1">
+              <a:avLst/>
+            </a:prstGeom>
+            <a:solidFill>
+              <a:srgbClr val="FF0000"/>
+            </a:solidFill>
+            <a:ln>
+              <a:solidFill>
+                <a:srgbClr val="C55A11"/>
+              </a:solidFill>
+            </a:ln>
+          </p:spPr>
+          <p:style>
+            <a:lnRef idx="2">
+              <a:schemeClr val="accent1">
+                <a:shade val="50000"/>
+              </a:schemeClr>
+            </a:lnRef>
+            <a:fillRef idx="1">
+              <a:schemeClr val="accent1"/>
+            </a:fillRef>
+            <a:effectRef idx="0">
+              <a:schemeClr val="accent1"/>
+            </a:effectRef>
+            <a:fontRef idx="minor">
+              <a:schemeClr val="lt1"/>
+            </a:fontRef>
+          </p:style>
+          <p:txBody>
+            <a:bodyPr rtlCol="0" anchor="ctr"/>
+            <a:lstStyle/>
+            <a:p>
+              <a:pPr algn="ctr"/>
+              <a:endParaRPr lang="en-US"/>
+            </a:p>
+          </p:txBody>
+        </p:sp>
         <mc:AlternateContent xmlns:mc="http://schemas.openxmlformats.org/markup-compatibility/2006">
           <mc:Choice xmlns:a14="http://schemas.microsoft.com/office/drawing/2010/main" Requires="a14">
             <p:sp>
@@ -5908,6 +5913,7 @@
                 </a:bodyPr>
                 <a:lstStyle/>
                 <a:p>
+                  <a:pPr/>
                   <a14:m>
                     <m:oMathPara xmlns:m="http://schemas.openxmlformats.org/officeDocument/2006/math">
                       <m:oMathParaPr>
